--- a/HealthAI_Architecture_Costs_Performance.pptx
+++ b/HealthAI_Architecture_Costs_Performance.pptx
@@ -7,15 +7,13 @@
   <p:sldIdLst>
     <p:sldId id="256" r:id="rId2"/>
     <p:sldId id="257" r:id="rId3"/>
-    <p:sldId id="258" r:id="rId4"/>
+    <p:sldId id="268" r:id="rId4"/>
     <p:sldId id="259" r:id="rId5"/>
-    <p:sldId id="260" r:id="rId6"/>
+    <p:sldId id="267" r:id="rId6"/>
     <p:sldId id="261" r:id="rId7"/>
-    <p:sldId id="262" r:id="rId8"/>
-    <p:sldId id="263" r:id="rId9"/>
-    <p:sldId id="264" r:id="rId10"/>
-    <p:sldId id="265" r:id="rId11"/>
-    <p:sldId id="266" r:id="rId12"/>
+    <p:sldId id="258" r:id="rId8"/>
+    <p:sldId id="262" r:id="rId9"/>
+    <p:sldId id="266" r:id="rId10"/>
   </p:sldIdLst>
   <p:sldSz cx="9144000" cy="6858000" type="screen4x3"/>
   <p:notesSz cx="6858000" cy="9144000"/>
@@ -136,7 +134,7 @@
 <file path=ppt/revisionInfo.xml><?xml version="1.0" encoding="utf-8"?>
 <p1510:revInfo xmlns:a="http://schemas.openxmlformats.org/drawingml/2006/main" xmlns:r="http://schemas.openxmlformats.org/officeDocument/2006/relationships" xmlns:p1510="http://schemas.microsoft.com/office/powerpoint/2015/10/main">
   <p1510:revLst>
-    <p1510:client id="{ECF6F3D4-B9B3-42A8-8C66-725A1BA4C495}" v="5" dt="2025-12-15T11:50:35.474"/>
+    <p1510:client id="{4A1C6F72-170A-4F1C-A3BB-4A2404FC5A19}" v="6" dt="2026-01-12T21:22:46.070"/>
   </p1510:revLst>
 </p1510:revInfo>
 </file>
@@ -145,27 +143,42 @@
 <pc:chgInfo xmlns:a="http://schemas.openxmlformats.org/drawingml/2006/main" xmlns:r="http://schemas.openxmlformats.org/officeDocument/2006/relationships" xmlns:ac="http://schemas.microsoft.com/office/drawing/2013/main/command" xmlns:pc="http://schemas.microsoft.com/office/powerpoint/2013/main/command">
   <pc:docChgLst>
     <pc:chgData name="charles mccarthy" userId="c6971f366e65dfa3" providerId="LiveId" clId="{BAF8EF68-B7AB-4503-9648-829263EF8DA0}"/>
-    <pc:docChg chg="custSel modSld">
-      <pc:chgData name="charles mccarthy" userId="c6971f366e65dfa3" providerId="LiveId" clId="{BAF8EF68-B7AB-4503-9648-829263EF8DA0}" dt="2025-12-15T11:50:57.141" v="42" actId="1076"/>
+    <pc:docChg chg="undo custSel addSld delSld modSld sldOrd">
+      <pc:chgData name="charles mccarthy" userId="c6971f366e65dfa3" providerId="LiveId" clId="{BAF8EF68-B7AB-4503-9648-829263EF8DA0}" dt="2026-01-12T21:28:49.960" v="481" actId="20577"/>
       <pc:docMkLst>
         <pc:docMk/>
       </pc:docMkLst>
+      <pc:sldChg chg="modSp mod">
+        <pc:chgData name="charles mccarthy" userId="c6971f366e65dfa3" providerId="LiveId" clId="{BAF8EF68-B7AB-4503-9648-829263EF8DA0}" dt="2026-01-12T21:18:44.775" v="200" actId="113"/>
+        <pc:sldMkLst>
+          <pc:docMk/>
+          <pc:sldMk cId="0" sldId="256"/>
+        </pc:sldMkLst>
+        <pc:spChg chg="mod">
+          <ac:chgData name="charles mccarthy" userId="c6971f366e65dfa3" providerId="LiveId" clId="{BAF8EF68-B7AB-4503-9648-829263EF8DA0}" dt="2026-01-12T21:18:44.775" v="200" actId="113"/>
+          <ac:spMkLst>
+            <pc:docMk/>
+            <pc:sldMk cId="0" sldId="256"/>
+            <ac:spMk id="2" creationId="{00000000-0000-0000-0000-000000000000}"/>
+          </ac:spMkLst>
+        </pc:spChg>
+        <pc:spChg chg="mod">
+          <ac:chgData name="charles mccarthy" userId="c6971f366e65dfa3" providerId="LiveId" clId="{BAF8EF68-B7AB-4503-9648-829263EF8DA0}" dt="2026-01-12T21:17:26.240" v="199" actId="20577"/>
+          <ac:spMkLst>
+            <pc:docMk/>
+            <pc:sldMk cId="0" sldId="256"/>
+            <ac:spMk id="3" creationId="{00000000-0000-0000-0000-000000000000}"/>
+          </ac:spMkLst>
+        </pc:spChg>
+      </pc:sldChg>
       <pc:sldChg chg="addSp delSp modSp mod">
-        <pc:chgData name="charles mccarthy" userId="c6971f366e65dfa3" providerId="LiveId" clId="{BAF8EF68-B7AB-4503-9648-829263EF8DA0}" dt="2025-12-15T11:50:57.141" v="42" actId="1076"/>
+        <pc:chgData name="charles mccarthy" userId="c6971f366e65dfa3" providerId="LiveId" clId="{BAF8EF68-B7AB-4503-9648-829263EF8DA0}" dt="2026-01-12T21:19:38.431" v="207" actId="20577"/>
         <pc:sldMkLst>
           <pc:docMk/>
           <pc:sldMk cId="0" sldId="257"/>
         </pc:sldMkLst>
-        <pc:spChg chg="del">
-          <ac:chgData name="charles mccarthy" userId="c6971f366e65dfa3" providerId="LiveId" clId="{BAF8EF68-B7AB-4503-9648-829263EF8DA0}" dt="2025-12-15T11:50:49.449" v="39" actId="478"/>
-          <ac:spMkLst>
-            <pc:docMk/>
-            <pc:sldMk cId="0" sldId="257"/>
-            <ac:spMk id="2" creationId="{00000000-0000-0000-0000-000000000000}"/>
-          </ac:spMkLst>
-        </pc:spChg>
         <pc:spChg chg="mod">
-          <ac:chgData name="charles mccarthy" userId="c6971f366e65dfa3" providerId="LiveId" clId="{BAF8EF68-B7AB-4503-9648-829263EF8DA0}" dt="2025-12-15T11:50:46.635" v="38" actId="5793"/>
+          <ac:chgData name="charles mccarthy" userId="c6971f366e65dfa3" providerId="LiveId" clId="{BAF8EF68-B7AB-4503-9648-829263EF8DA0}" dt="2026-01-12T21:17:10.390" v="194" actId="20577"/>
           <ac:spMkLst>
             <pc:docMk/>
             <pc:sldMk cId="0" sldId="257"/>
@@ -173,27 +186,11 @@
           </ac:spMkLst>
         </pc:spChg>
         <pc:spChg chg="mod">
-          <ac:chgData name="charles mccarthy" userId="c6971f366e65dfa3" providerId="LiveId" clId="{BAF8EF68-B7AB-4503-9648-829263EF8DA0}" dt="2025-12-15T11:50:57.141" v="42" actId="1076"/>
+          <ac:chgData name="charles mccarthy" userId="c6971f366e65dfa3" providerId="LiveId" clId="{BAF8EF68-B7AB-4503-9648-829263EF8DA0}" dt="2026-01-12T21:19:38.431" v="207" actId="20577"/>
           <ac:spMkLst>
             <pc:docMk/>
             <pc:sldMk cId="0" sldId="257"/>
             <ac:spMk id="4" creationId="{00000000-0000-0000-0000-000000000000}"/>
-          </ac:spMkLst>
-        </pc:spChg>
-        <pc:spChg chg="del">
-          <ac:chgData name="charles mccarthy" userId="c6971f366e65dfa3" providerId="LiveId" clId="{BAF8EF68-B7AB-4503-9648-829263EF8DA0}" dt="2025-12-15T11:49:59.137" v="15" actId="478"/>
-          <ac:spMkLst>
-            <pc:docMk/>
-            <pc:sldMk cId="0" sldId="257"/>
-            <ac:spMk id="5" creationId="{00000000-0000-0000-0000-000000000000}"/>
-          </ac:spMkLst>
-        </pc:spChg>
-        <pc:spChg chg="del mod">
-          <ac:chgData name="charles mccarthy" userId="c6971f366e65dfa3" providerId="LiveId" clId="{BAF8EF68-B7AB-4503-9648-829263EF8DA0}" dt="2025-12-15T11:50:06.201" v="19" actId="478"/>
-          <ac:spMkLst>
-            <pc:docMk/>
-            <pc:sldMk cId="0" sldId="257"/>
-            <ac:spMk id="6" creationId="{00000000-0000-0000-0000-000000000000}"/>
           </ac:spMkLst>
         </pc:spChg>
         <pc:spChg chg="add mod">
@@ -276,6 +273,331 @@
             <ac:cxnSpMk id="17" creationId="{ED05C135-B182-2AA8-A464-44BAFE75EAD2}"/>
           </ac:cxnSpMkLst>
         </pc:cxnChg>
+      </pc:sldChg>
+      <pc:sldChg chg="delSp mod ord">
+        <pc:chgData name="charles mccarthy" userId="c6971f366e65dfa3" providerId="LiveId" clId="{BAF8EF68-B7AB-4503-9648-829263EF8DA0}" dt="2026-01-12T11:45:46.419" v="150" actId="478"/>
+        <pc:sldMkLst>
+          <pc:docMk/>
+          <pc:sldMk cId="0" sldId="258"/>
+        </pc:sldMkLst>
+        <pc:spChg chg="del">
+          <ac:chgData name="charles mccarthy" userId="c6971f366e65dfa3" providerId="LiveId" clId="{BAF8EF68-B7AB-4503-9648-829263EF8DA0}" dt="2026-01-12T11:45:46.419" v="150" actId="478"/>
+          <ac:spMkLst>
+            <pc:docMk/>
+            <pc:sldMk cId="0" sldId="258"/>
+            <ac:spMk id="2" creationId="{00000000-0000-0000-0000-000000000000}"/>
+          </ac:spMkLst>
+        </pc:spChg>
+      </pc:sldChg>
+      <pc:sldChg chg="addSp delSp modSp mod">
+        <pc:chgData name="charles mccarthy" userId="c6971f366e65dfa3" providerId="LiveId" clId="{BAF8EF68-B7AB-4503-9648-829263EF8DA0}" dt="2026-01-12T11:45:58.679" v="151" actId="1076"/>
+        <pc:sldMkLst>
+          <pc:docMk/>
+          <pc:sldMk cId="0" sldId="259"/>
+        </pc:sldMkLst>
+        <pc:spChg chg="del mod">
+          <ac:chgData name="charles mccarthy" userId="c6971f366e65dfa3" providerId="LiveId" clId="{BAF8EF68-B7AB-4503-9648-829263EF8DA0}" dt="2026-01-12T11:26:38.831" v="61" actId="478"/>
+          <ac:spMkLst>
+            <pc:docMk/>
+            <pc:sldMk cId="0" sldId="259"/>
+            <ac:spMk id="2" creationId="{00000000-0000-0000-0000-000000000000}"/>
+          </ac:spMkLst>
+        </pc:spChg>
+        <pc:spChg chg="mod">
+          <ac:chgData name="charles mccarthy" userId="c6971f366e65dfa3" providerId="LiveId" clId="{BAF8EF68-B7AB-4503-9648-829263EF8DA0}" dt="2026-01-12T11:27:45.597" v="120" actId="20577"/>
+          <ac:spMkLst>
+            <pc:docMk/>
+            <pc:sldMk cId="0" sldId="259"/>
+            <ac:spMk id="3" creationId="{00000000-0000-0000-0000-000000000000}"/>
+          </ac:spMkLst>
+        </pc:spChg>
+        <pc:spChg chg="del">
+          <ac:chgData name="charles mccarthy" userId="c6971f366e65dfa3" providerId="LiveId" clId="{BAF8EF68-B7AB-4503-9648-829263EF8DA0}" dt="2026-01-12T11:26:36.149" v="59" actId="478"/>
+          <ac:spMkLst>
+            <pc:docMk/>
+            <pc:sldMk cId="0" sldId="259"/>
+            <ac:spMk id="4" creationId="{00000000-0000-0000-0000-000000000000}"/>
+          </ac:spMkLst>
+        </pc:spChg>
+        <pc:spChg chg="del">
+          <ac:chgData name="charles mccarthy" userId="c6971f366e65dfa3" providerId="LiveId" clId="{BAF8EF68-B7AB-4503-9648-829263EF8DA0}" dt="2026-01-12T11:26:36.149" v="59" actId="478"/>
+          <ac:spMkLst>
+            <pc:docMk/>
+            <pc:sldMk cId="0" sldId="259"/>
+            <ac:spMk id="5" creationId="{00000000-0000-0000-0000-000000000000}"/>
+          </ac:spMkLst>
+        </pc:spChg>
+        <pc:spChg chg="del">
+          <ac:chgData name="charles mccarthy" userId="c6971f366e65dfa3" providerId="LiveId" clId="{BAF8EF68-B7AB-4503-9648-829263EF8DA0}" dt="2026-01-12T11:26:36.149" v="59" actId="478"/>
+          <ac:spMkLst>
+            <pc:docMk/>
+            <pc:sldMk cId="0" sldId="259"/>
+            <ac:spMk id="6" creationId="{00000000-0000-0000-0000-000000000000}"/>
+          </ac:spMkLst>
+        </pc:spChg>
+        <pc:spChg chg="del">
+          <ac:chgData name="charles mccarthy" userId="c6971f366e65dfa3" providerId="LiveId" clId="{BAF8EF68-B7AB-4503-9648-829263EF8DA0}" dt="2026-01-12T11:26:33.357" v="58" actId="478"/>
+          <ac:spMkLst>
+            <pc:docMk/>
+            <pc:sldMk cId="0" sldId="259"/>
+            <ac:spMk id="9" creationId="{00000000-0000-0000-0000-000000000000}"/>
+          </ac:spMkLst>
+        </pc:spChg>
+        <pc:spChg chg="del">
+          <ac:chgData name="charles mccarthy" userId="c6971f366e65dfa3" providerId="LiveId" clId="{BAF8EF68-B7AB-4503-9648-829263EF8DA0}" dt="2026-01-12T11:26:33.357" v="58" actId="478"/>
+          <ac:spMkLst>
+            <pc:docMk/>
+            <pc:sldMk cId="0" sldId="259"/>
+            <ac:spMk id="10" creationId="{00000000-0000-0000-0000-000000000000}"/>
+          </ac:spMkLst>
+        </pc:spChg>
+        <pc:spChg chg="del">
+          <ac:chgData name="charles mccarthy" userId="c6971f366e65dfa3" providerId="LiveId" clId="{BAF8EF68-B7AB-4503-9648-829263EF8DA0}" dt="2026-01-12T11:26:33.357" v="58" actId="478"/>
+          <ac:spMkLst>
+            <pc:docMk/>
+            <pc:sldMk cId="0" sldId="259"/>
+            <ac:spMk id="12" creationId="{00000000-0000-0000-0000-000000000000}"/>
+          </ac:spMkLst>
+        </pc:spChg>
+        <pc:spChg chg="del">
+          <ac:chgData name="charles mccarthy" userId="c6971f366e65dfa3" providerId="LiveId" clId="{BAF8EF68-B7AB-4503-9648-829263EF8DA0}" dt="2026-01-12T11:26:33.357" v="58" actId="478"/>
+          <ac:spMkLst>
+            <pc:docMk/>
+            <pc:sldMk cId="0" sldId="259"/>
+            <ac:spMk id="14" creationId="{00000000-0000-0000-0000-000000000000}"/>
+          </ac:spMkLst>
+        </pc:spChg>
+        <pc:spChg chg="del">
+          <ac:chgData name="charles mccarthy" userId="c6971f366e65dfa3" providerId="LiveId" clId="{BAF8EF68-B7AB-4503-9648-829263EF8DA0}" dt="2026-01-12T11:26:33.357" v="58" actId="478"/>
+          <ac:spMkLst>
+            <pc:docMk/>
+            <pc:sldMk cId="0" sldId="259"/>
+            <ac:spMk id="17" creationId="{00000000-0000-0000-0000-000000000000}"/>
+          </ac:spMkLst>
+        </pc:spChg>
+        <pc:spChg chg="del">
+          <ac:chgData name="charles mccarthy" userId="c6971f366e65dfa3" providerId="LiveId" clId="{BAF8EF68-B7AB-4503-9648-829263EF8DA0}" dt="2026-01-12T11:26:33.357" v="58" actId="478"/>
+          <ac:spMkLst>
+            <pc:docMk/>
+            <pc:sldMk cId="0" sldId="259"/>
+            <ac:spMk id="18" creationId="{00000000-0000-0000-0000-000000000000}"/>
+          </ac:spMkLst>
+        </pc:spChg>
+        <pc:spChg chg="del">
+          <ac:chgData name="charles mccarthy" userId="c6971f366e65dfa3" providerId="LiveId" clId="{BAF8EF68-B7AB-4503-9648-829263EF8DA0}" dt="2026-01-12T11:26:33.357" v="58" actId="478"/>
+          <ac:spMkLst>
+            <pc:docMk/>
+            <pc:sldMk cId="0" sldId="259"/>
+            <ac:spMk id="20" creationId="{00000000-0000-0000-0000-000000000000}"/>
+          </ac:spMkLst>
+        </pc:spChg>
+        <pc:spChg chg="del">
+          <ac:chgData name="charles mccarthy" userId="c6971f366e65dfa3" providerId="LiveId" clId="{BAF8EF68-B7AB-4503-9648-829263EF8DA0}" dt="2026-01-12T11:26:33.357" v="58" actId="478"/>
+          <ac:spMkLst>
+            <pc:docMk/>
+            <pc:sldMk cId="0" sldId="259"/>
+            <ac:spMk id="22" creationId="{00000000-0000-0000-0000-000000000000}"/>
+          </ac:spMkLst>
+        </pc:spChg>
+        <pc:spChg chg="del">
+          <ac:chgData name="charles mccarthy" userId="c6971f366e65dfa3" providerId="LiveId" clId="{BAF8EF68-B7AB-4503-9648-829263EF8DA0}" dt="2026-01-12T11:26:33.357" v="58" actId="478"/>
+          <ac:spMkLst>
+            <pc:docMk/>
+            <pc:sldMk cId="0" sldId="259"/>
+            <ac:spMk id="23" creationId="{00000000-0000-0000-0000-000000000000}"/>
+          </ac:spMkLst>
+        </pc:spChg>
+        <pc:spChg chg="del">
+          <ac:chgData name="charles mccarthy" userId="c6971f366e65dfa3" providerId="LiveId" clId="{BAF8EF68-B7AB-4503-9648-829263EF8DA0}" dt="2026-01-12T11:26:33.357" v="58" actId="478"/>
+          <ac:spMkLst>
+            <pc:docMk/>
+            <pc:sldMk cId="0" sldId="259"/>
+            <ac:spMk id="27" creationId="{00000000-0000-0000-0000-000000000000}"/>
+          </ac:spMkLst>
+        </pc:spChg>
+        <pc:spChg chg="add mod">
+          <ac:chgData name="charles mccarthy" userId="c6971f366e65dfa3" providerId="LiveId" clId="{BAF8EF68-B7AB-4503-9648-829263EF8DA0}" dt="2026-01-12T11:45:58.679" v="151" actId="1076"/>
+          <ac:spMkLst>
+            <pc:docMk/>
+            <pc:sldMk cId="0" sldId="259"/>
+            <ac:spMk id="28" creationId="{EA9CF6AA-2977-84A7-0DAC-F198C8E76F6A}"/>
+          </ac:spMkLst>
+        </pc:spChg>
+      </pc:sldChg>
+      <pc:sldChg chg="delSp modSp del mod">
+        <pc:chgData name="charles mccarthy" userId="c6971f366e65dfa3" providerId="LiveId" clId="{BAF8EF68-B7AB-4503-9648-829263EF8DA0}" dt="2026-01-12T11:27:53.415" v="121" actId="47"/>
+        <pc:sldMkLst>
+          <pc:docMk/>
+          <pc:sldMk cId="0" sldId="260"/>
+        </pc:sldMkLst>
+        <pc:spChg chg="del">
+          <ac:chgData name="charles mccarthy" userId="c6971f366e65dfa3" providerId="LiveId" clId="{BAF8EF68-B7AB-4503-9648-829263EF8DA0}" dt="2026-01-12T11:26:21.479" v="56" actId="478"/>
+          <ac:spMkLst>
+            <pc:docMk/>
+            <pc:sldMk cId="0" sldId="260"/>
+            <ac:spMk id="2" creationId="{00000000-0000-0000-0000-000000000000}"/>
+          </ac:spMkLst>
+        </pc:spChg>
+        <pc:spChg chg="mod">
+          <ac:chgData name="charles mccarthy" userId="c6971f366e65dfa3" providerId="LiveId" clId="{BAF8EF68-B7AB-4503-9648-829263EF8DA0}" dt="2026-01-12T11:26:26.462" v="57" actId="1076"/>
+          <ac:spMkLst>
+            <pc:docMk/>
+            <pc:sldMk cId="0" sldId="260"/>
+            <ac:spMk id="4" creationId="{00000000-0000-0000-0000-000000000000}"/>
+          </ac:spMkLst>
+        </pc:spChg>
+      </pc:sldChg>
+      <pc:sldChg chg="addSp delSp mod">
+        <pc:chgData name="charles mccarthy" userId="c6971f366e65dfa3" providerId="LiveId" clId="{BAF8EF68-B7AB-4503-9648-829263EF8DA0}" dt="2026-01-12T11:26:13.258" v="55" actId="478"/>
+        <pc:sldMkLst>
+          <pc:docMk/>
+          <pc:sldMk cId="0" sldId="261"/>
+        </pc:sldMkLst>
+        <pc:spChg chg="del">
+          <ac:chgData name="charles mccarthy" userId="c6971f366e65dfa3" providerId="LiveId" clId="{BAF8EF68-B7AB-4503-9648-829263EF8DA0}" dt="2026-01-12T11:26:13.258" v="55" actId="478"/>
+          <ac:spMkLst>
+            <pc:docMk/>
+            <pc:sldMk cId="0" sldId="261"/>
+            <ac:spMk id="2" creationId="{00000000-0000-0000-0000-000000000000}"/>
+          </ac:spMkLst>
+        </pc:spChg>
+        <pc:spChg chg="add del">
+          <ac:chgData name="charles mccarthy" userId="c6971f366e65dfa3" providerId="LiveId" clId="{BAF8EF68-B7AB-4503-9648-829263EF8DA0}" dt="2026-01-12T11:26:09.454" v="54" actId="478"/>
+          <ac:spMkLst>
+            <pc:docMk/>
+            <pc:sldMk cId="0" sldId="261"/>
+            <ac:spMk id="3" creationId="{00000000-0000-0000-0000-000000000000}"/>
+          </ac:spMkLst>
+        </pc:spChg>
+      </pc:sldChg>
+      <pc:sldChg chg="delSp modSp mod">
+        <pc:chgData name="charles mccarthy" userId="c6971f366e65dfa3" providerId="LiveId" clId="{BAF8EF68-B7AB-4503-9648-829263EF8DA0}" dt="2026-01-12T11:25:59.383" v="52" actId="478"/>
+        <pc:sldMkLst>
+          <pc:docMk/>
+          <pc:sldMk cId="0" sldId="262"/>
+        </pc:sldMkLst>
+        <pc:spChg chg="del mod">
+          <ac:chgData name="charles mccarthy" userId="c6971f366e65dfa3" providerId="LiveId" clId="{BAF8EF68-B7AB-4503-9648-829263EF8DA0}" dt="2026-01-12T11:25:59.383" v="52" actId="478"/>
+          <ac:spMkLst>
+            <pc:docMk/>
+            <pc:sldMk cId="0" sldId="262"/>
+            <ac:spMk id="2" creationId="{00000000-0000-0000-0000-000000000000}"/>
+          </ac:spMkLst>
+        </pc:spChg>
+      </pc:sldChg>
+      <pc:sldChg chg="del">
+        <pc:chgData name="charles mccarthy" userId="c6971f366e65dfa3" providerId="LiveId" clId="{BAF8EF68-B7AB-4503-9648-829263EF8DA0}" dt="2026-01-12T11:25:51.099" v="50" actId="47"/>
+        <pc:sldMkLst>
+          <pc:docMk/>
+          <pc:sldMk cId="0" sldId="263"/>
+        </pc:sldMkLst>
+      </pc:sldChg>
+      <pc:sldChg chg="del">
+        <pc:chgData name="charles mccarthy" userId="c6971f366e65dfa3" providerId="LiveId" clId="{BAF8EF68-B7AB-4503-9648-829263EF8DA0}" dt="2026-01-12T11:25:49.308" v="49" actId="47"/>
+        <pc:sldMkLst>
+          <pc:docMk/>
+          <pc:sldMk cId="0" sldId="264"/>
+        </pc:sldMkLst>
+      </pc:sldChg>
+      <pc:sldChg chg="del">
+        <pc:chgData name="charles mccarthy" userId="c6971f366e65dfa3" providerId="LiveId" clId="{BAF8EF68-B7AB-4503-9648-829263EF8DA0}" dt="2026-01-12T11:25:47.162" v="48" actId="47"/>
+        <pc:sldMkLst>
+          <pc:docMk/>
+          <pc:sldMk cId="0" sldId="265"/>
+        </pc:sldMkLst>
+      </pc:sldChg>
+      <pc:sldChg chg="delSp modSp mod">
+        <pc:chgData name="charles mccarthy" userId="c6971f366e65dfa3" providerId="LiveId" clId="{BAF8EF68-B7AB-4503-9648-829263EF8DA0}" dt="2026-01-12T11:25:42.054" v="47" actId="1076"/>
+        <pc:sldMkLst>
+          <pc:docMk/>
+          <pc:sldMk cId="0" sldId="266"/>
+        </pc:sldMkLst>
+        <pc:spChg chg="del mod">
+          <ac:chgData name="charles mccarthy" userId="c6971f366e65dfa3" providerId="LiveId" clId="{BAF8EF68-B7AB-4503-9648-829263EF8DA0}" dt="2026-01-12T11:25:39.380" v="46" actId="478"/>
+          <ac:spMkLst>
+            <pc:docMk/>
+            <pc:sldMk cId="0" sldId="266"/>
+            <ac:spMk id="2" creationId="{00000000-0000-0000-0000-000000000000}"/>
+          </ac:spMkLst>
+        </pc:spChg>
+        <pc:spChg chg="mod">
+          <ac:chgData name="charles mccarthy" userId="c6971f366e65dfa3" providerId="LiveId" clId="{BAF8EF68-B7AB-4503-9648-829263EF8DA0}" dt="2026-01-12T11:25:37.448" v="45" actId="1076"/>
+          <ac:spMkLst>
+            <pc:docMk/>
+            <pc:sldMk cId="0" sldId="266"/>
+            <ac:spMk id="3" creationId="{00000000-0000-0000-0000-000000000000}"/>
+          </ac:spMkLst>
+        </pc:spChg>
+        <pc:spChg chg="mod">
+          <ac:chgData name="charles mccarthy" userId="c6971f366e65dfa3" providerId="LiveId" clId="{BAF8EF68-B7AB-4503-9648-829263EF8DA0}" dt="2026-01-12T11:25:42.054" v="47" actId="1076"/>
+          <ac:spMkLst>
+            <pc:docMk/>
+            <pc:sldMk cId="0" sldId="266"/>
+            <ac:spMk id="4" creationId="{00000000-0000-0000-0000-000000000000}"/>
+          </ac:spMkLst>
+        </pc:spChg>
+      </pc:sldChg>
+      <pc:sldChg chg="modSp add mod">
+        <pc:chgData name="charles mccarthy" userId="c6971f366e65dfa3" providerId="LiveId" clId="{BAF8EF68-B7AB-4503-9648-829263EF8DA0}" dt="2026-01-12T11:29:37.138" v="145" actId="20577"/>
+        <pc:sldMkLst>
+          <pc:docMk/>
+          <pc:sldMk cId="4016603785" sldId="267"/>
+        </pc:sldMkLst>
+        <pc:spChg chg="mod">
+          <ac:chgData name="charles mccarthy" userId="c6971f366e65dfa3" providerId="LiveId" clId="{BAF8EF68-B7AB-4503-9648-829263EF8DA0}" dt="2026-01-12T11:29:37.138" v="145" actId="20577"/>
+          <ac:spMkLst>
+            <pc:docMk/>
+            <pc:sldMk cId="4016603785" sldId="267"/>
+            <ac:spMk id="28" creationId="{D8BE4BA0-0605-5EB2-8A7B-E549FB8EFE65}"/>
+          </ac:spMkLst>
+        </pc:spChg>
+      </pc:sldChg>
+      <pc:sldChg chg="modSp add mod">
+        <pc:chgData name="charles mccarthy" userId="c6971f366e65dfa3" providerId="LiveId" clId="{BAF8EF68-B7AB-4503-9648-829263EF8DA0}" dt="2026-01-12T21:28:49.960" v="481" actId="20577"/>
+        <pc:sldMkLst>
+          <pc:docMk/>
+          <pc:sldMk cId="3772832546" sldId="268"/>
+        </pc:sldMkLst>
+        <pc:spChg chg="mod">
+          <ac:chgData name="charles mccarthy" userId="c6971f366e65dfa3" providerId="LiveId" clId="{BAF8EF68-B7AB-4503-9648-829263EF8DA0}" dt="2026-01-12T21:20:06.664" v="216" actId="20577"/>
+          <ac:spMkLst>
+            <pc:docMk/>
+            <pc:sldMk cId="3772832546" sldId="268"/>
+            <ac:spMk id="3" creationId="{75CF4511-2D76-84C9-9332-44EC0517B03C}"/>
+          </ac:spMkLst>
+        </pc:spChg>
+        <pc:spChg chg="mod">
+          <ac:chgData name="charles mccarthy" userId="c6971f366e65dfa3" providerId="LiveId" clId="{BAF8EF68-B7AB-4503-9648-829263EF8DA0}" dt="2026-01-12T21:28:49.960" v="481" actId="20577"/>
+          <ac:spMkLst>
+            <pc:docMk/>
+            <pc:sldMk cId="3772832546" sldId="268"/>
+            <ac:spMk id="4" creationId="{0658D8D6-9C08-7910-3A0B-12F24834D7E9}"/>
+          </ac:spMkLst>
+        </pc:spChg>
+        <pc:spChg chg="mod">
+          <ac:chgData name="charles mccarthy" userId="c6971f366e65dfa3" providerId="LiveId" clId="{BAF8EF68-B7AB-4503-9648-829263EF8DA0}" dt="2026-01-12T21:23:01.725" v="419" actId="313"/>
+          <ac:spMkLst>
+            <pc:docMk/>
+            <pc:sldMk cId="3772832546" sldId="268"/>
+            <ac:spMk id="11" creationId="{8D670C99-C14C-2F49-619E-E7AC8BE4904B}"/>
+          </ac:spMkLst>
+        </pc:spChg>
+        <pc:picChg chg="mod">
+          <ac:chgData name="charles mccarthy" userId="c6971f366e65dfa3" providerId="LiveId" clId="{BAF8EF68-B7AB-4503-9648-829263EF8DA0}" dt="2026-01-12T21:22:42.121" v="417" actId="14100"/>
+          <ac:picMkLst>
+            <pc:docMk/>
+            <pc:sldMk cId="3772832546" sldId="268"/>
+            <ac:picMk id="10" creationId="{00CD0568-2606-8212-BE04-74B482FF111F}"/>
+          </ac:picMkLst>
+        </pc:picChg>
+        <pc:picChg chg="mod">
+          <ac:chgData name="charles mccarthy" userId="c6971f366e65dfa3" providerId="LiveId" clId="{BAF8EF68-B7AB-4503-9648-829263EF8DA0}" dt="2026-01-12T21:22:46.068" v="418" actId="14100"/>
+          <ac:picMkLst>
+            <pc:docMk/>
+            <pc:sldMk cId="3772832546" sldId="268"/>
+            <ac:picMk id="12" creationId="{9B4ED7DD-AD17-5CCB-4C49-B56F8A93A028}"/>
+          </ac:picMkLst>
+        </pc:picChg>
       </pc:sldChg>
     </pc:docChg>
   </pc:docChgLst>
@@ -461,7 +783,7 @@
           <a:p>
             <a:fld id="{5BCAD085-E8A6-8845-BD4E-CB4CCA059FC4}" type="datetimeFigureOut">
               <a:rPr lang="en-US" smtClean="0"/>
-              <a:t>12/15/2025</a:t>
+              <a:t>1/12/2026</a:t>
             </a:fld>
             <a:endParaRPr lang="en-US"/>
           </a:p>
@@ -629,7 +951,7 @@
           <a:p>
             <a:fld id="{5BCAD085-E8A6-8845-BD4E-CB4CCA059FC4}" type="datetimeFigureOut">
               <a:rPr lang="en-US" smtClean="0"/>
-              <a:t>12/15/2025</a:t>
+              <a:t>1/12/2026</a:t>
             </a:fld>
             <a:endParaRPr lang="en-US"/>
           </a:p>
@@ -807,7 +1129,7 @@
           <a:p>
             <a:fld id="{5BCAD085-E8A6-8845-BD4E-CB4CCA059FC4}" type="datetimeFigureOut">
               <a:rPr lang="en-US" smtClean="0"/>
-              <a:t>12/15/2025</a:t>
+              <a:t>1/12/2026</a:t>
             </a:fld>
             <a:endParaRPr lang="en-US"/>
           </a:p>
@@ -975,7 +1297,7 @@
           <a:p>
             <a:fld id="{5BCAD085-E8A6-8845-BD4E-CB4CCA059FC4}" type="datetimeFigureOut">
               <a:rPr lang="en-US" smtClean="0"/>
-              <a:t>12/15/2025</a:t>
+              <a:t>1/12/2026</a:t>
             </a:fld>
             <a:endParaRPr lang="en-US"/>
           </a:p>
@@ -1220,7 +1542,7 @@
           <a:p>
             <a:fld id="{5BCAD085-E8A6-8845-BD4E-CB4CCA059FC4}" type="datetimeFigureOut">
               <a:rPr lang="en-US" smtClean="0"/>
-              <a:t>12/15/2025</a:t>
+              <a:t>1/12/2026</a:t>
             </a:fld>
             <a:endParaRPr lang="en-US"/>
           </a:p>
@@ -1505,7 +1827,7 @@
           <a:p>
             <a:fld id="{5BCAD085-E8A6-8845-BD4E-CB4CCA059FC4}" type="datetimeFigureOut">
               <a:rPr lang="en-US" smtClean="0"/>
-              <a:t>12/15/2025</a:t>
+              <a:t>1/12/2026</a:t>
             </a:fld>
             <a:endParaRPr lang="en-US"/>
           </a:p>
@@ -1924,7 +2246,7 @@
           <a:p>
             <a:fld id="{5BCAD085-E8A6-8845-BD4E-CB4CCA059FC4}" type="datetimeFigureOut">
               <a:rPr lang="en-US" smtClean="0"/>
-              <a:t>12/15/2025</a:t>
+              <a:t>1/12/2026</a:t>
             </a:fld>
             <a:endParaRPr lang="en-US"/>
           </a:p>
@@ -2041,7 +2363,7 @@
           <a:p>
             <a:fld id="{5BCAD085-E8A6-8845-BD4E-CB4CCA059FC4}" type="datetimeFigureOut">
               <a:rPr lang="en-US" smtClean="0"/>
-              <a:t>12/15/2025</a:t>
+              <a:t>1/12/2026</a:t>
             </a:fld>
             <a:endParaRPr lang="en-US"/>
           </a:p>
@@ -2136,7 +2458,7 @@
           <a:p>
             <a:fld id="{5BCAD085-E8A6-8845-BD4E-CB4CCA059FC4}" type="datetimeFigureOut">
               <a:rPr lang="en-US" smtClean="0"/>
-              <a:t>12/15/2025</a:t>
+              <a:t>1/12/2026</a:t>
             </a:fld>
             <a:endParaRPr lang="en-US"/>
           </a:p>
@@ -2411,7 +2733,7 @@
           <a:p>
             <a:fld id="{5BCAD085-E8A6-8845-BD4E-CB4CCA059FC4}" type="datetimeFigureOut">
               <a:rPr lang="en-US" smtClean="0"/>
-              <a:t>12/15/2025</a:t>
+              <a:t>1/12/2026</a:t>
             </a:fld>
             <a:endParaRPr lang="en-US"/>
           </a:p>
@@ -2663,7 +2985,7 @@
           <a:p>
             <a:fld id="{5BCAD085-E8A6-8845-BD4E-CB4CCA059FC4}" type="datetimeFigureOut">
               <a:rPr lang="en-US" smtClean="0"/>
-              <a:t>12/15/2025</a:t>
+              <a:t>1/12/2026</a:t>
             </a:fld>
             <a:endParaRPr lang="en-US"/>
           </a:p>
@@ -2874,7 +3196,7 @@
           <a:p>
             <a:fld id="{5BCAD085-E8A6-8845-BD4E-CB4CCA059FC4}" type="datetimeFigureOut">
               <a:rPr lang="en-US" smtClean="0"/>
-              <a:t>12/15/2025</a:t>
+              <a:t>1/12/2026</a:t>
             </a:fld>
             <a:endParaRPr lang="en-US"/>
           </a:p>
@@ -3259,7 +3581,12 @@
             <p:ph type="ctrTitle"/>
           </p:nvPr>
         </p:nvSpPr>
-        <p:spPr/>
+        <p:spPr>
+          <a:xfrm>
+            <a:off x="685800" y="819210"/>
+            <a:ext cx="7772400" cy="1470025"/>
+          </a:xfrm>
+        </p:spPr>
         <p:txBody>
           <a:bodyPr/>
           <a:lstStyle/>
@@ -3272,7 +3599,12 @@
               </a:defRPr>
             </a:pPr>
             <a:r>
-              <a:t>HealthAI Medical Document Processing</a:t>
+              <a:rPr b="1" dirty="0" err="1"/>
+              <a:t>HealthAI</a:t>
+            </a:r>
+            <a:r>
+              <a:rPr b="1" dirty="0"/>
+              <a:t> Medical Document Processing</a:t>
             </a:r>
           </a:p>
         </p:txBody>
@@ -3287,1104 +3619,31 @@
             <p:ph type="subTitle" idx="1"/>
           </p:nvPr>
         </p:nvSpPr>
-        <p:spPr/>
+        <p:spPr>
+          <a:xfrm>
+            <a:off x="1371600" y="2816166"/>
+            <a:ext cx="6400800" cy="1752600"/>
+          </a:xfrm>
+        </p:spPr>
         <p:txBody>
           <a:bodyPr/>
           <a:lstStyle/>
           <a:p>
             <a:r>
+              <a:rPr dirty="0"/>
               <a:t>AWS Architecture, Costs &amp; Performance</a:t>
             </a:r>
           </a:p>
           <a:p>
             <a:r>
-              <a:t>December 2025</a:t>
-            </a:r>
-          </a:p>
-        </p:txBody>
-      </p:sp>
-    </p:spTree>
-  </p:cSld>
-  <p:clrMapOvr>
-    <a:masterClrMapping/>
-  </p:clrMapOvr>
-</p:sld>
-</file>
-
-<file path=ppt/slides/slide10.xml><?xml version="1.0" encoding="utf-8"?>
-<p:sld xmlns:a="http://schemas.openxmlformats.org/drawingml/2006/main" xmlns:r="http://schemas.openxmlformats.org/officeDocument/2006/relationships" xmlns:p="http://schemas.openxmlformats.org/presentationml/2006/main">
-  <p:cSld>
-    <p:spTree>
-      <p:nvGrpSpPr>
-        <p:cNvPr id="1" name=""/>
-        <p:cNvGrpSpPr/>
-        <p:nvPr/>
-      </p:nvGrpSpPr>
-      <p:grpSpPr>
-        <a:xfrm>
-          <a:off x="0" y="0"/>
-          <a:ext cx="0" cy="0"/>
-          <a:chOff x="0" y="0"/>
-          <a:chExt cx="0" cy="0"/>
-        </a:xfrm>
-      </p:grpSpPr>
-      <p:sp>
-        <p:nvSpPr>
-          <p:cNvPr id="2" name="Title 1"/>
-          <p:cNvSpPr>
-            <a:spLocks noGrp="1"/>
-          </p:cNvSpPr>
-          <p:nvPr>
-            <p:ph type="title"/>
-          </p:nvPr>
-        </p:nvSpPr>
-        <p:spPr/>
-        <p:txBody>
-          <a:bodyPr/>
-          <a:lstStyle/>
-          <a:p>
-            <a:endParaRPr/>
-          </a:p>
-        </p:txBody>
-      </p:sp>
-      <p:sp>
-        <p:nvSpPr>
-          <p:cNvPr id="3" name="TextBox 2"/>
-          <p:cNvSpPr txBox="1"/>
-          <p:nvPr/>
-        </p:nvSpPr>
-        <p:spPr>
-          <a:xfrm>
-            <a:off x="457200" y="274320"/>
-            <a:ext cx="8229600" cy="731520"/>
-          </a:xfrm>
-          <a:prstGeom prst="rect">
-            <a:avLst/>
-          </a:prstGeom>
-          <a:noFill/>
-        </p:spPr>
-        <p:txBody>
-          <a:bodyPr wrap="none">
-            <a:spAutoFit/>
-          </a:bodyPr>
-          <a:lstStyle/>
-          <a:p>
-            <a:pPr>
-              <a:defRPr sz="3200" b="1">
-                <a:solidFill>
-                  <a:srgbClr val="006699"/>
-                </a:solidFill>
-              </a:defRPr>
-            </a:pPr>
-            <a:r>
-              <a:t>Processing Timeline - 237 Pages</a:t>
-            </a:r>
-          </a:p>
-        </p:txBody>
-      </p:sp>
-      <p:sp>
-        <p:nvSpPr>
-          <p:cNvPr id="4" name="Rectangle 3"/>
-          <p:cNvSpPr/>
-          <p:nvPr/>
-        </p:nvSpPr>
-        <p:spPr>
-          <a:xfrm>
-            <a:off x="457200" y="1371600"/>
-            <a:ext cx="1097280" cy="548640"/>
-          </a:xfrm>
-          <a:prstGeom prst="rect">
-            <a:avLst/>
-          </a:prstGeom>
-          <a:solidFill>
-            <a:srgbClr val="DCDCDC"/>
-          </a:solidFill>
-          <a:ln w="25400">
-            <a:solidFill>
-              <a:srgbClr val="0099CC"/>
-            </a:solidFill>
-          </a:ln>
-        </p:spPr>
-        <p:style>
-          <a:lnRef idx="1">
-            <a:schemeClr val="accent1"/>
-          </a:lnRef>
-          <a:fillRef idx="3">
-            <a:schemeClr val="accent1"/>
-          </a:fillRef>
-          <a:effectRef idx="2">
-            <a:schemeClr val="accent1"/>
-          </a:effectRef>
-          <a:fontRef idx="minor">
-            <a:schemeClr val="lt1"/>
-          </a:fontRef>
-        </p:style>
-        <p:txBody>
-          <a:bodyPr wrap="square" rtlCol="0" anchor="ctr"/>
-          <a:lstStyle/>
-          <a:p>
-            <a:pPr algn="ctr">
-              <a:defRPr sz="1100" b="1"/>
-            </a:pPr>
-            <a:r>
-              <a:t>00:00</a:t>
-            </a:r>
-          </a:p>
-        </p:txBody>
-      </p:sp>
-      <p:sp>
-        <p:nvSpPr>
-          <p:cNvPr id="5" name="Rectangle 4"/>
-          <p:cNvSpPr/>
-          <p:nvPr/>
-        </p:nvSpPr>
-        <p:spPr>
-          <a:xfrm>
-            <a:off x="1645920" y="1371600"/>
-            <a:ext cx="2103120" cy="548640"/>
-          </a:xfrm>
-          <a:prstGeom prst="rect">
-            <a:avLst/>
-          </a:prstGeom>
-          <a:solidFill>
-            <a:srgbClr val="76CA8C"/>
-          </a:solidFill>
-          <a:ln w="25400">
-            <a:solidFill>
-              <a:srgbClr val="0099CC"/>
-            </a:solidFill>
-          </a:ln>
-        </p:spPr>
-        <p:style>
-          <a:lnRef idx="1">
-            <a:schemeClr val="accent1"/>
-          </a:lnRef>
-          <a:fillRef idx="3">
-            <a:schemeClr val="accent1"/>
-          </a:fillRef>
-          <a:effectRef idx="2">
-            <a:schemeClr val="accent1"/>
-          </a:effectRef>
-          <a:fontRef idx="minor">
-            <a:schemeClr val="lt1"/>
-          </a:fontRef>
-        </p:style>
-        <p:txBody>
-          <a:bodyPr wrap="square" rtlCol="0" anchor="ctr"/>
-          <a:lstStyle/>
-          <a:p>
-            <a:pPr algn="ctr">
-              <a:defRPr sz="1100" b="1"/>
-            </a:pPr>
-            <a:r>
-              <a:t>Upload</a:t>
-            </a:r>
-          </a:p>
-        </p:txBody>
-      </p:sp>
-      <p:sp>
-        <p:nvSpPr>
-          <p:cNvPr id="6" name="TextBox 5"/>
-          <p:cNvSpPr txBox="1"/>
-          <p:nvPr/>
-        </p:nvSpPr>
-        <p:spPr>
-          <a:xfrm>
-            <a:off x="3931920" y="1508760"/>
-            <a:ext cx="4572000" cy="365760"/>
-          </a:xfrm>
-          <a:prstGeom prst="rect">
-            <a:avLst/>
-          </a:prstGeom>
-          <a:noFill/>
-        </p:spPr>
-        <p:txBody>
-          <a:bodyPr wrap="none">
-            <a:spAutoFit/>
-          </a:bodyPr>
-          <a:lstStyle/>
-          <a:p>
-            <a:pPr>
-              <a:defRPr sz="1400"/>
-            </a:pPr>
-            <a:r>
-              <a:t>PDF to S3</a:t>
-            </a:r>
-          </a:p>
-        </p:txBody>
-      </p:sp>
-      <p:sp>
-        <p:nvSpPr>
-          <p:cNvPr id="7" name="Rectangle 6"/>
-          <p:cNvSpPr/>
-          <p:nvPr/>
-        </p:nvSpPr>
-        <p:spPr>
-          <a:xfrm>
-            <a:off x="457200" y="2057400"/>
-            <a:ext cx="1097280" cy="548640"/>
-          </a:xfrm>
-          <a:prstGeom prst="rect">
-            <a:avLst/>
-          </a:prstGeom>
-          <a:solidFill>
-            <a:srgbClr val="DCDCDC"/>
-          </a:solidFill>
-          <a:ln w="25400">
-            <a:solidFill>
-              <a:srgbClr val="0099CC"/>
-            </a:solidFill>
-          </a:ln>
-        </p:spPr>
-        <p:style>
-          <a:lnRef idx="1">
-            <a:schemeClr val="accent1"/>
-          </a:lnRef>
-          <a:fillRef idx="3">
-            <a:schemeClr val="accent1"/>
-          </a:fillRef>
-          <a:effectRef idx="2">
-            <a:schemeClr val="accent1"/>
-          </a:effectRef>
-          <a:fontRef idx="minor">
-            <a:schemeClr val="lt1"/>
-          </a:fontRef>
-        </p:style>
-        <p:txBody>
-          <a:bodyPr wrap="square" rtlCol="0" anchor="ctr"/>
-          <a:lstStyle/>
-          <a:p>
-            <a:pPr algn="ctr">
-              <a:defRPr sz="1100" b="1"/>
-            </a:pPr>
-            <a:r>
-              <a:t>00:01</a:t>
-            </a:r>
-          </a:p>
-        </p:txBody>
-      </p:sp>
-      <p:sp>
-        <p:nvSpPr>
-          <p:cNvPr id="8" name="Rectangle 7"/>
-          <p:cNvSpPr/>
-          <p:nvPr/>
-        </p:nvSpPr>
-        <p:spPr>
-          <a:xfrm>
-            <a:off x="1645920" y="2057400"/>
-            <a:ext cx="2103120" cy="548640"/>
-          </a:xfrm>
-          <a:prstGeom prst="rect">
-            <a:avLst/>
-          </a:prstGeom>
-          <a:solidFill>
-            <a:srgbClr val="FF9F40"/>
-          </a:solidFill>
-          <a:ln w="25400">
-            <a:solidFill>
-              <a:srgbClr val="0099CC"/>
-            </a:solidFill>
-          </a:ln>
-        </p:spPr>
-        <p:style>
-          <a:lnRef idx="1">
-            <a:schemeClr val="accent1"/>
-          </a:lnRef>
-          <a:fillRef idx="3">
-            <a:schemeClr val="accent1"/>
-          </a:fillRef>
-          <a:effectRef idx="2">
-            <a:schemeClr val="accent1"/>
-          </a:effectRef>
-          <a:fontRef idx="minor">
-            <a:schemeClr val="lt1"/>
-          </a:fontRef>
-        </p:style>
-        <p:txBody>
-          <a:bodyPr wrap="square" rtlCol="0" anchor="ctr"/>
-          <a:lstStyle/>
-          <a:p>
-            <a:pPr algn="ctr">
-              <a:defRPr sz="1100" b="1"/>
-            </a:pPr>
-            <a:r>
-              <a:t>Register</a:t>
-            </a:r>
-          </a:p>
-        </p:txBody>
-      </p:sp>
-      <p:sp>
-        <p:nvSpPr>
-          <p:cNvPr id="9" name="TextBox 8"/>
-          <p:cNvSpPr txBox="1"/>
-          <p:nvPr/>
-        </p:nvSpPr>
-        <p:spPr>
-          <a:xfrm>
-            <a:off x="3931920" y="2194560"/>
-            <a:ext cx="4572000" cy="365760"/>
-          </a:xfrm>
-          <a:prstGeom prst="rect">
-            <a:avLst/>
-          </a:prstGeom>
-          <a:noFill/>
-        </p:spPr>
-        <p:txBody>
-          <a:bodyPr wrap="none">
-            <a:spAutoFit/>
-          </a:bodyPr>
-          <a:lstStyle/>
-          <a:p>
-            <a:pPr>
-              <a:defRPr sz="1400"/>
-            </a:pPr>
-            <a:r>
-              <a:t>DynamoDB</a:t>
-            </a:r>
-          </a:p>
-        </p:txBody>
-      </p:sp>
-      <p:sp>
-        <p:nvSpPr>
-          <p:cNvPr id="10" name="Rectangle 9"/>
-          <p:cNvSpPr/>
-          <p:nvPr/>
-        </p:nvSpPr>
-        <p:spPr>
-          <a:xfrm>
-            <a:off x="457200" y="2743200"/>
-            <a:ext cx="1097280" cy="548640"/>
-          </a:xfrm>
-          <a:prstGeom prst="rect">
-            <a:avLst/>
-          </a:prstGeom>
-          <a:solidFill>
-            <a:srgbClr val="DCDCDC"/>
-          </a:solidFill>
-          <a:ln w="25400">
-            <a:solidFill>
-              <a:srgbClr val="0099CC"/>
-            </a:solidFill>
-          </a:ln>
-        </p:spPr>
-        <p:style>
-          <a:lnRef idx="1">
-            <a:schemeClr val="accent1"/>
-          </a:lnRef>
-          <a:fillRef idx="3">
-            <a:schemeClr val="accent1"/>
-          </a:fillRef>
-          <a:effectRef idx="2">
-            <a:schemeClr val="accent1"/>
-          </a:effectRef>
-          <a:fontRef idx="minor">
-            <a:schemeClr val="lt1"/>
-          </a:fontRef>
-        </p:style>
-        <p:txBody>
-          <a:bodyPr wrap="square" rtlCol="0" anchor="ctr"/>
-          <a:lstStyle/>
-          <a:p>
-            <a:pPr algn="ctr">
-              <a:defRPr sz="1100" b="1"/>
-            </a:pPr>
-            <a:r>
-              <a:t>00:02</a:t>
-            </a:r>
-          </a:p>
-        </p:txBody>
-      </p:sp>
-      <p:sp>
-        <p:nvSpPr>
-          <p:cNvPr id="11" name="Rectangle 10"/>
-          <p:cNvSpPr/>
-          <p:nvPr/>
-        </p:nvSpPr>
-        <p:spPr>
-          <a:xfrm>
-            <a:off x="1645920" y="2743200"/>
-            <a:ext cx="2103120" cy="548640"/>
-          </a:xfrm>
-          <a:prstGeom prst="rect">
-            <a:avLst/>
-          </a:prstGeom>
-          <a:solidFill>
-            <a:srgbClr val="FF9F40"/>
-          </a:solidFill>
-          <a:ln w="25400">
-            <a:solidFill>
-              <a:srgbClr val="0099CC"/>
-            </a:solidFill>
-          </a:ln>
-        </p:spPr>
-        <p:style>
-          <a:lnRef idx="1">
-            <a:schemeClr val="accent1"/>
-          </a:lnRef>
-          <a:fillRef idx="3">
-            <a:schemeClr val="accent1"/>
-          </a:fillRef>
-          <a:effectRef idx="2">
-            <a:schemeClr val="accent1"/>
-          </a:effectRef>
-          <a:fontRef idx="minor">
-            <a:schemeClr val="lt1"/>
-          </a:fontRef>
-        </p:style>
-        <p:txBody>
-          <a:bodyPr wrap="square" rtlCol="0" anchor="ctr"/>
-          <a:lstStyle/>
-          <a:p>
-            <a:pPr algn="ctr">
-              <a:defRPr sz="1100" b="1"/>
-            </a:pPr>
-            <a:r>
-              <a:t>Convert</a:t>
-            </a:r>
-          </a:p>
-        </p:txBody>
-      </p:sp>
-      <p:sp>
-        <p:nvSpPr>
-          <p:cNvPr id="12" name="TextBox 11"/>
-          <p:cNvSpPr txBox="1"/>
-          <p:nvPr/>
-        </p:nvSpPr>
-        <p:spPr>
-          <a:xfrm>
-            <a:off x="3931920" y="2880360"/>
-            <a:ext cx="4572000" cy="365760"/>
-          </a:xfrm>
-          <a:prstGeom prst="rect">
-            <a:avLst/>
-          </a:prstGeom>
-          <a:noFill/>
-        </p:spPr>
-        <p:txBody>
-          <a:bodyPr wrap="none">
-            <a:spAutoFit/>
-          </a:bodyPr>
-          <a:lstStyle/>
-          <a:p>
-            <a:pPr>
-              <a:defRPr sz="1400"/>
-            </a:pPr>
-            <a:r>
-              <a:t>PNG/WebP</a:t>
-            </a:r>
-          </a:p>
-        </p:txBody>
-      </p:sp>
-      <p:sp>
-        <p:nvSpPr>
-          <p:cNvPr id="13" name="Rectangle 12"/>
-          <p:cNvSpPr/>
-          <p:nvPr/>
-        </p:nvSpPr>
-        <p:spPr>
-          <a:xfrm>
-            <a:off x="457200" y="3429000"/>
-            <a:ext cx="1097280" cy="548640"/>
-          </a:xfrm>
-          <a:prstGeom prst="rect">
-            <a:avLst/>
-          </a:prstGeom>
-          <a:solidFill>
-            <a:srgbClr val="DCDCDC"/>
-          </a:solidFill>
-          <a:ln w="25400">
-            <a:solidFill>
-              <a:srgbClr val="0099CC"/>
-            </a:solidFill>
-          </a:ln>
-        </p:spPr>
-        <p:style>
-          <a:lnRef idx="1">
-            <a:schemeClr val="accent1"/>
-          </a:lnRef>
-          <a:fillRef idx="3">
-            <a:schemeClr val="accent1"/>
-          </a:fillRef>
-          <a:effectRef idx="2">
-            <a:schemeClr val="accent1"/>
-          </a:effectRef>
-          <a:fontRef idx="minor">
-            <a:schemeClr val="lt1"/>
-          </a:fontRef>
-        </p:style>
-        <p:txBody>
-          <a:bodyPr wrap="square" rtlCol="0" anchor="ctr"/>
-          <a:lstStyle/>
-          <a:p>
-            <a:pPr algn="ctr">
-              <a:defRPr sz="1100" b="1"/>
-            </a:pPr>
-            <a:r>
-              <a:t>00:05</a:t>
-            </a:r>
-          </a:p>
-        </p:txBody>
-      </p:sp>
-      <p:sp>
-        <p:nvSpPr>
-          <p:cNvPr id="14" name="Rectangle 13"/>
-          <p:cNvSpPr/>
-          <p:nvPr/>
-        </p:nvSpPr>
-        <p:spPr>
-          <a:xfrm>
-            <a:off x="1645920" y="3429000"/>
-            <a:ext cx="2103120" cy="548640"/>
-          </a:xfrm>
-          <a:prstGeom prst="rect">
-            <a:avLst/>
-          </a:prstGeom>
-          <a:solidFill>
-            <a:srgbClr val="FF6384"/>
-          </a:solidFill>
-          <a:ln w="25400">
-            <a:solidFill>
-              <a:srgbClr val="0099CC"/>
-            </a:solidFill>
-          </a:ln>
-        </p:spPr>
-        <p:style>
-          <a:lnRef idx="1">
-            <a:schemeClr val="accent1"/>
-          </a:lnRef>
-          <a:fillRef idx="3">
-            <a:schemeClr val="accent1"/>
-          </a:fillRef>
-          <a:effectRef idx="2">
-            <a:schemeClr val="accent1"/>
-          </a:effectRef>
-          <a:fontRef idx="minor">
-            <a:schemeClr val="lt1"/>
-          </a:fontRef>
-        </p:style>
-        <p:txBody>
-          <a:bodyPr wrap="square" rtlCol="0" anchor="ctr"/>
-          <a:lstStyle/>
-          <a:p>
-            <a:pPr algn="ctr">
-              <a:defRPr sz="1100" b="1"/>
-            </a:pPr>
-            <a:r>
-              <a:t>Queue</a:t>
-            </a:r>
-          </a:p>
-        </p:txBody>
-      </p:sp>
-      <p:sp>
-        <p:nvSpPr>
-          <p:cNvPr id="15" name="TextBox 14"/>
-          <p:cNvSpPr txBox="1"/>
-          <p:nvPr/>
-        </p:nvSpPr>
-        <p:spPr>
-          <a:xfrm>
-            <a:off x="3931920" y="3566160"/>
-            <a:ext cx="4572000" cy="365760"/>
-          </a:xfrm>
-          <a:prstGeom prst="rect">
-            <a:avLst/>
-          </a:prstGeom>
-          <a:noFill/>
-        </p:spPr>
-        <p:txBody>
-          <a:bodyPr wrap="none">
-            <a:spAutoFit/>
-          </a:bodyPr>
-          <a:lstStyle/>
-          <a:p>
-            <a:pPr>
-              <a:defRPr sz="1400"/>
-            </a:pPr>
-            <a:r>
-              <a:t>234 pages</a:t>
-            </a:r>
-          </a:p>
-        </p:txBody>
-      </p:sp>
-      <p:sp>
-        <p:nvSpPr>
-          <p:cNvPr id="16" name="Rectangle 15"/>
-          <p:cNvSpPr/>
-          <p:nvPr/>
-        </p:nvSpPr>
-        <p:spPr>
-          <a:xfrm>
-            <a:off x="457200" y="4114800"/>
-            <a:ext cx="1097280" cy="548640"/>
-          </a:xfrm>
-          <a:prstGeom prst="rect">
-            <a:avLst/>
-          </a:prstGeom>
-          <a:solidFill>
-            <a:srgbClr val="DCDCDC"/>
-          </a:solidFill>
-          <a:ln w="25400">
-            <a:solidFill>
-              <a:srgbClr val="0099CC"/>
-            </a:solidFill>
-          </a:ln>
-        </p:spPr>
-        <p:style>
-          <a:lnRef idx="1">
-            <a:schemeClr val="accent1"/>
-          </a:lnRef>
-          <a:fillRef idx="3">
-            <a:schemeClr val="accent1"/>
-          </a:fillRef>
-          <a:effectRef idx="2">
-            <a:schemeClr val="accent1"/>
-          </a:effectRef>
-          <a:fontRef idx="minor">
-            <a:schemeClr val="lt1"/>
-          </a:fontRef>
-        </p:style>
-        <p:txBody>
-          <a:bodyPr wrap="square" rtlCol="0" anchor="ctr"/>
-          <a:lstStyle/>
-          <a:p>
-            <a:pPr algn="ctr">
-              <a:defRPr sz="1100" b="1"/>
-            </a:pPr>
-            <a:r>
-              <a:t>00:06</a:t>
-            </a:r>
-          </a:p>
-        </p:txBody>
-      </p:sp>
-      <p:sp>
-        <p:nvSpPr>
-          <p:cNvPr id="17" name="Rectangle 16"/>
-          <p:cNvSpPr/>
-          <p:nvPr/>
-        </p:nvSpPr>
-        <p:spPr>
-          <a:xfrm>
-            <a:off x="1645920" y="4114800"/>
-            <a:ext cx="2103120" cy="548640"/>
-          </a:xfrm>
-          <a:prstGeom prst="rect">
-            <a:avLst/>
-          </a:prstGeom>
-          <a:solidFill>
-            <a:srgbClr val="9966FF"/>
-          </a:solidFill>
-          <a:ln w="25400">
-            <a:solidFill>
-              <a:srgbClr val="0099CC"/>
-            </a:solidFill>
-          </a:ln>
-        </p:spPr>
-        <p:style>
-          <a:lnRef idx="1">
-            <a:schemeClr val="accent1"/>
-          </a:lnRef>
-          <a:fillRef idx="3">
-            <a:schemeClr val="accent1"/>
-          </a:fillRef>
-          <a:effectRef idx="2">
-            <a:schemeClr val="accent1"/>
-          </a:effectRef>
-          <a:fontRef idx="minor">
-            <a:schemeClr val="lt1"/>
-          </a:fontRef>
-        </p:style>
-        <p:txBody>
-          <a:bodyPr wrap="square" rtlCol="0" anchor="ctr"/>
-          <a:lstStyle/>
-          <a:p>
-            <a:pPr algn="ctr">
-              <a:defRPr sz="1100" b="1"/>
-            </a:pPr>
-            <a:r>
-              <a:t>AI Process</a:t>
-            </a:r>
-          </a:p>
-        </p:txBody>
-      </p:sp>
-      <p:sp>
-        <p:nvSpPr>
-          <p:cNvPr id="18" name="TextBox 17"/>
-          <p:cNvSpPr txBox="1"/>
-          <p:nvPr/>
-        </p:nvSpPr>
-        <p:spPr>
-          <a:xfrm>
-            <a:off x="3931920" y="4251960"/>
-            <a:ext cx="4572000" cy="365760"/>
-          </a:xfrm>
-          <a:prstGeom prst="rect">
-            <a:avLst/>
-          </a:prstGeom>
-          <a:noFill/>
-        </p:spPr>
-        <p:txBody>
-          <a:bodyPr wrap="none">
-            <a:spAutoFit/>
-          </a:bodyPr>
-          <a:lstStyle/>
-          <a:p>
-            <a:pPr>
-              <a:defRPr sz="1400"/>
-            </a:pPr>
-            <a:r>
-              <a:t>10 parallel</a:t>
-            </a:r>
-          </a:p>
-        </p:txBody>
-      </p:sp>
-      <p:sp>
-        <p:nvSpPr>
-          <p:cNvPr id="19" name="Rectangle 18"/>
-          <p:cNvSpPr/>
-          <p:nvPr/>
-        </p:nvSpPr>
-        <p:spPr>
-          <a:xfrm>
-            <a:off x="457200" y="4800600"/>
-            <a:ext cx="1097280" cy="548640"/>
-          </a:xfrm>
-          <a:prstGeom prst="rect">
-            <a:avLst/>
-          </a:prstGeom>
-          <a:solidFill>
-            <a:srgbClr val="DCDCDC"/>
-          </a:solidFill>
-          <a:ln w="25400">
-            <a:solidFill>
-              <a:srgbClr val="0099CC"/>
-            </a:solidFill>
-          </a:ln>
-        </p:spPr>
-        <p:style>
-          <a:lnRef idx="1">
-            <a:schemeClr val="accent1"/>
-          </a:lnRef>
-          <a:fillRef idx="3">
-            <a:schemeClr val="accent1"/>
-          </a:fillRef>
-          <a:effectRef idx="2">
-            <a:schemeClr val="accent1"/>
-          </a:effectRef>
-          <a:fontRef idx="minor">
-            <a:schemeClr val="lt1"/>
-          </a:fontRef>
-        </p:style>
-        <p:txBody>
-          <a:bodyPr wrap="square" rtlCol="0" anchor="ctr"/>
-          <a:lstStyle/>
-          <a:p>
-            <a:pPr algn="ctr">
-              <a:defRPr sz="1100" b="1"/>
-            </a:pPr>
-            <a:r>
-              <a:t>00:30</a:t>
-            </a:r>
-          </a:p>
-        </p:txBody>
-      </p:sp>
-      <p:sp>
-        <p:nvSpPr>
-          <p:cNvPr id="20" name="Rectangle 19"/>
-          <p:cNvSpPr/>
-          <p:nvPr/>
-        </p:nvSpPr>
-        <p:spPr>
-          <a:xfrm>
-            <a:off x="1645920" y="4800600"/>
-            <a:ext cx="2103120" cy="548640"/>
-          </a:xfrm>
-          <a:prstGeom prst="rect">
-            <a:avLst/>
-          </a:prstGeom>
-          <a:solidFill>
-            <a:srgbClr val="C8FFC8"/>
-          </a:solidFill>
-          <a:ln w="25400">
-            <a:solidFill>
-              <a:srgbClr val="0099CC"/>
-            </a:solidFill>
-          </a:ln>
-        </p:spPr>
-        <p:style>
-          <a:lnRef idx="1">
-            <a:schemeClr val="accent1"/>
-          </a:lnRef>
-          <a:fillRef idx="3">
-            <a:schemeClr val="accent1"/>
-          </a:fillRef>
-          <a:effectRef idx="2">
-            <a:schemeClr val="accent1"/>
-          </a:effectRef>
-          <a:fontRef idx="minor">
-            <a:schemeClr val="lt1"/>
-          </a:fontRef>
-        </p:style>
-        <p:txBody>
-          <a:bodyPr wrap="square" rtlCol="0" anchor="ctr"/>
-          <a:lstStyle/>
-          <a:p>
-            <a:pPr algn="ctr">
-              <a:defRPr sz="1100" b="1"/>
-            </a:pPr>
-            <a:r>
-              <a:t>Complete</a:t>
-            </a:r>
-          </a:p>
-        </p:txBody>
-      </p:sp>
-      <p:sp>
-        <p:nvSpPr>
-          <p:cNvPr id="21" name="TextBox 20"/>
-          <p:cNvSpPr txBox="1"/>
-          <p:nvPr/>
-        </p:nvSpPr>
-        <p:spPr>
-          <a:xfrm>
-            <a:off x="3931920" y="4937760"/>
-            <a:ext cx="4572000" cy="365760"/>
-          </a:xfrm>
-          <a:prstGeom prst="rect">
-            <a:avLst/>
-          </a:prstGeom>
-          <a:noFill/>
-        </p:spPr>
-        <p:txBody>
-          <a:bodyPr wrap="none">
-            <a:spAutoFit/>
-          </a:bodyPr>
-          <a:lstStyle/>
-          <a:p>
-            <a:pPr>
-              <a:defRPr sz="1400"/>
-            </a:pPr>
-            <a:r>
-              <a:t>1,294 pts</a:t>
-            </a:r>
-          </a:p>
-        </p:txBody>
-      </p:sp>
-    </p:spTree>
-  </p:cSld>
-  <p:clrMapOvr>
-    <a:masterClrMapping/>
-  </p:clrMapOvr>
-</p:sld>
-</file>
-
-<file path=ppt/slides/slide11.xml><?xml version="1.0" encoding="utf-8"?>
-<p:sld xmlns:a="http://schemas.openxmlformats.org/drawingml/2006/main" xmlns:r="http://schemas.openxmlformats.org/officeDocument/2006/relationships" xmlns:p="http://schemas.openxmlformats.org/presentationml/2006/main">
-  <p:cSld>
-    <p:spTree>
-      <p:nvGrpSpPr>
-        <p:cNvPr id="1" name=""/>
-        <p:cNvGrpSpPr/>
-        <p:nvPr/>
-      </p:nvGrpSpPr>
-      <p:grpSpPr>
-        <a:xfrm>
-          <a:off x="0" y="0"/>
-          <a:ext cx="0" cy="0"/>
-          <a:chOff x="0" y="0"/>
-          <a:chExt cx="0" cy="0"/>
-        </a:xfrm>
-      </p:grpSpPr>
-      <p:sp>
-        <p:nvSpPr>
-          <p:cNvPr id="2" name="Title 1"/>
-          <p:cNvSpPr>
-            <a:spLocks noGrp="1"/>
-          </p:cNvSpPr>
-          <p:nvPr>
-            <p:ph type="title"/>
-          </p:nvPr>
-        </p:nvSpPr>
-        <p:spPr/>
-        <p:txBody>
-          <a:bodyPr/>
-          <a:lstStyle/>
-          <a:p>
-            <a:endParaRPr/>
-          </a:p>
-        </p:txBody>
-      </p:sp>
-      <p:sp>
-        <p:nvSpPr>
-          <p:cNvPr id="3" name="TextBox 2"/>
-          <p:cNvSpPr txBox="1"/>
-          <p:nvPr/>
-        </p:nvSpPr>
-        <p:spPr>
-          <a:xfrm>
-            <a:off x="457200" y="274320"/>
-            <a:ext cx="8229600" cy="731520"/>
-          </a:xfrm>
-          <a:prstGeom prst="rect">
-            <a:avLst/>
-          </a:prstGeom>
-          <a:noFill/>
-        </p:spPr>
-        <p:txBody>
-          <a:bodyPr wrap="none">
-            <a:spAutoFit/>
-          </a:bodyPr>
-          <a:lstStyle/>
-          <a:p>
-            <a:pPr>
-              <a:defRPr sz="3200" b="1">
-                <a:solidFill>
-                  <a:srgbClr val="006699"/>
-                </a:solidFill>
-              </a:defRPr>
-            </a:pPr>
-            <a:r>
-              <a:t>Conclusion &amp; Recommendations</a:t>
-            </a:r>
-          </a:p>
-        </p:txBody>
-      </p:sp>
-      <p:sp>
-        <p:nvSpPr>
-          <p:cNvPr id="4" name="TextBox 3"/>
-          <p:cNvSpPr txBox="1"/>
-          <p:nvPr/>
-        </p:nvSpPr>
-        <p:spPr>
-          <a:xfrm>
-            <a:off x="457200" y="1280160"/>
-            <a:ext cx="8229600" cy="4389120"/>
-          </a:xfrm>
-          <a:prstGeom prst="rect">
-            <a:avLst/>
-          </a:prstGeom>
-          <a:noFill/>
-        </p:spPr>
-        <p:txBody>
-          <a:bodyPr wrap="none">
-            <a:spAutoFit/>
-          </a:bodyPr>
-          <a:lstStyle/>
-          <a:p>
-            <a:pPr>
-              <a:defRPr sz="1300"/>
-            </a:pPr>
-            <a:r>
-              <a:t>Production-Ready Medical Document Processing</a:t>
-            </a:r>
-          </a:p>
-          <a:p>
-            <a:endParaRPr/>
-          </a:p>
-          <a:p>
-            <a:r>
-              <a:t>Status: Fully Operational</a:t>
-            </a:r>
-          </a:p>
-          <a:p>
-            <a:r>
-              <a:t>• 98.73% success rate on 237-page document</a:t>
-            </a:r>
-          </a:p>
-          <a:p>
-            <a:r>
-              <a:t>• .022/page (96-98% cheaper than manual)</a:t>
-            </a:r>
-          </a:p>
-          <a:p>
-            <a:r>
-              <a:t>• 7.6 sec/page (99% faster)</a:t>
-            </a:r>
-          </a:p>
-          <a:p>
-            <a:r>
-              <a:t>• 1,294 data points with high accuracy</a:t>
-            </a:r>
-          </a:p>
-          <a:p>
-            <a:endParaRPr/>
-          </a:p>
-          <a:p>
-            <a:r>
-              <a:t>Achievements:</a:t>
-            </a:r>
-          </a:p>
-          <a:p>
-            <a:r>
-              <a:t>✓ 88% cost reduction (.18 → .31)</a:t>
-            </a:r>
-          </a:p>
-          <a:p>
-            <a:r>
-              <a:t>✓ 7x speed improvement (3.5hr → 30min)</a:t>
-            </a:r>
-          </a:p>
-          <a:p>
-            <a:r>
-              <a:t>✓ 95% fewer throttling errors</a:t>
-            </a:r>
-          </a:p>
-          <a:p>
-            <a:r>
-              <a:t>✓ Scalable with Bedrock quota increase</a:t>
-            </a:r>
-          </a:p>
-          <a:p>
-            <a:endParaRPr/>
-          </a:p>
-          <a:p>
-            <a:r>
-              <a:t>Recommendations:</a:t>
-            </a:r>
-          </a:p>
-          <a:p>
-            <a:r>
-              <a:t>1. Request Bedrock quota to 100 req/sec</a:t>
-            </a:r>
-          </a:p>
-          <a:p>
-            <a:r>
-              <a:t>2. Sign AWS BAA for HIPAA compliance</a:t>
-            </a:r>
-          </a:p>
-          <a:p>
-            <a:r>
-              <a:t>3. Enable monitoring &amp; alarms</a:t>
-            </a:r>
-          </a:p>
-          <a:p>
-            <a:r>
-              <a:t>4. Implement prompt caching (50% savings)</a:t>
-            </a:r>
-          </a:p>
-          <a:p>
-            <a:r>
-              <a:t>5. Add Cognito authentication</a:t>
-            </a:r>
-          </a:p>
-          <a:p>
-            <a:endParaRPr/>
-          </a:p>
-          <a:p>
-            <a:r>
-              <a:t>Investment: ,320/year for 1,000 docs</a:t>
-            </a:r>
-          </a:p>
-          <a:p>
-            <a:r>
-              <a:t>ROI: 1,800% - 5,500%</a:t>
-            </a:r>
-          </a:p>
-          <a:p>
-            <a:endParaRPr/>
-          </a:p>
-          <a:p>
-            <a:r>
-              <a:t>Ready for Production! </a:t>
-            </a:r>
+              <a:rPr dirty="0"/>
+              <a:t>202</a:t>
+            </a:r>
+            <a:r>
+              <a:rPr lang="en-IE" dirty="0"/>
+              <a:t>6</a:t>
+            </a:r>
+            <a:endParaRPr dirty="0"/>
           </a:p>
         </p:txBody>
       </p:sp>
@@ -4422,7 +3681,7 @@
         <p:spPr>
           <a:xfrm>
             <a:off x="457200" y="274320"/>
-            <a:ext cx="4274760" cy="584775"/>
+            <a:ext cx="4844596" cy="584775"/>
           </a:xfrm>
           <a:prstGeom prst="rect">
             <a:avLst/>
@@ -4444,7 +3703,7 @@
             </a:pPr>
             <a:r>
               <a:rPr lang="en-IE" dirty="0"/>
-              <a:t>Imed2 </a:t>
+              <a:t>AI-Doctor </a:t>
             </a:r>
             <a:r>
               <a:rPr dirty="0"/>
@@ -4480,7 +3739,7 @@
             </a:pPr>
             <a:r>
               <a:rPr dirty="0"/>
-              <a:t>AI-Powered Medical Document Processing</a:t>
+              <a:t>AI-Powered Medical Processing</a:t>
             </a:r>
           </a:p>
           <a:p>
@@ -4503,15 +3762,15 @@
           <a:p>
             <a:r>
               <a:rPr dirty="0"/>
-              <a:t>• Parallel Processing - </a:t>
+              <a:t>• Parallel Processing </a:t>
             </a:r>
             <a:r>
               <a:rPr lang="en-IE" dirty="0"/>
-              <a:t>7</a:t>
+              <a:t>–</a:t>
             </a:r>
             <a:r>
               <a:rPr dirty="0"/>
-              <a:t>00-</a:t>
+              <a:t> </a:t>
             </a:r>
             <a:r>
               <a:rPr lang="en-IE" dirty="0"/>
@@ -4519,7 +3778,15 @@
             </a:r>
             <a:r>
               <a:rPr dirty="0"/>
-              <a:t>00 pages per hour</a:t>
+              <a:t>00</a:t>
+            </a:r>
+            <a:r>
+              <a:rPr lang="en-IE" dirty="0"/>
+              <a:t>’s</a:t>
+            </a:r>
+            <a:r>
+              <a:rPr dirty="0"/>
+              <a:t> pages per hour</a:t>
             </a:r>
           </a:p>
           <a:p>
@@ -4529,17 +3796,25 @@
             </a:r>
             <a:r>
               <a:rPr lang="en-IE" dirty="0"/>
-              <a:t>3 cent</a:t>
+              <a:t>5 cent</a:t>
             </a:r>
             <a:r>
               <a:rPr dirty="0"/>
-              <a:t> per page (88% cost reduction)</a:t>
-            </a:r>
-          </a:p>
-          <a:p>
+              <a:t> per page (</a:t>
+            </a:r>
+            <a:r>
+              <a:rPr lang="en-IE" dirty="0"/>
+              <a:t>huge</a:t>
+            </a:r>
             <a:r>
               <a:rPr dirty="0"/>
-              <a:t>• Fast - 7.6 seconds per page average</a:t>
+              <a:t> cost reduction)</a:t>
+            </a:r>
+          </a:p>
+          <a:p>
+            <a:r>
+              <a:rPr dirty="0"/>
+              <a:t>• Fast -  seconds per page average</a:t>
             </a:r>
           </a:p>
           <a:p>
@@ -5042,7 +4317,13 @@
   <p:cSld>
     <p:spTree>
       <p:nvGrpSpPr>
-        <p:cNvPr id="1" name=""/>
+        <p:cNvPr id="1" name="">
+          <a:extLst>
+            <a:ext uri="{FF2B5EF4-FFF2-40B4-BE49-F238E27FC236}">
+              <a16:creationId xmlns:a16="http://schemas.microsoft.com/office/drawing/2014/main" id="{4C2B80BD-BBEE-A7D3-8B4A-3B1996C9A54E}"/>
+            </a:ext>
+          </a:extLst>
+        </p:cNvPr>
         <p:cNvGrpSpPr/>
         <p:nvPr/>
       </p:nvGrpSpPr>
@@ -5056,33 +4337,20 @@
       </p:grpSpPr>
       <p:sp>
         <p:nvSpPr>
-          <p:cNvPr id="2" name="Title 1"/>
-          <p:cNvSpPr>
-            <a:spLocks noGrp="1"/>
-          </p:cNvSpPr>
-          <p:nvPr>
-            <p:ph type="title"/>
-          </p:nvPr>
-        </p:nvSpPr>
-        <p:spPr/>
-        <p:txBody>
-          <a:bodyPr/>
-          <a:lstStyle/>
-          <a:p>
-            <a:endParaRPr/>
-          </a:p>
-        </p:txBody>
-      </p:sp>
-      <p:sp>
-        <p:nvSpPr>
-          <p:cNvPr id="3" name="TextBox 2"/>
+          <p:cNvPr id="3" name="TextBox 2">
+            <a:extLst>
+              <a:ext uri="{FF2B5EF4-FFF2-40B4-BE49-F238E27FC236}">
+                <a16:creationId xmlns:a16="http://schemas.microsoft.com/office/drawing/2014/main" id="{75CF4511-2D76-84C9-9332-44EC0517B03C}"/>
+              </a:ext>
+            </a:extLst>
+          </p:cNvPr>
           <p:cNvSpPr txBox="1"/>
           <p:nvPr/>
         </p:nvSpPr>
         <p:spPr>
           <a:xfrm>
             <a:off x="457200" y="274320"/>
-            <a:ext cx="8229600" cy="731520"/>
+            <a:ext cx="4544642" cy="584775"/>
           </a:xfrm>
           <a:prstGeom prst="rect">
             <a:avLst/>
@@ -5103,33 +4371,348 @@
               </a:defRPr>
             </a:pPr>
             <a:r>
-              <a:t>Cost Analysis - 237 Page Document</a:t>
-            </a:r>
-          </a:p>
-        </p:txBody>
-      </p:sp>
-      <p:sp>
-        <p:nvSpPr>
-          <p:cNvPr id="4" name="Rectangle 3"/>
-          <p:cNvSpPr/>
+              <a:rPr lang="en-IE" dirty="0" err="1"/>
+              <a:t>SureBet</a:t>
+            </a:r>
+            <a:r>
+              <a:rPr lang="en-IE" dirty="0"/>
+              <a:t> </a:t>
+            </a:r>
+            <a:r>
+              <a:rPr dirty="0"/>
+              <a:t>Project Overview</a:t>
+            </a:r>
+          </a:p>
+        </p:txBody>
+      </p:sp>
+      <p:sp>
+        <p:nvSpPr>
+          <p:cNvPr id="4" name="TextBox 3">
+            <a:extLst>
+              <a:ext uri="{FF2B5EF4-FFF2-40B4-BE49-F238E27FC236}">
+                <a16:creationId xmlns:a16="http://schemas.microsoft.com/office/drawing/2014/main" id="{0658D8D6-9C08-7910-3A0B-12F24834D7E9}"/>
+              </a:ext>
+            </a:extLst>
+          </p:cNvPr>
+          <p:cNvSpPr txBox="1"/>
           <p:nvPr/>
         </p:nvSpPr>
         <p:spPr>
           <a:xfrm>
-            <a:off x="457200" y="1280160"/>
-            <a:ext cx="3931920" cy="640080"/>
+            <a:off x="457200" y="1043368"/>
+            <a:ext cx="6675930" cy="2000548"/>
           </a:xfrm>
           <a:prstGeom prst="rect">
             <a:avLst/>
           </a:prstGeom>
-          <a:solidFill>
-            <a:srgbClr val="FFC8C8"/>
-          </a:solidFill>
-          <a:ln w="25400">
-            <a:solidFill>
-              <a:srgbClr val="0099CC"/>
-            </a:solidFill>
-          </a:ln>
+          <a:noFill/>
+        </p:spPr>
+        <p:txBody>
+          <a:bodyPr wrap="none">
+            <a:spAutoFit/>
+          </a:bodyPr>
+          <a:lstStyle/>
+          <a:p>
+            <a:pPr>
+              <a:defRPr sz="1600"/>
+            </a:pPr>
+            <a:r>
+              <a:rPr lang="en-IE"/>
+              <a:t>Super Intelligent </a:t>
+            </a:r>
+            <a:r>
+              <a:t>AI-Powered </a:t>
+            </a:r>
+            <a:r>
+              <a:rPr lang="en-IE" dirty="0"/>
+              <a:t>Sports</a:t>
+            </a:r>
+            <a:r>
+              <a:rPr dirty="0"/>
+              <a:t> </a:t>
+            </a:r>
+            <a:r>
+              <a:rPr lang="en-IE" dirty="0"/>
+              <a:t>Betting</a:t>
+            </a:r>
+            <a:endParaRPr dirty="0"/>
+          </a:p>
+          <a:p>
+            <a:endParaRPr dirty="0"/>
+          </a:p>
+          <a:p>
+            <a:r>
+              <a:rPr dirty="0"/>
+              <a:t>• </a:t>
+            </a:r>
+            <a:r>
+              <a:rPr lang="en-IE" dirty="0"/>
+              <a:t>LLM</a:t>
+            </a:r>
+            <a:r>
+              <a:rPr dirty="0"/>
+              <a:t>- Advanced </a:t>
+            </a:r>
+            <a:r>
+              <a:rPr lang="en-IE" dirty="0"/>
+              <a:t>sports analysis</a:t>
+            </a:r>
+            <a:endParaRPr dirty="0"/>
+          </a:p>
+          <a:p>
+            <a:r>
+              <a:rPr dirty="0"/>
+              <a:t>• </a:t>
+            </a:r>
+            <a:r>
+              <a:rPr lang="en-IE" dirty="0"/>
+              <a:t>API to exchange and fast amounts of data on form, trainers , history</a:t>
+            </a:r>
+            <a:endParaRPr dirty="0"/>
+          </a:p>
+          <a:p>
+            <a:r>
+              <a:rPr dirty="0"/>
+              <a:t>• </a:t>
+            </a:r>
+            <a:r>
+              <a:rPr lang="en-IE" dirty="0"/>
+              <a:t>Self learning cycles – confidence and stake recommendations</a:t>
+            </a:r>
+            <a:endParaRPr dirty="0"/>
+          </a:p>
+          <a:p>
+            <a:r>
+              <a:rPr dirty="0"/>
+              <a:t>• </a:t>
+            </a:r>
+            <a:r>
+              <a:rPr lang="en-IE" dirty="0"/>
+              <a:t>ROI &gt; 40%</a:t>
+            </a:r>
+            <a:endParaRPr dirty="0"/>
+          </a:p>
+          <a:p>
+            <a:r>
+              <a:rPr dirty="0"/>
+              <a:t>• </a:t>
+            </a:r>
+            <a:r>
+              <a:rPr lang="en-IE" dirty="0"/>
+              <a:t>Expands to many stat based sports</a:t>
+            </a:r>
+            <a:endParaRPr dirty="0"/>
+          </a:p>
+        </p:txBody>
+      </p:sp>
+      <p:pic>
+        <p:nvPicPr>
+          <p:cNvPr id="7" name="Picture 2" descr="Ai Logo PNG Images With Transparent ...">
+            <a:extLst>
+              <a:ext uri="{FF2B5EF4-FFF2-40B4-BE49-F238E27FC236}">
+                <a16:creationId xmlns:a16="http://schemas.microsoft.com/office/drawing/2014/main" id="{94BC76AA-CBCB-BCAE-18F7-70D69BF633DB}"/>
+              </a:ext>
+            </a:extLst>
+          </p:cNvPr>
+          <p:cNvPicPr>
+            <a:picLocks noChangeAspect="1" noChangeArrowheads="1"/>
+          </p:cNvPicPr>
+          <p:nvPr/>
+        </p:nvPicPr>
+        <p:blipFill>
+          <a:blip r:embed="rId2">
+            <a:extLst>
+              <a:ext uri="{28A0092B-C50C-407E-A947-70E740481C1C}">
+                <a14:useLocalDpi xmlns:a14="http://schemas.microsoft.com/office/drawing/2010/main" val="0"/>
+              </a:ext>
+            </a:extLst>
+          </a:blip>
+          <a:srcRect/>
+          <a:stretch>
+            <a:fillRect/>
+          </a:stretch>
+        </p:blipFill>
+        <p:spPr bwMode="auto">
+          <a:xfrm>
+            <a:off x="4438373" y="3334394"/>
+            <a:ext cx="1804767" cy="1804767"/>
+          </a:xfrm>
+          <a:prstGeom prst="rect">
+            <a:avLst/>
+          </a:prstGeom>
+          <a:noFill/>
+          <a:extLst>
+            <a:ext uri="{909E8E84-426E-40DD-AFC4-6F175D3DCCD1}">
+              <a14:hiddenFill xmlns:a14="http://schemas.microsoft.com/office/drawing/2010/main">
+                <a:solidFill>
+                  <a:srgbClr val="FFFFFF"/>
+                </a:solidFill>
+              </a14:hiddenFill>
+            </a:ext>
+          </a:extLst>
+        </p:spPr>
+      </p:pic>
+      <p:pic>
+        <p:nvPicPr>
+          <p:cNvPr id="8" name="Picture 4" descr="React original wordmark logo - Free ...">
+            <a:extLst>
+              <a:ext uri="{FF2B5EF4-FFF2-40B4-BE49-F238E27FC236}">
+                <a16:creationId xmlns:a16="http://schemas.microsoft.com/office/drawing/2014/main" id="{41760D53-DED8-96D1-4AA2-6696CC287602}"/>
+              </a:ext>
+            </a:extLst>
+          </p:cNvPr>
+          <p:cNvPicPr>
+            <a:picLocks noChangeAspect="1" noChangeArrowheads="1"/>
+          </p:cNvPicPr>
+          <p:nvPr/>
+        </p:nvPicPr>
+        <p:blipFill>
+          <a:blip r:embed="rId3">
+            <a:extLst>
+              <a:ext uri="{28A0092B-C50C-407E-A947-70E740481C1C}">
+                <a14:useLocalDpi xmlns:a14="http://schemas.microsoft.com/office/drawing/2010/main" val="0"/>
+              </a:ext>
+            </a:extLst>
+          </a:blip>
+          <a:srcRect/>
+          <a:stretch>
+            <a:fillRect/>
+          </a:stretch>
+        </p:blipFill>
+        <p:spPr bwMode="auto">
+          <a:xfrm>
+            <a:off x="7350031" y="3622122"/>
+            <a:ext cx="964980" cy="964980"/>
+          </a:xfrm>
+          <a:prstGeom prst="rect">
+            <a:avLst/>
+          </a:prstGeom>
+          <a:noFill/>
+          <a:extLst>
+            <a:ext uri="{909E8E84-426E-40DD-AFC4-6F175D3DCCD1}">
+              <a14:hiddenFill xmlns:a14="http://schemas.microsoft.com/office/drawing/2010/main">
+                <a:solidFill>
+                  <a:srgbClr val="FFFFFF"/>
+                </a:solidFill>
+              </a14:hiddenFill>
+            </a:ext>
+          </a:extLst>
+        </p:spPr>
+      </p:pic>
+      <p:pic>
+        <p:nvPicPr>
+          <p:cNvPr id="9" name="Picture 6" descr="Understanding Amazon DynamoDB | AWS in ...">
+            <a:extLst>
+              <a:ext uri="{FF2B5EF4-FFF2-40B4-BE49-F238E27FC236}">
+                <a16:creationId xmlns:a16="http://schemas.microsoft.com/office/drawing/2014/main" id="{3C35887F-4E82-FEC0-180E-264F463BB1F1}"/>
+              </a:ext>
+            </a:extLst>
+          </p:cNvPr>
+          <p:cNvPicPr>
+            <a:picLocks noChangeAspect="1" noChangeArrowheads="1"/>
+          </p:cNvPicPr>
+          <p:nvPr/>
+        </p:nvPicPr>
+        <p:blipFill>
+          <a:blip r:embed="rId4">
+            <a:extLst>
+              <a:ext uri="{28A0092B-C50C-407E-A947-70E740481C1C}">
+                <a14:useLocalDpi xmlns:a14="http://schemas.microsoft.com/office/drawing/2010/main" val="0"/>
+              </a:ext>
+            </a:extLst>
+          </a:blip>
+          <a:srcRect/>
+          <a:stretch>
+            <a:fillRect/>
+          </a:stretch>
+        </p:blipFill>
+        <p:spPr bwMode="auto">
+          <a:xfrm>
+            <a:off x="4438374" y="5781106"/>
+            <a:ext cx="1403865" cy="644676"/>
+          </a:xfrm>
+          <a:prstGeom prst="rect">
+            <a:avLst/>
+          </a:prstGeom>
+          <a:noFill/>
+          <a:extLst>
+            <a:ext uri="{909E8E84-426E-40DD-AFC4-6F175D3DCCD1}">
+              <a14:hiddenFill xmlns:a14="http://schemas.microsoft.com/office/drawing/2010/main">
+                <a:solidFill>
+                  <a:srgbClr val="FFFFFF"/>
+                </a:solidFill>
+              </a14:hiddenFill>
+            </a:ext>
+          </a:extLst>
+        </p:spPr>
+      </p:pic>
+      <p:pic>
+        <p:nvPicPr>
+          <p:cNvPr id="10" name="Picture 8" descr="An Introduction to AWS S3: Naming Rules ...">
+            <a:extLst>
+              <a:ext uri="{FF2B5EF4-FFF2-40B4-BE49-F238E27FC236}">
+                <a16:creationId xmlns:a16="http://schemas.microsoft.com/office/drawing/2014/main" id="{00CD0568-2606-8212-BE04-74B482FF111F}"/>
+              </a:ext>
+            </a:extLst>
+          </p:cNvPr>
+          <p:cNvPicPr>
+            <a:picLocks noChangeAspect="1" noChangeArrowheads="1"/>
+          </p:cNvPicPr>
+          <p:nvPr/>
+        </p:nvPicPr>
+        <p:blipFill>
+          <a:blip r:embed="rId5">
+            <a:extLst>
+              <a:ext uri="{28A0092B-C50C-407E-A947-70E740481C1C}">
+                <a14:useLocalDpi xmlns:a14="http://schemas.microsoft.com/office/drawing/2010/main" val="0"/>
+              </a:ext>
+            </a:extLst>
+          </a:blip>
+          <a:srcRect/>
+          <a:stretch>
+            <a:fillRect/>
+          </a:stretch>
+        </p:blipFill>
+        <p:spPr bwMode="auto">
+          <a:xfrm>
+            <a:off x="2048026" y="5426623"/>
+            <a:ext cx="1242478" cy="1119350"/>
+          </a:xfrm>
+          <a:prstGeom prst="rect">
+            <a:avLst/>
+          </a:prstGeom>
+          <a:noFill/>
+          <a:extLst>
+            <a:ext uri="{909E8E84-426E-40DD-AFC4-6F175D3DCCD1}">
+              <a14:hiddenFill xmlns:a14="http://schemas.microsoft.com/office/drawing/2010/main">
+                <a:solidFill>
+                  <a:srgbClr val="FFFFFF"/>
+                </a:solidFill>
+              </a14:hiddenFill>
+            </a:ext>
+          </a:extLst>
+        </p:spPr>
+      </p:pic>
+      <p:sp>
+        <p:nvSpPr>
+          <p:cNvPr id="11" name="Rectangle 10">
+            <a:extLst>
+              <a:ext uri="{FF2B5EF4-FFF2-40B4-BE49-F238E27FC236}">
+                <a16:creationId xmlns:a16="http://schemas.microsoft.com/office/drawing/2014/main" id="{8D670C99-C14C-2F49-619E-E7AC8BE4904B}"/>
+              </a:ext>
+            </a:extLst>
+          </p:cNvPr>
+          <p:cNvSpPr/>
+          <p:nvPr/>
+        </p:nvSpPr>
+        <p:spPr>
+          <a:xfrm>
+            <a:off x="556118" y="3213126"/>
+            <a:ext cx="1094275" cy="3332847"/>
+          </a:xfrm>
+          <a:prstGeom prst="rect">
+            <a:avLst/>
+          </a:prstGeom>
         </p:spPr>
         <p:style>
           <a:lnRef idx="1">
@@ -5146,257 +4729,274 @@
           </a:fontRef>
         </p:style>
         <p:txBody>
-          <a:bodyPr wrap="square" rtlCol="0" anchor="ctr"/>
-          <a:lstStyle/>
-          <a:p>
-            <a:pPr algn="ctr">
-              <a:defRPr sz="1100" b="1"/>
-            </a:pPr>
-            <a:r>
-              <a:t>BEFORE OPTIMIZATION</a:t>
-            </a:r>
-          </a:p>
-        </p:txBody>
-      </p:sp>
-      <p:sp>
-        <p:nvSpPr>
-          <p:cNvPr id="5" name="TextBox 4"/>
-          <p:cNvSpPr txBox="1"/>
+          <a:bodyPr rtlCol="0" anchor="ctr"/>
+          <a:lstStyle/>
+          <a:p>
+            <a:pPr algn="ctr"/>
+            <a:r>
+              <a:rPr lang="en-IE" dirty="0"/>
+              <a:t>Sports</a:t>
+            </a:r>
+          </a:p>
+          <a:p>
+            <a:pPr algn="ctr"/>
+            <a:r>
+              <a:rPr lang="en-IE" dirty="0"/>
+              <a:t>Exchange</a:t>
+            </a:r>
+          </a:p>
+        </p:txBody>
+      </p:sp>
+      <p:pic>
+        <p:nvPicPr>
+          <p:cNvPr id="12" name="Picture 10" descr="AWS Lambda Under the Hood - Engineering ...">
+            <a:extLst>
+              <a:ext uri="{FF2B5EF4-FFF2-40B4-BE49-F238E27FC236}">
+                <a16:creationId xmlns:a16="http://schemas.microsoft.com/office/drawing/2014/main" id="{9B4ED7DD-AD17-5CCB-4C49-B56F8A93A028}"/>
+              </a:ext>
+            </a:extLst>
+          </p:cNvPr>
+          <p:cNvPicPr>
+            <a:picLocks noChangeAspect="1" noChangeArrowheads="1"/>
+          </p:cNvPicPr>
           <p:nvPr/>
-        </p:nvSpPr>
-        <p:spPr>
-          <a:xfrm>
-            <a:off x="457200" y="2011680"/>
-            <a:ext cx="3931920" cy="3017520"/>
+        </p:nvPicPr>
+        <p:blipFill>
+          <a:blip r:embed="rId6">
+            <a:extLst>
+              <a:ext uri="{28A0092B-C50C-407E-A947-70E740481C1C}">
+                <a14:useLocalDpi xmlns:a14="http://schemas.microsoft.com/office/drawing/2010/main" val="0"/>
+              </a:ext>
+            </a:extLst>
+          </a:blip>
+          <a:srcRect/>
+          <a:stretch>
+            <a:fillRect/>
+          </a:stretch>
+        </p:blipFill>
+        <p:spPr bwMode="auto">
+          <a:xfrm>
+            <a:off x="1960274" y="3213125"/>
+            <a:ext cx="1441557" cy="1422421"/>
           </a:xfrm>
           <a:prstGeom prst="rect">
             <a:avLst/>
           </a:prstGeom>
           <a:noFill/>
-        </p:spPr>
-        <p:txBody>
-          <a:bodyPr wrap="none">
-            <a:spAutoFit/>
-          </a:bodyPr>
-          <a:lstStyle/>
-          <a:p>
-            <a:pPr>
-              <a:defRPr sz="1400"/>
-            </a:pPr>
-            <a:r>
-              <a:t>Bedrock Input: .00</a:t>
-            </a:r>
-          </a:p>
-          <a:p>
-            <a:r>
-              <a:t>Bedrock Output: .00</a:t>
-            </a:r>
-          </a:p>
-          <a:p>
-            <a:r>
-              <a:t>Lambda Exec: .18</a:t>
-            </a:r>
-          </a:p>
-          <a:p>
-            <a:r>
-              <a:t>Infrastructure: .003</a:t>
-            </a:r>
-          </a:p>
-          <a:p>
-            <a:endParaRPr/>
-          </a:p>
-          <a:p>
-            <a:r>
-              <a:t>Total: .18</a:t>
-            </a:r>
-          </a:p>
-          <a:p>
-            <a:r>
-              <a:t>Per Page: .191</a:t>
-            </a:r>
-          </a:p>
-          <a:p>
-            <a:r>
-              <a:t>Time: 3.5 hours</a:t>
-            </a:r>
-          </a:p>
-          <a:p>
-            <a:r>
-              <a:t>Throughput: 70 pages/hr</a:t>
-            </a:r>
-          </a:p>
-        </p:txBody>
-      </p:sp>
-      <p:sp>
-        <p:nvSpPr>
-          <p:cNvPr id="6" name="Rectangle 5"/>
-          <p:cNvSpPr/>
+          <a:extLst>
+            <a:ext uri="{909E8E84-426E-40DD-AFC4-6F175D3DCCD1}">
+              <a14:hiddenFill xmlns:a14="http://schemas.microsoft.com/office/drawing/2010/main">
+                <a:solidFill>
+                  <a:srgbClr val="FFFFFF"/>
+                </a:solidFill>
+              </a14:hiddenFill>
+            </a:ext>
+          </a:extLst>
+        </p:spPr>
+      </p:pic>
+      <p:cxnSp>
+        <p:nvCxnSpPr>
+          <p:cNvPr id="13" name="Straight Arrow Connector 12">
+            <a:extLst>
+              <a:ext uri="{FF2B5EF4-FFF2-40B4-BE49-F238E27FC236}">
+                <a16:creationId xmlns:a16="http://schemas.microsoft.com/office/drawing/2014/main" id="{523B150E-83B6-1D8B-C4FA-6664AB2682A7}"/>
+              </a:ext>
+            </a:extLst>
+          </p:cNvPr>
+          <p:cNvCxnSpPr/>
           <p:nvPr/>
-        </p:nvSpPr>
+        </p:nvCxnSpPr>
         <p:spPr>
           <a:xfrm>
-            <a:off x="4754880" y="1280160"/>
-            <a:ext cx="3931920" cy="640080"/>
-          </a:xfrm>
-          <a:prstGeom prst="rect">
+            <a:off x="1785828" y="3593222"/>
+            <a:ext cx="235771" cy="0"/>
+          </a:xfrm>
+          <a:prstGeom prst="straightConnector1">
             <a:avLst/>
           </a:prstGeom>
-          <a:solidFill>
-            <a:srgbClr val="C8FFC8"/>
-          </a:solidFill>
-          <a:ln w="25400">
-            <a:solidFill>
-              <a:srgbClr val="0099CC"/>
-            </a:solidFill>
+          <a:ln>
+            <a:tailEnd type="triangle"/>
           </a:ln>
         </p:spPr>
         <p:style>
-          <a:lnRef idx="1">
+          <a:lnRef idx="2">
             <a:schemeClr val="accent1"/>
           </a:lnRef>
-          <a:fillRef idx="3">
+          <a:fillRef idx="0">
             <a:schemeClr val="accent1"/>
           </a:fillRef>
-          <a:effectRef idx="2">
+          <a:effectRef idx="1">
             <a:schemeClr val="accent1"/>
           </a:effectRef>
           <a:fontRef idx="minor">
-            <a:schemeClr val="lt1"/>
+            <a:schemeClr val="tx1"/>
           </a:fontRef>
         </p:style>
-        <p:txBody>
-          <a:bodyPr wrap="square" rtlCol="0" anchor="ctr"/>
-          <a:lstStyle/>
-          <a:p>
-            <a:pPr algn="ctr">
-              <a:defRPr sz="1100" b="1"/>
-            </a:pPr>
-            <a:r>
-              <a:t>AFTER OPTIMIZATION</a:t>
-            </a:r>
-          </a:p>
-        </p:txBody>
-      </p:sp>
-      <p:sp>
-        <p:nvSpPr>
-          <p:cNvPr id="7" name="TextBox 6"/>
-          <p:cNvSpPr txBox="1"/>
+      </p:cxnSp>
+      <p:cxnSp>
+        <p:nvCxnSpPr>
+          <p:cNvPr id="14" name="Straight Arrow Connector 13">
+            <a:extLst>
+              <a:ext uri="{FF2B5EF4-FFF2-40B4-BE49-F238E27FC236}">
+                <a16:creationId xmlns:a16="http://schemas.microsoft.com/office/drawing/2014/main" id="{F88E635D-B70A-0215-2A45-38C470C4845C}"/>
+              </a:ext>
+            </a:extLst>
+          </p:cNvPr>
+          <p:cNvCxnSpPr/>
           <p:nvPr/>
-        </p:nvSpPr>
+        </p:nvCxnSpPr>
         <p:spPr>
           <a:xfrm>
-            <a:off x="4754880" y="2011680"/>
-            <a:ext cx="3931920" cy="3017520"/>
-          </a:xfrm>
-          <a:prstGeom prst="rect">
+            <a:off x="1831250" y="5872323"/>
+            <a:ext cx="235771" cy="0"/>
+          </a:xfrm>
+          <a:prstGeom prst="straightConnector1">
             <a:avLst/>
           </a:prstGeom>
-          <a:noFill/>
-        </p:spPr>
-        <p:txBody>
-          <a:bodyPr wrap="none">
-            <a:spAutoFit/>
-          </a:bodyPr>
-          <a:lstStyle/>
-          <a:p>
-            <a:pPr>
-              <a:defRPr sz="1400"/>
-            </a:pPr>
-            <a:r>
-              <a:t>Bedrock Input: .51</a:t>
-            </a:r>
-          </a:p>
-          <a:p>
-            <a:r>
-              <a:t>Bedrock Output: .76</a:t>
-            </a:r>
-          </a:p>
-          <a:p>
-            <a:r>
-              <a:t>Lambda Exec: .047</a:t>
-            </a:r>
-          </a:p>
-          <a:p>
-            <a:r>
-              <a:t>Infrastructure: .003</a:t>
-            </a:r>
-          </a:p>
-          <a:p>
-            <a:endParaRPr/>
-          </a:p>
-          <a:p>
-            <a:r>
-              <a:t>Total: .31</a:t>
-            </a:r>
-          </a:p>
-          <a:p>
-            <a:r>
-              <a:t>Per Page: .022</a:t>
-            </a:r>
-          </a:p>
-          <a:p>
-            <a:r>
-              <a:t>Time: 30 minutes</a:t>
-            </a:r>
-          </a:p>
-          <a:p>
-            <a:r>
-              <a:t>Throughput: 200-300 pages/hr</a:t>
-            </a:r>
-          </a:p>
-        </p:txBody>
-      </p:sp>
-      <p:sp>
-        <p:nvSpPr>
-          <p:cNvPr id="8" name="Rectangle 7"/>
-          <p:cNvSpPr/>
+          <a:ln>
+            <a:tailEnd type="triangle"/>
+          </a:ln>
+        </p:spPr>
+        <p:style>
+          <a:lnRef idx="2">
+            <a:schemeClr val="accent1"/>
+          </a:lnRef>
+          <a:fillRef idx="0">
+            <a:schemeClr val="accent1"/>
+          </a:fillRef>
+          <a:effectRef idx="1">
+            <a:schemeClr val="accent1"/>
+          </a:effectRef>
+          <a:fontRef idx="minor">
+            <a:schemeClr val="tx1"/>
+          </a:fontRef>
+        </p:style>
+      </p:cxnSp>
+      <p:cxnSp>
+        <p:nvCxnSpPr>
+          <p:cNvPr id="15" name="Straight Arrow Connector 14">
+            <a:extLst>
+              <a:ext uri="{FF2B5EF4-FFF2-40B4-BE49-F238E27FC236}">
+                <a16:creationId xmlns:a16="http://schemas.microsoft.com/office/drawing/2014/main" id="{1F5C898C-E3FB-CB64-9FA8-EC8D15CC0C7E}"/>
+              </a:ext>
+            </a:extLst>
+          </p:cNvPr>
+          <p:cNvCxnSpPr/>
           <p:nvPr/>
-        </p:nvSpPr>
+        </p:nvCxnSpPr>
         <p:spPr>
           <a:xfrm>
-            <a:off x="1371600" y="5303520"/>
-            <a:ext cx="5943600" cy="548640"/>
-          </a:xfrm>
-          <a:prstGeom prst="rect">
+            <a:off x="3711711" y="3789633"/>
+            <a:ext cx="235771" cy="0"/>
+          </a:xfrm>
+          <a:prstGeom prst="straightConnector1">
             <a:avLst/>
           </a:prstGeom>
-          <a:solidFill>
-            <a:srgbClr val="FFFF96"/>
-          </a:solidFill>
-          <a:ln w="25400">
-            <a:solidFill>
-              <a:srgbClr val="0099CC"/>
-            </a:solidFill>
+          <a:ln>
+            <a:tailEnd type="triangle"/>
           </a:ln>
         </p:spPr>
         <p:style>
-          <a:lnRef idx="1">
+          <a:lnRef idx="2">
             <a:schemeClr val="accent1"/>
           </a:lnRef>
-          <a:fillRef idx="3">
+          <a:fillRef idx="0">
             <a:schemeClr val="accent1"/>
           </a:fillRef>
-          <a:effectRef idx="2">
+          <a:effectRef idx="1">
             <a:schemeClr val="accent1"/>
           </a:effectRef>
           <a:fontRef idx="minor">
-            <a:schemeClr val="lt1"/>
+            <a:schemeClr val="tx1"/>
           </a:fontRef>
         </p:style>
-        <p:txBody>
-          <a:bodyPr wrap="square" rtlCol="0" anchor="ctr"/>
-          <a:lstStyle/>
-          <a:p>
-            <a:pPr algn="ctr">
-              <a:defRPr sz="1100" b="1"/>
-            </a:pPr>
-            <a:r>
-              <a:t>SAVINGS: .87 per document (88%) • 7x faster</a:t>
-            </a:r>
-          </a:p>
-        </p:txBody>
-      </p:sp>
+      </p:cxnSp>
+      <p:cxnSp>
+        <p:nvCxnSpPr>
+          <p:cNvPr id="16" name="Straight Arrow Connector 15">
+            <a:extLst>
+              <a:ext uri="{FF2B5EF4-FFF2-40B4-BE49-F238E27FC236}">
+                <a16:creationId xmlns:a16="http://schemas.microsoft.com/office/drawing/2014/main" id="{199BEE41-F1B8-4B39-926E-B6F627A340F1}"/>
+              </a:ext>
+            </a:extLst>
+          </p:cNvPr>
+          <p:cNvCxnSpPr/>
+          <p:nvPr/>
+        </p:nvCxnSpPr>
+        <p:spPr>
+          <a:xfrm>
+            <a:off x="6804380" y="4020860"/>
+            <a:ext cx="235771" cy="0"/>
+          </a:xfrm>
+          <a:prstGeom prst="straightConnector1">
+            <a:avLst/>
+          </a:prstGeom>
+          <a:ln>
+            <a:tailEnd type="triangle"/>
+          </a:ln>
+        </p:spPr>
+        <p:style>
+          <a:lnRef idx="2">
+            <a:schemeClr val="accent1"/>
+          </a:lnRef>
+          <a:fillRef idx="0">
+            <a:schemeClr val="accent1"/>
+          </a:fillRef>
+          <a:effectRef idx="1">
+            <a:schemeClr val="accent1"/>
+          </a:effectRef>
+          <a:fontRef idx="minor">
+            <a:schemeClr val="tx1"/>
+          </a:fontRef>
+        </p:style>
+      </p:cxnSp>
+      <p:cxnSp>
+        <p:nvCxnSpPr>
+          <p:cNvPr id="17" name="Straight Arrow Connector 16">
+            <a:extLst>
+              <a:ext uri="{FF2B5EF4-FFF2-40B4-BE49-F238E27FC236}">
+                <a16:creationId xmlns:a16="http://schemas.microsoft.com/office/drawing/2014/main" id="{91D55DCE-98C7-8D90-DA1F-D056709B200A}"/>
+              </a:ext>
+            </a:extLst>
+          </p:cNvPr>
+          <p:cNvCxnSpPr>
+            <a:cxnSpLocks/>
+          </p:cNvCxnSpPr>
+          <p:nvPr/>
+        </p:nvCxnSpPr>
+        <p:spPr>
+          <a:xfrm>
+            <a:off x="5391531" y="5426622"/>
+            <a:ext cx="0" cy="236845"/>
+          </a:xfrm>
+          <a:prstGeom prst="straightConnector1">
+            <a:avLst/>
+          </a:prstGeom>
+          <a:ln>
+            <a:tailEnd type="triangle"/>
+          </a:ln>
+        </p:spPr>
+        <p:style>
+          <a:lnRef idx="2">
+            <a:schemeClr val="accent1"/>
+          </a:lnRef>
+          <a:fillRef idx="0">
+            <a:schemeClr val="accent1"/>
+          </a:fillRef>
+          <a:effectRef idx="1">
+            <a:schemeClr val="accent1"/>
+          </a:effectRef>
+          <a:fontRef idx="minor">
+            <a:schemeClr val="tx1"/>
+          </a:fontRef>
+        </p:style>
+      </p:cxnSp>
     </p:spTree>
+    <p:extLst>
+      <p:ext uri="{BB962C8B-B14F-4D97-AF65-F5344CB8AC3E}">
+        <p14:creationId xmlns:p14="http://schemas.microsoft.com/office/powerpoint/2010/main" val="3772832546"/>
+      </p:ext>
+    </p:extLst>
   </p:cSld>
   <p:clrMapOvr>
     <a:masterClrMapping/>
@@ -5423,33 +5023,14 @@
       </p:grpSpPr>
       <p:sp>
         <p:nvSpPr>
-          <p:cNvPr id="2" name="Title 1"/>
-          <p:cNvSpPr>
-            <a:spLocks noGrp="1"/>
-          </p:cNvSpPr>
-          <p:nvPr>
-            <p:ph type="title"/>
-          </p:nvPr>
-        </p:nvSpPr>
-        <p:spPr/>
-        <p:txBody>
-          <a:bodyPr/>
-          <a:lstStyle/>
-          <a:p>
-            <a:endParaRPr/>
-          </a:p>
-        </p:txBody>
-      </p:sp>
-      <p:sp>
-        <p:nvSpPr>
           <p:cNvPr id="3" name="TextBox 2"/>
           <p:cNvSpPr txBox="1"/>
           <p:nvPr/>
         </p:nvSpPr>
         <p:spPr>
           <a:xfrm>
-            <a:off x="457200" y="274320"/>
-            <a:ext cx="8229600" cy="731520"/>
+            <a:off x="317809" y="104820"/>
+            <a:ext cx="4063292" cy="584775"/>
           </a:xfrm>
           <a:prstGeom prst="rect">
             <a:avLst/>
@@ -5470,1208 +5051,427 @@
               </a:defRPr>
             </a:pPr>
             <a:r>
-              <a:t>Performance Metrics Comparison</a:t>
-            </a:r>
-          </a:p>
-        </p:txBody>
-      </p:sp>
-      <p:sp>
-        <p:nvSpPr>
-          <p:cNvPr id="4" name="Rectangle 3"/>
-          <p:cNvSpPr/>
+              <a:rPr lang="en-IE" dirty="0" err="1"/>
+              <a:t>FutureGenAI</a:t>
+            </a:r>
+            <a:r>
+              <a:rPr lang="en-IE" dirty="0"/>
+              <a:t> Roadmap</a:t>
+            </a:r>
+            <a:endParaRPr dirty="0"/>
+          </a:p>
+        </p:txBody>
+      </p:sp>
+      <p:sp>
+        <p:nvSpPr>
+          <p:cNvPr id="28" name="TextBox 27">
+            <a:extLst>
+              <a:ext uri="{FF2B5EF4-FFF2-40B4-BE49-F238E27FC236}">
+                <a16:creationId xmlns:a16="http://schemas.microsoft.com/office/drawing/2014/main" id="{EA9CF6AA-2977-84A7-0DAC-F198C8E76F6A}"/>
+              </a:ext>
+            </a:extLst>
+          </p:cNvPr>
+          <p:cNvSpPr txBox="1"/>
           <p:nvPr/>
         </p:nvSpPr>
         <p:spPr>
           <a:xfrm>
-            <a:off x="1371600" y="1280160"/>
-            <a:ext cx="2286000" cy="457200"/>
+            <a:off x="317809" y="659204"/>
+            <a:ext cx="7950819" cy="6093976"/>
           </a:xfrm>
           <a:prstGeom prst="rect">
             <a:avLst/>
           </a:prstGeom>
-          <a:solidFill>
-            <a:srgbClr val="006699"/>
-          </a:solidFill>
-          <a:ln w="25400">
-            <a:solidFill>
-              <a:srgbClr val="0099CC"/>
-            </a:solidFill>
-          </a:ln>
-        </p:spPr>
-        <p:style>
-          <a:lnRef idx="1">
-            <a:schemeClr val="accent1"/>
-          </a:lnRef>
-          <a:fillRef idx="3">
-            <a:schemeClr val="accent1"/>
-          </a:fillRef>
-          <a:effectRef idx="2">
-            <a:schemeClr val="accent1"/>
-          </a:effectRef>
-          <a:fontRef idx="minor">
-            <a:schemeClr val="lt1"/>
-          </a:fontRef>
-        </p:style>
-        <p:txBody>
-          <a:bodyPr wrap="square" rtlCol="0" anchor="ctr"/>
-          <a:lstStyle/>
-          <a:p>
-            <a:pPr algn="ctr">
-              <a:defRPr sz="1100" b="1"/>
-            </a:pPr>
-            <a:r>
-              <a:t>Metric</a:t>
-            </a:r>
-          </a:p>
-        </p:txBody>
-      </p:sp>
-      <p:sp>
-        <p:nvSpPr>
-          <p:cNvPr id="5" name="Rectangle 4"/>
-          <p:cNvSpPr/>
-          <p:nvPr/>
-        </p:nvSpPr>
-        <p:spPr>
-          <a:xfrm>
-            <a:off x="3840480" y="1280160"/>
-            <a:ext cx="1828800" cy="457200"/>
-          </a:xfrm>
-          <a:prstGeom prst="rect">
-            <a:avLst/>
-          </a:prstGeom>
-          <a:solidFill>
-            <a:srgbClr val="FFC8C8"/>
-          </a:solidFill>
-          <a:ln w="25400">
-            <a:solidFill>
-              <a:srgbClr val="0099CC"/>
-            </a:solidFill>
-          </a:ln>
-        </p:spPr>
-        <p:style>
-          <a:lnRef idx="1">
-            <a:schemeClr val="accent1"/>
-          </a:lnRef>
-          <a:fillRef idx="3">
-            <a:schemeClr val="accent1"/>
-          </a:fillRef>
-          <a:effectRef idx="2">
-            <a:schemeClr val="accent1"/>
-          </a:effectRef>
-          <a:fontRef idx="minor">
-            <a:schemeClr val="lt1"/>
-          </a:fontRef>
-        </p:style>
-        <p:txBody>
-          <a:bodyPr wrap="square" rtlCol="0" anchor="ctr"/>
-          <a:lstStyle/>
-          <a:p>
-            <a:pPr algn="ctr">
-              <a:defRPr sz="1100" b="1"/>
-            </a:pPr>
-            <a:r>
-              <a:t>BEFORE</a:t>
-            </a:r>
-          </a:p>
-        </p:txBody>
-      </p:sp>
-      <p:sp>
-        <p:nvSpPr>
-          <p:cNvPr id="6" name="Rectangle 5"/>
-          <p:cNvSpPr/>
-          <p:nvPr/>
-        </p:nvSpPr>
-        <p:spPr>
-          <a:xfrm>
-            <a:off x="5852160" y="1280160"/>
-            <a:ext cx="1828800" cy="457200"/>
-          </a:xfrm>
-          <a:prstGeom prst="rect">
-            <a:avLst/>
-          </a:prstGeom>
-          <a:solidFill>
-            <a:srgbClr val="C8FFC8"/>
-          </a:solidFill>
-          <a:ln w="25400">
-            <a:solidFill>
-              <a:srgbClr val="0099CC"/>
-            </a:solidFill>
-          </a:ln>
-        </p:spPr>
-        <p:style>
-          <a:lnRef idx="1">
-            <a:schemeClr val="accent1"/>
-          </a:lnRef>
-          <a:fillRef idx="3">
-            <a:schemeClr val="accent1"/>
-          </a:fillRef>
-          <a:effectRef idx="2">
-            <a:schemeClr val="accent1"/>
-          </a:effectRef>
-          <a:fontRef idx="minor">
-            <a:schemeClr val="lt1"/>
-          </a:fontRef>
-        </p:style>
-        <p:txBody>
-          <a:bodyPr wrap="square" rtlCol="0" anchor="ctr"/>
-          <a:lstStyle/>
-          <a:p>
-            <a:pPr algn="ctr">
-              <a:defRPr sz="1100" b="1"/>
-            </a:pPr>
-            <a:r>
-              <a:t>AFTER</a:t>
-            </a:r>
-          </a:p>
-        </p:txBody>
-      </p:sp>
-      <p:sp>
-        <p:nvSpPr>
-          <p:cNvPr id="7" name="Rectangle 6"/>
-          <p:cNvSpPr/>
-          <p:nvPr/>
-        </p:nvSpPr>
-        <p:spPr>
-          <a:xfrm>
-            <a:off x="1371600" y="1828800"/>
-            <a:ext cx="2286000" cy="457200"/>
-          </a:xfrm>
-          <a:prstGeom prst="rect">
-            <a:avLst/>
-          </a:prstGeom>
-          <a:solidFill>
-            <a:srgbClr val="F0F8FF"/>
-          </a:solidFill>
-          <a:ln w="25400">
-            <a:solidFill>
-              <a:srgbClr val="0099CC"/>
-            </a:solidFill>
-          </a:ln>
-        </p:spPr>
-        <p:style>
-          <a:lnRef idx="1">
-            <a:schemeClr val="accent1"/>
-          </a:lnRef>
-          <a:fillRef idx="3">
-            <a:schemeClr val="accent1"/>
-          </a:fillRef>
-          <a:effectRef idx="2">
-            <a:schemeClr val="accent1"/>
-          </a:effectRef>
-          <a:fontRef idx="minor">
-            <a:schemeClr val="lt1"/>
-          </a:fontRef>
-        </p:style>
-        <p:txBody>
-          <a:bodyPr wrap="square" rtlCol="0" anchor="ctr"/>
-          <a:lstStyle/>
-          <a:p>
-            <a:pPr algn="ctr">
-              <a:defRPr sz="1100" b="1"/>
-            </a:pPr>
-            <a:r>
-              <a:t>Time/Page</a:t>
-            </a:r>
-          </a:p>
-        </p:txBody>
-      </p:sp>
-      <p:sp>
-        <p:nvSpPr>
-          <p:cNvPr id="8" name="Rectangle 7"/>
-          <p:cNvSpPr/>
-          <p:nvPr/>
-        </p:nvSpPr>
-        <p:spPr>
-          <a:xfrm>
-            <a:off x="3840480" y="1828800"/>
-            <a:ext cx="1828800" cy="457200"/>
-          </a:xfrm>
-          <a:prstGeom prst="rect">
-            <a:avLst/>
-          </a:prstGeom>
-          <a:solidFill>
-            <a:srgbClr val="FFF0F0"/>
-          </a:solidFill>
-          <a:ln w="25400">
-            <a:solidFill>
-              <a:srgbClr val="0099CC"/>
-            </a:solidFill>
-          </a:ln>
-        </p:spPr>
-        <p:style>
-          <a:lnRef idx="1">
-            <a:schemeClr val="accent1"/>
-          </a:lnRef>
-          <a:fillRef idx="3">
-            <a:schemeClr val="accent1"/>
-          </a:fillRef>
-          <a:effectRef idx="2">
-            <a:schemeClr val="accent1"/>
-          </a:effectRef>
-          <a:fontRef idx="minor">
-            <a:schemeClr val="lt1"/>
-          </a:fontRef>
-        </p:style>
-        <p:txBody>
-          <a:bodyPr wrap="square" rtlCol="0" anchor="ctr"/>
-          <a:lstStyle/>
-          <a:p>
-            <a:pPr algn="ctr">
-              <a:defRPr sz="1100" b="1"/>
-            </a:pPr>
-            <a:r>
-              <a:t>60-85 sec</a:t>
-            </a:r>
-          </a:p>
-        </p:txBody>
-      </p:sp>
-      <p:sp>
-        <p:nvSpPr>
-          <p:cNvPr id="9" name="Rectangle 8"/>
-          <p:cNvSpPr/>
-          <p:nvPr/>
-        </p:nvSpPr>
-        <p:spPr>
-          <a:xfrm>
-            <a:off x="5852160" y="1828800"/>
-            <a:ext cx="1828800" cy="457200"/>
-          </a:xfrm>
-          <a:prstGeom prst="rect">
-            <a:avLst/>
-          </a:prstGeom>
-          <a:solidFill>
-            <a:srgbClr val="F0FFF0"/>
-          </a:solidFill>
-          <a:ln w="25400">
-            <a:solidFill>
-              <a:srgbClr val="0099CC"/>
-            </a:solidFill>
-          </a:ln>
-        </p:spPr>
-        <p:style>
-          <a:lnRef idx="1">
-            <a:schemeClr val="accent1"/>
-          </a:lnRef>
-          <a:fillRef idx="3">
-            <a:schemeClr val="accent1"/>
-          </a:fillRef>
-          <a:effectRef idx="2">
-            <a:schemeClr val="accent1"/>
-          </a:effectRef>
-          <a:fontRef idx="minor">
-            <a:schemeClr val="lt1"/>
-          </a:fontRef>
-        </p:style>
-        <p:txBody>
-          <a:bodyPr wrap="square" rtlCol="0" anchor="ctr"/>
-          <a:lstStyle/>
-          <a:p>
-            <a:pPr algn="ctr">
-              <a:defRPr sz="1100" b="1"/>
-            </a:pPr>
-            <a:r>
-              <a:t>7.6 sec</a:t>
-            </a:r>
-          </a:p>
-        </p:txBody>
-      </p:sp>
-      <p:sp>
-        <p:nvSpPr>
-          <p:cNvPr id="10" name="Rectangle 9"/>
-          <p:cNvSpPr/>
-          <p:nvPr/>
-        </p:nvSpPr>
-        <p:spPr>
-          <a:xfrm>
-            <a:off x="1371600" y="2340864"/>
-            <a:ext cx="2286000" cy="457200"/>
-          </a:xfrm>
-          <a:prstGeom prst="rect">
-            <a:avLst/>
-          </a:prstGeom>
-          <a:solidFill>
-            <a:srgbClr val="F0F8FF"/>
-          </a:solidFill>
-          <a:ln w="25400">
-            <a:solidFill>
-              <a:srgbClr val="0099CC"/>
-            </a:solidFill>
-          </a:ln>
-        </p:spPr>
-        <p:style>
-          <a:lnRef idx="1">
-            <a:schemeClr val="accent1"/>
-          </a:lnRef>
-          <a:fillRef idx="3">
-            <a:schemeClr val="accent1"/>
-          </a:fillRef>
-          <a:effectRef idx="2">
-            <a:schemeClr val="accent1"/>
-          </a:effectRef>
-          <a:fontRef idx="minor">
-            <a:schemeClr val="lt1"/>
-          </a:fontRef>
-        </p:style>
-        <p:txBody>
-          <a:bodyPr wrap="square" rtlCol="0" anchor="ctr"/>
-          <a:lstStyle/>
-          <a:p>
-            <a:pPr algn="ctr">
-              <a:defRPr sz="1100" b="1"/>
-            </a:pPr>
-            <a:r>
-              <a:t>Cost/Page</a:t>
-            </a:r>
-          </a:p>
-        </p:txBody>
-      </p:sp>
-      <p:sp>
-        <p:nvSpPr>
-          <p:cNvPr id="11" name="Rectangle 10"/>
-          <p:cNvSpPr/>
-          <p:nvPr/>
-        </p:nvSpPr>
-        <p:spPr>
-          <a:xfrm>
-            <a:off x="3840480" y="2340864"/>
-            <a:ext cx="1828800" cy="457200"/>
-          </a:xfrm>
-          <a:prstGeom prst="rect">
-            <a:avLst/>
-          </a:prstGeom>
-          <a:solidFill>
-            <a:srgbClr val="FFF0F0"/>
-          </a:solidFill>
-          <a:ln w="25400">
-            <a:solidFill>
-              <a:srgbClr val="0099CC"/>
-            </a:solidFill>
-          </a:ln>
-        </p:spPr>
-        <p:style>
-          <a:lnRef idx="1">
-            <a:schemeClr val="accent1"/>
-          </a:lnRef>
-          <a:fillRef idx="3">
-            <a:schemeClr val="accent1"/>
-          </a:fillRef>
-          <a:effectRef idx="2">
-            <a:schemeClr val="accent1"/>
-          </a:effectRef>
-          <a:fontRef idx="minor">
-            <a:schemeClr val="lt1"/>
-          </a:fontRef>
-        </p:style>
-        <p:txBody>
-          <a:bodyPr wrap="square" rtlCol="0" anchor="ctr"/>
-          <a:lstStyle/>
-          <a:p>
-            <a:pPr algn="ctr">
-              <a:defRPr sz="1100" b="1"/>
-            </a:pPr>
-            <a:r>
-              <a:t>.191</a:t>
-            </a:r>
-          </a:p>
-        </p:txBody>
-      </p:sp>
-      <p:sp>
-        <p:nvSpPr>
-          <p:cNvPr id="12" name="Rectangle 11"/>
-          <p:cNvSpPr/>
-          <p:nvPr/>
-        </p:nvSpPr>
-        <p:spPr>
-          <a:xfrm>
-            <a:off x="5852160" y="2340864"/>
-            <a:ext cx="1828800" cy="457200"/>
-          </a:xfrm>
-          <a:prstGeom prst="rect">
-            <a:avLst/>
-          </a:prstGeom>
-          <a:solidFill>
-            <a:srgbClr val="F0FFF0"/>
-          </a:solidFill>
-          <a:ln w="25400">
-            <a:solidFill>
-              <a:srgbClr val="0099CC"/>
-            </a:solidFill>
-          </a:ln>
-        </p:spPr>
-        <p:style>
-          <a:lnRef idx="1">
-            <a:schemeClr val="accent1"/>
-          </a:lnRef>
-          <a:fillRef idx="3">
-            <a:schemeClr val="accent1"/>
-          </a:fillRef>
-          <a:effectRef idx="2">
-            <a:schemeClr val="accent1"/>
-          </a:effectRef>
-          <a:fontRef idx="minor">
-            <a:schemeClr val="lt1"/>
-          </a:fontRef>
-        </p:style>
-        <p:txBody>
-          <a:bodyPr wrap="square" rtlCol="0" anchor="ctr"/>
-          <a:lstStyle/>
-          <a:p>
-            <a:pPr algn="ctr">
-              <a:defRPr sz="1100" b="1"/>
-            </a:pPr>
-            <a:r>
-              <a:t>.022</a:t>
-            </a:r>
-          </a:p>
-        </p:txBody>
-      </p:sp>
-      <p:sp>
-        <p:nvSpPr>
-          <p:cNvPr id="13" name="Rectangle 12"/>
-          <p:cNvSpPr/>
-          <p:nvPr/>
-        </p:nvSpPr>
-        <p:spPr>
-          <a:xfrm>
-            <a:off x="1371600" y="2852928"/>
-            <a:ext cx="2286000" cy="457200"/>
-          </a:xfrm>
-          <a:prstGeom prst="rect">
-            <a:avLst/>
-          </a:prstGeom>
-          <a:solidFill>
-            <a:srgbClr val="F0F8FF"/>
-          </a:solidFill>
-          <a:ln w="25400">
-            <a:solidFill>
-              <a:srgbClr val="0099CC"/>
-            </a:solidFill>
-          </a:ln>
-        </p:spPr>
-        <p:style>
-          <a:lnRef idx="1">
-            <a:schemeClr val="accent1"/>
-          </a:lnRef>
-          <a:fillRef idx="3">
-            <a:schemeClr val="accent1"/>
-          </a:fillRef>
-          <a:effectRef idx="2">
-            <a:schemeClr val="accent1"/>
-          </a:effectRef>
-          <a:fontRef idx="minor">
-            <a:schemeClr val="lt1"/>
-          </a:fontRef>
-        </p:style>
-        <p:txBody>
-          <a:bodyPr wrap="square" rtlCol="0" anchor="ctr"/>
-          <a:lstStyle/>
-          <a:p>
-            <a:pPr algn="ctr">
-              <a:defRPr sz="1100" b="1"/>
-            </a:pPr>
-            <a:r>
-              <a:t>Throughput</a:t>
-            </a:r>
-          </a:p>
-        </p:txBody>
-      </p:sp>
-      <p:sp>
-        <p:nvSpPr>
-          <p:cNvPr id="14" name="Rectangle 13"/>
-          <p:cNvSpPr/>
-          <p:nvPr/>
-        </p:nvSpPr>
-        <p:spPr>
-          <a:xfrm>
-            <a:off x="3840480" y="2852928"/>
-            <a:ext cx="1828800" cy="457200"/>
-          </a:xfrm>
-          <a:prstGeom prst="rect">
-            <a:avLst/>
-          </a:prstGeom>
-          <a:solidFill>
-            <a:srgbClr val="FFF0F0"/>
-          </a:solidFill>
-          <a:ln w="25400">
-            <a:solidFill>
-              <a:srgbClr val="0099CC"/>
-            </a:solidFill>
-          </a:ln>
-        </p:spPr>
-        <p:style>
-          <a:lnRef idx="1">
-            <a:schemeClr val="accent1"/>
-          </a:lnRef>
-          <a:fillRef idx="3">
-            <a:schemeClr val="accent1"/>
-          </a:fillRef>
-          <a:effectRef idx="2">
-            <a:schemeClr val="accent1"/>
-          </a:effectRef>
-          <a:fontRef idx="minor">
-            <a:schemeClr val="lt1"/>
-          </a:fontRef>
-        </p:style>
-        <p:txBody>
-          <a:bodyPr wrap="square" rtlCol="0" anchor="ctr"/>
-          <a:lstStyle/>
-          <a:p>
-            <a:pPr algn="ctr">
-              <a:defRPr sz="1100" b="1"/>
-            </a:pPr>
-            <a:r>
-              <a:t>70/hr</a:t>
-            </a:r>
-          </a:p>
-        </p:txBody>
-      </p:sp>
-      <p:sp>
-        <p:nvSpPr>
-          <p:cNvPr id="15" name="Rectangle 14"/>
-          <p:cNvSpPr/>
-          <p:nvPr/>
-        </p:nvSpPr>
-        <p:spPr>
-          <a:xfrm>
-            <a:off x="5852160" y="2852928"/>
-            <a:ext cx="1828800" cy="457200"/>
-          </a:xfrm>
-          <a:prstGeom prst="rect">
-            <a:avLst/>
-          </a:prstGeom>
-          <a:solidFill>
-            <a:srgbClr val="F0FFF0"/>
-          </a:solidFill>
-          <a:ln w="25400">
-            <a:solidFill>
-              <a:srgbClr val="0099CC"/>
-            </a:solidFill>
-          </a:ln>
-        </p:spPr>
-        <p:style>
-          <a:lnRef idx="1">
-            <a:schemeClr val="accent1"/>
-          </a:lnRef>
-          <a:fillRef idx="3">
-            <a:schemeClr val="accent1"/>
-          </a:fillRef>
-          <a:effectRef idx="2">
-            <a:schemeClr val="accent1"/>
-          </a:effectRef>
-          <a:fontRef idx="minor">
-            <a:schemeClr val="lt1"/>
-          </a:fontRef>
-        </p:style>
-        <p:txBody>
-          <a:bodyPr wrap="square" rtlCol="0" anchor="ctr"/>
-          <a:lstStyle/>
-          <a:p>
-            <a:pPr algn="ctr">
-              <a:defRPr sz="1100" b="1"/>
-            </a:pPr>
-            <a:r>
-              <a:t>200-300/hr</a:t>
-            </a:r>
-          </a:p>
-        </p:txBody>
-      </p:sp>
-      <p:sp>
-        <p:nvSpPr>
-          <p:cNvPr id="16" name="Rectangle 15"/>
-          <p:cNvSpPr/>
-          <p:nvPr/>
-        </p:nvSpPr>
-        <p:spPr>
-          <a:xfrm>
-            <a:off x="1371600" y="3364992"/>
-            <a:ext cx="2286000" cy="457200"/>
-          </a:xfrm>
-          <a:prstGeom prst="rect">
-            <a:avLst/>
-          </a:prstGeom>
-          <a:solidFill>
-            <a:srgbClr val="F0F8FF"/>
-          </a:solidFill>
-          <a:ln w="25400">
-            <a:solidFill>
-              <a:srgbClr val="0099CC"/>
-            </a:solidFill>
-          </a:ln>
-        </p:spPr>
-        <p:style>
-          <a:lnRef idx="1">
-            <a:schemeClr val="accent1"/>
-          </a:lnRef>
-          <a:fillRef idx="3">
-            <a:schemeClr val="accent1"/>
-          </a:fillRef>
-          <a:effectRef idx="2">
-            <a:schemeClr val="accent1"/>
-          </a:effectRef>
-          <a:fontRef idx="minor">
-            <a:schemeClr val="lt1"/>
-          </a:fontRef>
-        </p:style>
-        <p:txBody>
-          <a:bodyPr wrap="square" rtlCol="0" anchor="ctr"/>
-          <a:lstStyle/>
-          <a:p>
-            <a:pPr algn="ctr">
-              <a:defRPr sz="1100" b="1"/>
-            </a:pPr>
-            <a:r>
-              <a:t>Success Rate</a:t>
-            </a:r>
-          </a:p>
-        </p:txBody>
-      </p:sp>
-      <p:sp>
-        <p:nvSpPr>
-          <p:cNvPr id="17" name="Rectangle 16"/>
-          <p:cNvSpPr/>
-          <p:nvPr/>
-        </p:nvSpPr>
-        <p:spPr>
-          <a:xfrm>
-            <a:off x="3840480" y="3364992"/>
-            <a:ext cx="1828800" cy="457200"/>
-          </a:xfrm>
-          <a:prstGeom prst="rect">
-            <a:avLst/>
-          </a:prstGeom>
-          <a:solidFill>
-            <a:srgbClr val="FFF0F0"/>
-          </a:solidFill>
-          <a:ln w="25400">
-            <a:solidFill>
-              <a:srgbClr val="0099CC"/>
-            </a:solidFill>
-          </a:ln>
-        </p:spPr>
-        <p:style>
-          <a:lnRef idx="1">
-            <a:schemeClr val="accent1"/>
-          </a:lnRef>
-          <a:fillRef idx="3">
-            <a:schemeClr val="accent1"/>
-          </a:fillRef>
-          <a:effectRef idx="2">
-            <a:schemeClr val="accent1"/>
-          </a:effectRef>
-          <a:fontRef idx="minor">
-            <a:schemeClr val="lt1"/>
-          </a:fontRef>
-        </p:style>
-        <p:txBody>
-          <a:bodyPr wrap="square" rtlCol="0" anchor="ctr"/>
-          <a:lstStyle/>
-          <a:p>
-            <a:pPr algn="ctr">
-              <a:defRPr sz="1100" b="1"/>
-            </a:pPr>
-            <a:r>
-              <a:t>24%</a:t>
-            </a:r>
-          </a:p>
-        </p:txBody>
-      </p:sp>
-      <p:sp>
-        <p:nvSpPr>
-          <p:cNvPr id="18" name="Rectangle 17"/>
-          <p:cNvSpPr/>
-          <p:nvPr/>
-        </p:nvSpPr>
-        <p:spPr>
-          <a:xfrm>
-            <a:off x="5852160" y="3364992"/>
-            <a:ext cx="1828800" cy="457200"/>
-          </a:xfrm>
-          <a:prstGeom prst="rect">
-            <a:avLst/>
-          </a:prstGeom>
-          <a:solidFill>
-            <a:srgbClr val="F0FFF0"/>
-          </a:solidFill>
-          <a:ln w="25400">
-            <a:solidFill>
-              <a:srgbClr val="0099CC"/>
-            </a:solidFill>
-          </a:ln>
-        </p:spPr>
-        <p:style>
-          <a:lnRef idx="1">
-            <a:schemeClr val="accent1"/>
-          </a:lnRef>
-          <a:fillRef idx="3">
-            <a:schemeClr val="accent1"/>
-          </a:fillRef>
-          <a:effectRef idx="2">
-            <a:schemeClr val="accent1"/>
-          </a:effectRef>
-          <a:fontRef idx="minor">
-            <a:schemeClr val="lt1"/>
-          </a:fontRef>
-        </p:style>
-        <p:txBody>
-          <a:bodyPr wrap="square" rtlCol="0" anchor="ctr"/>
-          <a:lstStyle/>
-          <a:p>
-            <a:pPr algn="ctr">
-              <a:defRPr sz="1100" b="1"/>
-            </a:pPr>
-            <a:r>
-              <a:t>90%</a:t>
-            </a:r>
-          </a:p>
-        </p:txBody>
-      </p:sp>
-      <p:sp>
-        <p:nvSpPr>
-          <p:cNvPr id="19" name="Rectangle 18"/>
-          <p:cNvSpPr/>
-          <p:nvPr/>
-        </p:nvSpPr>
-        <p:spPr>
-          <a:xfrm>
-            <a:off x="1371600" y="3877056"/>
-            <a:ext cx="2286000" cy="457200"/>
-          </a:xfrm>
-          <a:prstGeom prst="rect">
-            <a:avLst/>
-          </a:prstGeom>
-          <a:solidFill>
-            <a:srgbClr val="F0F8FF"/>
-          </a:solidFill>
-          <a:ln w="25400">
-            <a:solidFill>
-              <a:srgbClr val="0099CC"/>
-            </a:solidFill>
-          </a:ln>
-        </p:spPr>
-        <p:style>
-          <a:lnRef idx="1">
-            <a:schemeClr val="accent1"/>
-          </a:lnRef>
-          <a:fillRef idx="3">
-            <a:schemeClr val="accent1"/>
-          </a:fillRef>
-          <a:effectRef idx="2">
-            <a:schemeClr val="accent1"/>
-          </a:effectRef>
-          <a:fontRef idx="minor">
-            <a:schemeClr val="lt1"/>
-          </a:fontRef>
-        </p:style>
-        <p:txBody>
-          <a:bodyPr wrap="square" rtlCol="0" anchor="ctr"/>
-          <a:lstStyle/>
-          <a:p>
-            <a:pPr algn="ctr">
-              <a:defRPr sz="1100" b="1"/>
-            </a:pPr>
-            <a:r>
-              <a:t>API Calls</a:t>
-            </a:r>
-          </a:p>
-        </p:txBody>
-      </p:sp>
-      <p:sp>
-        <p:nvSpPr>
-          <p:cNvPr id="20" name="Rectangle 19"/>
-          <p:cNvSpPr/>
-          <p:nvPr/>
-        </p:nvSpPr>
-        <p:spPr>
-          <a:xfrm>
-            <a:off x="3840480" y="3877056"/>
-            <a:ext cx="1828800" cy="457200"/>
-          </a:xfrm>
-          <a:prstGeom prst="rect">
-            <a:avLst/>
-          </a:prstGeom>
-          <a:solidFill>
-            <a:srgbClr val="FFF0F0"/>
-          </a:solidFill>
-          <a:ln w="25400">
-            <a:solidFill>
-              <a:srgbClr val="0099CC"/>
-            </a:solidFill>
-          </a:ln>
-        </p:spPr>
-        <p:style>
-          <a:lnRef idx="1">
-            <a:schemeClr val="accent1"/>
-          </a:lnRef>
-          <a:fillRef idx="3">
-            <a:schemeClr val="accent1"/>
-          </a:fillRef>
-          <a:effectRef idx="2">
-            <a:schemeClr val="accent1"/>
-          </a:effectRef>
-          <a:fontRef idx="minor">
-            <a:schemeClr val="lt1"/>
-          </a:fontRef>
-        </p:style>
-        <p:txBody>
-          <a:bodyPr wrap="square" rtlCol="0" anchor="ctr"/>
-          <a:lstStyle/>
-          <a:p>
-            <a:pPr algn="ctr">
-              <a:defRPr sz="1100" b="1"/>
-            </a:pPr>
-            <a:r>
-              <a:t>5/page</a:t>
-            </a:r>
-          </a:p>
-        </p:txBody>
-      </p:sp>
-      <p:sp>
-        <p:nvSpPr>
-          <p:cNvPr id="21" name="Rectangle 20"/>
-          <p:cNvSpPr/>
-          <p:nvPr/>
-        </p:nvSpPr>
-        <p:spPr>
-          <a:xfrm>
-            <a:off x="5852160" y="3877056"/>
-            <a:ext cx="1828800" cy="457200"/>
-          </a:xfrm>
-          <a:prstGeom prst="rect">
-            <a:avLst/>
-          </a:prstGeom>
-          <a:solidFill>
-            <a:srgbClr val="F0FFF0"/>
-          </a:solidFill>
-          <a:ln w="25400">
-            <a:solidFill>
-              <a:srgbClr val="0099CC"/>
-            </a:solidFill>
-          </a:ln>
-        </p:spPr>
-        <p:style>
-          <a:lnRef idx="1">
-            <a:schemeClr val="accent1"/>
-          </a:lnRef>
-          <a:fillRef idx="3">
-            <a:schemeClr val="accent1"/>
-          </a:fillRef>
-          <a:effectRef idx="2">
-            <a:schemeClr val="accent1"/>
-          </a:effectRef>
-          <a:fontRef idx="minor">
-            <a:schemeClr val="lt1"/>
-          </a:fontRef>
-        </p:style>
-        <p:txBody>
-          <a:bodyPr wrap="square" rtlCol="0" anchor="ctr"/>
-          <a:lstStyle/>
-          <a:p>
-            <a:pPr algn="ctr">
-              <a:defRPr sz="1100" b="1"/>
-            </a:pPr>
-            <a:r>
-              <a:t>1/page</a:t>
-            </a:r>
-          </a:p>
-        </p:txBody>
-      </p:sp>
-      <p:sp>
-        <p:nvSpPr>
-          <p:cNvPr id="22" name="Rectangle 21"/>
-          <p:cNvSpPr/>
-          <p:nvPr/>
-        </p:nvSpPr>
-        <p:spPr>
-          <a:xfrm>
-            <a:off x="1371600" y="4389120"/>
-            <a:ext cx="2286000" cy="457200"/>
-          </a:xfrm>
-          <a:prstGeom prst="rect">
-            <a:avLst/>
-          </a:prstGeom>
-          <a:solidFill>
-            <a:srgbClr val="F0F8FF"/>
-          </a:solidFill>
-          <a:ln w="25400">
-            <a:solidFill>
-              <a:srgbClr val="0099CC"/>
-            </a:solidFill>
-          </a:ln>
-        </p:spPr>
-        <p:style>
-          <a:lnRef idx="1">
-            <a:schemeClr val="accent1"/>
-          </a:lnRef>
-          <a:fillRef idx="3">
-            <a:schemeClr val="accent1"/>
-          </a:fillRef>
-          <a:effectRef idx="2">
-            <a:schemeClr val="accent1"/>
-          </a:effectRef>
-          <a:fontRef idx="minor">
-            <a:schemeClr val="lt1"/>
-          </a:fontRef>
-        </p:style>
-        <p:txBody>
-          <a:bodyPr wrap="square" rtlCol="0" anchor="ctr"/>
-          <a:lstStyle/>
-          <a:p>
-            <a:pPr algn="ctr">
-              <a:defRPr sz="1100" b="1"/>
-            </a:pPr>
-            <a:r>
-              <a:t>Tokens</a:t>
-            </a:r>
-          </a:p>
-        </p:txBody>
-      </p:sp>
-      <p:sp>
-        <p:nvSpPr>
-          <p:cNvPr id="23" name="Rectangle 22"/>
-          <p:cNvSpPr/>
-          <p:nvPr/>
-        </p:nvSpPr>
-        <p:spPr>
-          <a:xfrm>
-            <a:off x="3840480" y="4389120"/>
-            <a:ext cx="1828800" cy="457200"/>
-          </a:xfrm>
-          <a:prstGeom prst="rect">
-            <a:avLst/>
-          </a:prstGeom>
-          <a:solidFill>
-            <a:srgbClr val="FFF0F0"/>
-          </a:solidFill>
-          <a:ln w="25400">
-            <a:solidFill>
-              <a:srgbClr val="0099CC"/>
-            </a:solidFill>
-          </a:ln>
-        </p:spPr>
-        <p:style>
-          <a:lnRef idx="1">
-            <a:schemeClr val="accent1"/>
-          </a:lnRef>
-          <a:fillRef idx="3">
-            <a:schemeClr val="accent1"/>
-          </a:fillRef>
-          <a:effectRef idx="2">
-            <a:schemeClr val="accent1"/>
-          </a:effectRef>
-          <a:fontRef idx="minor">
-            <a:schemeClr val="lt1"/>
-          </a:fontRef>
-        </p:style>
-        <p:txBody>
-          <a:bodyPr wrap="square" rtlCol="0" anchor="ctr"/>
-          <a:lstStyle/>
-          <a:p>
-            <a:pPr algn="ctr">
-              <a:defRPr sz="1100" b="1"/>
-            </a:pPr>
-            <a:r>
-              <a:t>10K/page</a:t>
-            </a:r>
-          </a:p>
-        </p:txBody>
-      </p:sp>
-      <p:sp>
-        <p:nvSpPr>
-          <p:cNvPr id="24" name="Rectangle 23"/>
-          <p:cNvSpPr/>
-          <p:nvPr/>
-        </p:nvSpPr>
-        <p:spPr>
-          <a:xfrm>
-            <a:off x="5852160" y="4389120"/>
-            <a:ext cx="1828800" cy="457200"/>
-          </a:xfrm>
-          <a:prstGeom prst="rect">
-            <a:avLst/>
-          </a:prstGeom>
-          <a:solidFill>
-            <a:srgbClr val="F0FFF0"/>
-          </a:solidFill>
-          <a:ln w="25400">
-            <a:solidFill>
-              <a:srgbClr val="0099CC"/>
-            </a:solidFill>
-          </a:ln>
-        </p:spPr>
-        <p:style>
-          <a:lnRef idx="1">
-            <a:schemeClr val="accent1"/>
-          </a:lnRef>
-          <a:fillRef idx="3">
-            <a:schemeClr val="accent1"/>
-          </a:fillRef>
-          <a:effectRef idx="2">
-            <a:schemeClr val="accent1"/>
-          </a:effectRef>
-          <a:fontRef idx="minor">
-            <a:schemeClr val="lt1"/>
-          </a:fontRef>
-        </p:style>
-        <p:txBody>
-          <a:bodyPr wrap="square" rtlCol="0" anchor="ctr"/>
-          <a:lstStyle/>
-          <a:p>
-            <a:pPr algn="ctr">
-              <a:defRPr sz="1100" b="1"/>
-            </a:pPr>
-            <a:r>
-              <a:t>2K/page</a:t>
-            </a:r>
-          </a:p>
-        </p:txBody>
-      </p:sp>
-      <p:sp>
-        <p:nvSpPr>
-          <p:cNvPr id="25" name="Rectangle 24"/>
-          <p:cNvSpPr/>
-          <p:nvPr/>
-        </p:nvSpPr>
-        <p:spPr>
-          <a:xfrm>
-            <a:off x="1371600" y="4901184"/>
-            <a:ext cx="2286000" cy="457200"/>
-          </a:xfrm>
-          <a:prstGeom prst="rect">
-            <a:avLst/>
-          </a:prstGeom>
-          <a:solidFill>
-            <a:srgbClr val="F0F8FF"/>
-          </a:solidFill>
-          <a:ln w="25400">
-            <a:solidFill>
-              <a:srgbClr val="0099CC"/>
-            </a:solidFill>
-          </a:ln>
-        </p:spPr>
-        <p:style>
-          <a:lnRef idx="1">
-            <a:schemeClr val="accent1"/>
-          </a:lnRef>
-          <a:fillRef idx="3">
-            <a:schemeClr val="accent1"/>
-          </a:fillRef>
-          <a:effectRef idx="2">
-            <a:schemeClr val="accent1"/>
-          </a:effectRef>
-          <a:fontRef idx="minor">
-            <a:schemeClr val="lt1"/>
-          </a:fontRef>
-        </p:style>
-        <p:txBody>
-          <a:bodyPr wrap="square" rtlCol="0" anchor="ctr"/>
-          <a:lstStyle/>
-          <a:p>
-            <a:pPr algn="ctr">
-              <a:defRPr sz="1100" b="1"/>
-            </a:pPr>
-            <a:r>
-              <a:t>237 Pages</a:t>
-            </a:r>
-          </a:p>
-        </p:txBody>
-      </p:sp>
-      <p:sp>
-        <p:nvSpPr>
-          <p:cNvPr id="26" name="Rectangle 25"/>
-          <p:cNvSpPr/>
-          <p:nvPr/>
-        </p:nvSpPr>
-        <p:spPr>
-          <a:xfrm>
-            <a:off x="3840480" y="4901184"/>
-            <a:ext cx="1828800" cy="457200"/>
-          </a:xfrm>
-          <a:prstGeom prst="rect">
-            <a:avLst/>
-          </a:prstGeom>
-          <a:solidFill>
-            <a:srgbClr val="FFF0F0"/>
-          </a:solidFill>
-          <a:ln w="25400">
-            <a:solidFill>
-              <a:srgbClr val="0099CC"/>
-            </a:solidFill>
-          </a:ln>
-        </p:spPr>
-        <p:style>
-          <a:lnRef idx="1">
-            <a:schemeClr val="accent1"/>
-          </a:lnRef>
-          <a:fillRef idx="3">
-            <a:schemeClr val="accent1"/>
-          </a:fillRef>
-          <a:effectRef idx="2">
-            <a:schemeClr val="accent1"/>
-          </a:effectRef>
-          <a:fontRef idx="minor">
-            <a:schemeClr val="lt1"/>
-          </a:fontRef>
-        </p:style>
-        <p:txBody>
-          <a:bodyPr wrap="square" rtlCol="0" anchor="ctr"/>
-          <a:lstStyle/>
-          <a:p>
-            <a:pPr algn="ctr">
-              <a:defRPr sz="1100" b="1"/>
-            </a:pPr>
-            <a:r>
-              <a:t>3.5 hours</a:t>
-            </a:r>
-          </a:p>
-        </p:txBody>
-      </p:sp>
-      <p:sp>
-        <p:nvSpPr>
-          <p:cNvPr id="27" name="Rectangle 26"/>
-          <p:cNvSpPr/>
-          <p:nvPr/>
-        </p:nvSpPr>
-        <p:spPr>
-          <a:xfrm>
-            <a:off x="5852160" y="4901184"/>
-            <a:ext cx="1828800" cy="457200"/>
-          </a:xfrm>
-          <a:prstGeom prst="rect">
-            <a:avLst/>
-          </a:prstGeom>
-          <a:solidFill>
-            <a:srgbClr val="F0FFF0"/>
-          </a:solidFill>
-          <a:ln w="25400">
-            <a:solidFill>
-              <a:srgbClr val="0099CC"/>
-            </a:solidFill>
-          </a:ln>
-        </p:spPr>
-        <p:style>
-          <a:lnRef idx="1">
-            <a:schemeClr val="accent1"/>
-          </a:lnRef>
-          <a:fillRef idx="3">
-            <a:schemeClr val="accent1"/>
-          </a:fillRef>
-          <a:effectRef idx="2">
-            <a:schemeClr val="accent1"/>
-          </a:effectRef>
-          <a:fontRef idx="minor">
-            <a:schemeClr val="lt1"/>
-          </a:fontRef>
-        </p:style>
-        <p:txBody>
-          <a:bodyPr wrap="square" rtlCol="0" anchor="ctr"/>
-          <a:lstStyle/>
-          <a:p>
-            <a:pPr algn="ctr">
-              <a:defRPr sz="1100" b="1"/>
-            </a:pPr>
-            <a:r>
-              <a:t>30 min</a:t>
-            </a:r>
+          <a:noFill/>
+        </p:spPr>
+        <p:txBody>
+          <a:bodyPr wrap="square" rtlCol="0">
+            <a:spAutoFit/>
+          </a:bodyPr>
+          <a:lstStyle/>
+          <a:p>
+            <a:r>
+              <a:rPr lang="en-IE" sz="1000" b="1" dirty="0"/>
+              <a:t>## AI Applications Pipeline</a:t>
+            </a:r>
+            <a:endParaRPr lang="en-IE" sz="1000" dirty="0"/>
+          </a:p>
+          <a:p>
+            <a:r>
+              <a:rPr lang="en-IE" sz="1000" b="1" dirty="0"/>
+              <a:t>### Healthcare &amp; Medical</a:t>
+            </a:r>
+            <a:endParaRPr lang="en-IE" sz="1000" dirty="0"/>
+          </a:p>
+          <a:p>
+            <a:r>
+              <a:rPr lang="en-IE" sz="1000" dirty="0"/>
+              <a:t>1. </a:t>
+            </a:r>
+            <a:r>
+              <a:rPr lang="en-IE" sz="1000" b="1" dirty="0"/>
+              <a:t>**AI Radiology &amp; Imaging Analyst**</a:t>
+            </a:r>
+            <a:r>
+              <a:rPr lang="en-IE" sz="1000" dirty="0"/>
+              <a:t> - Automated diagnostic image analysis</a:t>
+            </a:r>
+          </a:p>
+          <a:p>
+            <a:r>
+              <a:rPr lang="en-IE" sz="1000" dirty="0"/>
+              <a:t>2. </a:t>
+            </a:r>
+            <a:r>
+              <a:rPr lang="en-IE" sz="1000" b="1" dirty="0"/>
+              <a:t>**AI Clinical Decision Support**</a:t>
+            </a:r>
+            <a:r>
+              <a:rPr lang="en-IE" sz="1000" dirty="0"/>
+              <a:t> - Doctor assistant for diagnosis and treatment</a:t>
+            </a:r>
+          </a:p>
+          <a:p>
+            <a:r>
+              <a:rPr lang="en-IE" sz="1000" dirty="0"/>
+              <a:t>3. </a:t>
+            </a:r>
+            <a:r>
+              <a:rPr lang="en-IE" sz="1000" b="1" dirty="0"/>
+              <a:t>**AI Mental Health Coach**</a:t>
+            </a:r>
+            <a:r>
+              <a:rPr lang="en-IE" sz="1000" dirty="0"/>
+              <a:t> - Therapeutic support and mental wellness monitoring</a:t>
+            </a:r>
+          </a:p>
+          <a:p>
+            <a:endParaRPr lang="en-IE" sz="1000" dirty="0"/>
+          </a:p>
+          <a:p>
+            <a:r>
+              <a:rPr lang="en-IE" sz="1000" b="1" dirty="0"/>
+              <a:t>### Legal &amp; Compliance</a:t>
+            </a:r>
+            <a:endParaRPr lang="en-IE" sz="1000" dirty="0"/>
+          </a:p>
+          <a:p>
+            <a:r>
+              <a:rPr lang="en-IE" sz="1000" dirty="0"/>
+              <a:t>4. </a:t>
+            </a:r>
+            <a:r>
+              <a:rPr lang="en-IE" sz="1000" b="1" dirty="0"/>
+              <a:t>**AI Contract Reviewer**</a:t>
+            </a:r>
+            <a:r>
+              <a:rPr lang="en-IE" sz="1000" dirty="0"/>
+              <a:t> - Automated contract analysis and risk detection</a:t>
+            </a:r>
+          </a:p>
+          <a:p>
+            <a:r>
+              <a:rPr lang="en-IE" sz="1000" dirty="0"/>
+              <a:t>5. </a:t>
+            </a:r>
+            <a:r>
+              <a:rPr lang="en-IE" sz="1000" b="1" dirty="0"/>
+              <a:t>**AI Legal Researcher**</a:t>
+            </a:r>
+            <a:r>
+              <a:rPr lang="en-IE" sz="1000" dirty="0"/>
+              <a:t> - Case law and precedent search automation</a:t>
+            </a:r>
+          </a:p>
+          <a:p>
+            <a:r>
+              <a:rPr lang="en-IE" sz="1000" dirty="0"/>
+              <a:t>6. </a:t>
+            </a:r>
+            <a:r>
+              <a:rPr lang="en-IE" sz="1000" b="1" dirty="0"/>
+              <a:t>**AI Policy Impact Analyst**</a:t>
+            </a:r>
+            <a:r>
+              <a:rPr lang="en-IE" sz="1000" dirty="0"/>
+              <a:t> - Regulatory impact assessment</a:t>
+            </a:r>
+          </a:p>
+          <a:p>
+            <a:r>
+              <a:rPr lang="en-IE" sz="1000" dirty="0"/>
+              <a:t>7. </a:t>
+            </a:r>
+            <a:r>
+              <a:rPr lang="en-IE" sz="1000" b="1" dirty="0"/>
+              <a:t>**AI Policy Enforcement Agent**</a:t>
+            </a:r>
+            <a:r>
+              <a:rPr lang="en-IE" sz="1000" dirty="0"/>
+              <a:t> - Compliance monitoring and enforcement</a:t>
+            </a:r>
+          </a:p>
+          <a:p>
+            <a:endParaRPr lang="en-IE" sz="1000" dirty="0"/>
+          </a:p>
+          <a:p>
+            <a:r>
+              <a:rPr lang="en-IE" sz="1000" b="1" dirty="0"/>
+              <a:t>### Financial Services</a:t>
+            </a:r>
+            <a:endParaRPr lang="en-IE" sz="1000" dirty="0"/>
+          </a:p>
+          <a:p>
+            <a:r>
+              <a:rPr lang="en-IE" sz="1000" dirty="0"/>
+              <a:t>8. </a:t>
+            </a:r>
+            <a:r>
+              <a:rPr lang="en-IE" sz="1000" b="1" dirty="0"/>
+              <a:t>**AI Portfolio Manager**</a:t>
+            </a:r>
+            <a:r>
+              <a:rPr lang="en-IE" sz="1000" dirty="0"/>
+              <a:t> - Automated investment management</a:t>
+            </a:r>
+          </a:p>
+          <a:p>
+            <a:r>
+              <a:rPr lang="en-IE" sz="1000" dirty="0"/>
+              <a:t>9. </a:t>
+            </a:r>
+            <a:r>
+              <a:rPr lang="en-IE" sz="1000" b="1" dirty="0"/>
+              <a:t>**AI CFO Assistant**</a:t>
+            </a:r>
+            <a:r>
+              <a:rPr lang="en-IE" sz="1000" dirty="0"/>
+              <a:t> - Financial planning and analysis automation</a:t>
+            </a:r>
+          </a:p>
+          <a:p>
+            <a:r>
+              <a:rPr lang="en-IE" sz="1000" dirty="0"/>
+              <a:t>10. </a:t>
+            </a:r>
+            <a:r>
+              <a:rPr lang="en-IE" sz="1000" b="1" dirty="0"/>
+              <a:t>**AI Fraud Detection Officer**</a:t>
+            </a:r>
+            <a:r>
+              <a:rPr lang="en-IE" sz="1000" dirty="0"/>
+              <a:t> - Transaction monitoring and fraud prevention</a:t>
+            </a:r>
+          </a:p>
+          <a:p>
+            <a:r>
+              <a:rPr lang="en-IE" sz="1000" dirty="0"/>
+              <a:t>11. </a:t>
+            </a:r>
+            <a:r>
+              <a:rPr lang="en-IE" sz="1000" b="1" dirty="0"/>
+              <a:t>**AI Tax Audit Assistant**</a:t>
+            </a:r>
+            <a:r>
+              <a:rPr lang="en-IE" sz="1000" dirty="0"/>
+              <a:t> - Tax compliance and audit automation</a:t>
+            </a:r>
+          </a:p>
+          <a:p>
+            <a:r>
+              <a:rPr lang="en-IE" sz="1000" dirty="0"/>
+              <a:t>12. </a:t>
+            </a:r>
+            <a:r>
+              <a:rPr lang="en-IE" sz="1000" b="1" dirty="0"/>
+              <a:t>**AI Risk &amp; Compliance Agent**</a:t>
+            </a:r>
+            <a:r>
+              <a:rPr lang="en-IE" sz="1000" dirty="0"/>
+              <a:t> - Risk assessment and regulatory compliance</a:t>
+            </a:r>
+          </a:p>
+          <a:p>
+            <a:r>
+              <a:rPr lang="en-IE" sz="1000" dirty="0"/>
+              <a:t>13. </a:t>
+            </a:r>
+            <a:r>
+              <a:rPr lang="en-IE" sz="1000" b="1" dirty="0"/>
+              <a:t>**AI Demand &amp; Pricing Forecaster**</a:t>
+            </a:r>
+            <a:r>
+              <a:rPr lang="en-IE" sz="1000" dirty="0"/>
+              <a:t> - Dynamic pricing and demand prediction</a:t>
+            </a:r>
+          </a:p>
+          <a:p>
+            <a:br>
+              <a:rPr lang="en-IE" sz="1000" dirty="0"/>
+            </a:br>
+            <a:endParaRPr lang="en-IE" sz="1000" dirty="0"/>
+          </a:p>
+          <a:p>
+            <a:r>
+              <a:rPr lang="en-IE" sz="1000" b="1" dirty="0"/>
+              <a:t>### Operations &amp; Logistics</a:t>
+            </a:r>
+            <a:endParaRPr lang="en-IE" sz="1000" dirty="0"/>
+          </a:p>
+          <a:p>
+            <a:r>
+              <a:rPr lang="en-IE" sz="1000" dirty="0"/>
+              <a:t>14. </a:t>
+            </a:r>
+            <a:r>
+              <a:rPr lang="en-IE" sz="1000" b="1" dirty="0"/>
+              <a:t>**AI Logistics &amp; Route Optimization Manager**</a:t>
+            </a:r>
+            <a:r>
+              <a:rPr lang="en-IE" sz="1000" dirty="0"/>
+              <a:t> - Supply chain efficiency</a:t>
+            </a:r>
+          </a:p>
+          <a:p>
+            <a:r>
+              <a:rPr lang="en-IE" sz="1000" dirty="0"/>
+              <a:t>15. </a:t>
+            </a:r>
+            <a:r>
+              <a:rPr lang="en-IE" sz="1000" b="1" dirty="0"/>
+              <a:t>**AI Supply Chain Planner**</a:t>
+            </a:r>
+            <a:r>
+              <a:rPr lang="en-IE" sz="1000" dirty="0"/>
+              <a:t> - Inventory and distribution optimization</a:t>
+            </a:r>
+          </a:p>
+          <a:p>
+            <a:r>
+              <a:rPr lang="en-IE" sz="1000" dirty="0"/>
+              <a:t>16. </a:t>
+            </a:r>
+            <a:r>
+              <a:rPr lang="en-IE" sz="1000" b="1" dirty="0"/>
+              <a:t>**AI Procurement Agent**</a:t>
+            </a:r>
+            <a:r>
+              <a:rPr lang="en-IE" sz="1000" dirty="0"/>
+              <a:t> - Automated purchasing and vendor management</a:t>
+            </a:r>
+          </a:p>
+          <a:p>
+            <a:br>
+              <a:rPr lang="en-IE" sz="1000" dirty="0"/>
+            </a:br>
+            <a:endParaRPr lang="en-IE" sz="1000" dirty="0"/>
+          </a:p>
+          <a:p>
+            <a:r>
+              <a:rPr lang="en-IE" sz="1000" b="1" dirty="0"/>
+              <a:t>### Human Resources</a:t>
+            </a:r>
+            <a:endParaRPr lang="en-IE" sz="1000" dirty="0"/>
+          </a:p>
+          <a:p>
+            <a:r>
+              <a:rPr lang="en-IE" sz="1000" dirty="0"/>
+              <a:t>17. </a:t>
+            </a:r>
+            <a:r>
+              <a:rPr lang="en-IE" sz="1000" b="1" dirty="0"/>
+              <a:t>**AI HR Talent Scout**</a:t>
+            </a:r>
+            <a:r>
+              <a:rPr lang="en-IE" sz="1000" dirty="0"/>
+              <a:t> - Recruitment and candidate screening</a:t>
+            </a:r>
+          </a:p>
+          <a:p>
+            <a:r>
+              <a:rPr lang="en-IE" sz="1000" dirty="0"/>
+              <a:t>18. </a:t>
+            </a:r>
+            <a:r>
+              <a:rPr lang="en-IE" sz="1000" b="1" dirty="0"/>
+              <a:t>**AI Performance Reviewer**</a:t>
+            </a:r>
+            <a:r>
+              <a:rPr lang="en-IE" sz="1000" dirty="0"/>
+              <a:t> - Employee evaluation and feedback automation</a:t>
+            </a:r>
+          </a:p>
+          <a:p>
+            <a:br>
+              <a:rPr lang="en-IE" sz="1000" dirty="0"/>
+            </a:br>
+            <a:endParaRPr lang="en-IE" sz="1000" dirty="0"/>
+          </a:p>
+          <a:p>
+            <a:r>
+              <a:rPr lang="en-IE" sz="1000" b="1" dirty="0"/>
+              <a:t>### Sales &amp; Marketing</a:t>
+            </a:r>
+            <a:endParaRPr lang="en-IE" sz="1000" dirty="0"/>
+          </a:p>
+          <a:p>
+            <a:r>
+              <a:rPr lang="en-IE" sz="1000" dirty="0"/>
+              <a:t>19. </a:t>
+            </a:r>
+            <a:r>
+              <a:rPr lang="en-IE" sz="1000" b="1" dirty="0"/>
+              <a:t>**AI Sales Agents**</a:t>
+            </a:r>
+            <a:r>
+              <a:rPr lang="en-IE" sz="1000" dirty="0"/>
+              <a:t> - Automated sales outreach and conversion</a:t>
+            </a:r>
+          </a:p>
+          <a:p>
+            <a:r>
+              <a:rPr lang="en-IE" sz="1000" dirty="0"/>
+              <a:t>20. </a:t>
+            </a:r>
+            <a:r>
+              <a:rPr lang="en-IE" sz="1000" b="1" dirty="0"/>
+              <a:t>**AI Growth &amp; Pricing Strategist**</a:t>
+            </a:r>
+            <a:r>
+              <a:rPr lang="en-IE" sz="1000" dirty="0"/>
+              <a:t> - Market positioning and revenue optimization</a:t>
+            </a:r>
+          </a:p>
+          <a:p>
+            <a:r>
+              <a:rPr lang="en-IE" sz="1000" dirty="0"/>
+              <a:t>21. </a:t>
+            </a:r>
+            <a:r>
+              <a:rPr lang="en-IE" sz="1000" b="1" dirty="0"/>
+              <a:t>**AI Brand &amp; Content Engine**</a:t>
+            </a:r>
+            <a:r>
+              <a:rPr lang="en-IE" sz="1000" dirty="0"/>
+              <a:t> - Marketing content generation and brand management</a:t>
+            </a:r>
+          </a:p>
+          <a:p>
+            <a:r>
+              <a:rPr lang="en-IE" sz="1000" dirty="0"/>
+              <a:t>22. </a:t>
+            </a:r>
+            <a:r>
+              <a:rPr lang="en-IE" sz="1000" b="1" dirty="0"/>
+              <a:t>**AI Customer Support Agent**</a:t>
+            </a:r>
+            <a:r>
+              <a:rPr lang="en-IE" sz="1000" dirty="0"/>
+              <a:t> - Tier 1-2 customer service automation</a:t>
+            </a:r>
+          </a:p>
+          <a:p>
+            <a:endParaRPr lang="en-IE" sz="1000" dirty="0"/>
           </a:p>
         </p:txBody>
       </p:sp>
@@ -6688,7 +5488,13 @@
   <p:cSld>
     <p:spTree>
       <p:nvGrpSpPr>
-        <p:cNvPr id="1" name=""/>
+        <p:cNvPr id="1" name="">
+          <a:extLst>
+            <a:ext uri="{FF2B5EF4-FFF2-40B4-BE49-F238E27FC236}">
+              <a16:creationId xmlns:a16="http://schemas.microsoft.com/office/drawing/2014/main" id="{63ED5F26-4382-1AAE-33BC-6ECEA1C90F5E}"/>
+            </a:ext>
+          </a:extLst>
+        </p:cNvPr>
         <p:cNvGrpSpPr/>
         <p:nvPr/>
       </p:nvGrpSpPr>
@@ -6702,33 +5508,20 @@
       </p:grpSpPr>
       <p:sp>
         <p:nvSpPr>
-          <p:cNvPr id="2" name="Title 1"/>
-          <p:cNvSpPr>
-            <a:spLocks noGrp="1"/>
-          </p:cNvSpPr>
-          <p:nvPr>
-            <p:ph type="title"/>
-          </p:nvPr>
-        </p:nvSpPr>
-        <p:spPr/>
-        <p:txBody>
-          <a:bodyPr/>
-          <a:lstStyle/>
-          <a:p>
-            <a:endParaRPr/>
-          </a:p>
-        </p:txBody>
-      </p:sp>
-      <p:sp>
-        <p:nvSpPr>
-          <p:cNvPr id="3" name="TextBox 2"/>
+          <p:cNvPr id="3" name="TextBox 2">
+            <a:extLst>
+              <a:ext uri="{FF2B5EF4-FFF2-40B4-BE49-F238E27FC236}">
+                <a16:creationId xmlns:a16="http://schemas.microsoft.com/office/drawing/2014/main" id="{EB11D2EA-B9B3-9D9C-DC07-C1B16F948F88}"/>
+              </a:ext>
+            </a:extLst>
+          </p:cNvPr>
           <p:cNvSpPr txBox="1"/>
           <p:nvPr/>
         </p:nvSpPr>
         <p:spPr>
           <a:xfrm>
-            <a:off x="457200" y="274320"/>
-            <a:ext cx="8229600" cy="731520"/>
+            <a:off x="317809" y="104820"/>
+            <a:ext cx="4063292" cy="584775"/>
           </a:xfrm>
           <a:prstGeom prst="rect">
             <a:avLst/>
@@ -6749,21 +5542,33 @@
               </a:defRPr>
             </a:pPr>
             <a:r>
-              <a:t>Cost Per Page Breakdown (.022)</a:t>
-            </a:r>
-          </a:p>
-        </p:txBody>
-      </p:sp>
-      <p:sp>
-        <p:nvSpPr>
-          <p:cNvPr id="4" name="TextBox 3"/>
+              <a:rPr lang="en-IE" dirty="0" err="1"/>
+              <a:t>FutureGenAI</a:t>
+            </a:r>
+            <a:r>
+              <a:rPr lang="en-IE" dirty="0"/>
+              <a:t> Roadmap</a:t>
+            </a:r>
+            <a:endParaRPr dirty="0"/>
+          </a:p>
+        </p:txBody>
+      </p:sp>
+      <p:sp>
+        <p:nvSpPr>
+          <p:cNvPr id="28" name="TextBox 27">
+            <a:extLst>
+              <a:ext uri="{FF2B5EF4-FFF2-40B4-BE49-F238E27FC236}">
+                <a16:creationId xmlns:a16="http://schemas.microsoft.com/office/drawing/2014/main" id="{D8BE4BA0-0605-5EB2-8A7B-E549FB8EFE65}"/>
+              </a:ext>
+            </a:extLst>
+          </p:cNvPr>
           <p:cNvSpPr txBox="1"/>
           <p:nvPr/>
         </p:nvSpPr>
         <p:spPr>
           <a:xfrm>
-            <a:off x="457200" y="1280160"/>
-            <a:ext cx="8229600" cy="4297680"/>
+            <a:off x="405691" y="557559"/>
+            <a:ext cx="7950819" cy="6401753"/>
           </a:xfrm>
           <a:prstGeom prst="rect">
             <a:avLst/>
@@ -6771,113 +5576,307 @@
           <a:noFill/>
         </p:spPr>
         <p:txBody>
-          <a:bodyPr wrap="none">
+          <a:bodyPr wrap="square" rtlCol="0">
             <a:spAutoFit/>
           </a:bodyPr>
           <a:lstStyle/>
           <a:p>
-            <a:pPr>
-              <a:defRPr sz="1400"/>
-            </a:pPr>
-            <a:r>
-              <a:t>Optimized Cost Structure:</a:t>
-            </a:r>
-          </a:p>
-          <a:p>
-            <a:endParaRPr/>
-          </a:p>
-          <a:p>
-            <a:r>
-              <a:t>Bedrock (Claude 3.5 Sonnet): 98% of cost</a:t>
-            </a:r>
-          </a:p>
-          <a:p>
-            <a:r>
-              <a:t>• Input: ~5,000 tokens × /M = .015</a:t>
-            </a:r>
-          </a:p>
-          <a:p>
-            <a:r>
-              <a:t>• Output: ~500 tokens × /M = .0075</a:t>
-            </a:r>
-          </a:p>
-          <a:p>
-            <a:r>
-              <a:t>• Total: .0225/page</a:t>
-            </a:r>
-          </a:p>
-          <a:p>
-            <a:endParaRPr/>
-          </a:p>
-          <a:p>
-            <a:r>
-              <a:t>Lambda Functions: 2% of cost</a:t>
-            </a:r>
-          </a:p>
-          <a:p>
-            <a:r>
-              <a:t>• Upload Handler: &lt;.0001</a:t>
-            </a:r>
-          </a:p>
-          <a:p>
-            <a:r>
-              <a:t>• PDF Converter: .0001</a:t>
-            </a:r>
-          </a:p>
-          <a:p>
-            <a:r>
-              <a:t>• AI Processor: .0002</a:t>
-            </a:r>
-          </a:p>
-          <a:p>
-            <a:r>
-              <a:t>• API Handler: &lt;.0001</a:t>
-            </a:r>
-          </a:p>
-          <a:p>
-            <a:r>
-              <a:t>• Total: .0004/page</a:t>
-            </a:r>
-          </a:p>
-          <a:p>
-            <a:endParaRPr/>
-          </a:p>
-          <a:p>
-            <a:r>
-              <a:t>Infrastructure: &lt;1% of cost</a:t>
-            </a:r>
-          </a:p>
-          <a:p>
-            <a:r>
-              <a:t>• S3 Storage: .000001</a:t>
-            </a:r>
-          </a:p>
-          <a:p>
-            <a:r>
-              <a:t>• DynamoDB: .00001</a:t>
-            </a:r>
-          </a:p>
-          <a:p>
-            <a:r>
-              <a:t>• SQS Messages: .000001</a:t>
-            </a:r>
-          </a:p>
-          <a:p>
-            <a:r>
-              <a:t>• Total: .000012/page</a:t>
-            </a:r>
-          </a:p>
-          <a:p>
-            <a:endParaRPr/>
-          </a:p>
-          <a:p>
-            <a:r>
-              <a:t>TOTAL: .022 per page</a:t>
-            </a:r>
+            <a:r>
+              <a:rPr lang="en-IE" sz="1000" b="1" dirty="0"/>
+              <a:t>### Product &amp; Engineering</a:t>
+            </a:r>
+            <a:endParaRPr lang="en-IE" sz="1000" dirty="0"/>
+          </a:p>
+          <a:p>
+            <a:r>
+              <a:rPr lang="en-IE" sz="1000" dirty="0"/>
+              <a:t>23. </a:t>
+            </a:r>
+            <a:r>
+              <a:rPr lang="en-IE" sz="1000" b="1" dirty="0"/>
+              <a:t>**AI Product Manager**</a:t>
+            </a:r>
+            <a:r>
+              <a:rPr lang="en-IE" sz="1000" dirty="0"/>
+              <a:t> - Product roadmap and feature prioritization</a:t>
+            </a:r>
+          </a:p>
+          <a:p>
+            <a:r>
+              <a:rPr lang="en-IE" sz="1000" dirty="0"/>
+              <a:t>24. </a:t>
+            </a:r>
+            <a:r>
+              <a:rPr lang="en-IE" sz="1000" b="1" dirty="0"/>
+              <a:t>**AI QA &amp; Testing Agent**</a:t>
+            </a:r>
+            <a:r>
+              <a:rPr lang="en-IE" sz="1000" dirty="0"/>
+              <a:t> - Automated quality assurance and testing</a:t>
+            </a:r>
+          </a:p>
+          <a:p>
+            <a:endParaRPr lang="en-IE" sz="1000" b="1" dirty="0"/>
+          </a:p>
+          <a:p>
+            <a:r>
+              <a:rPr lang="en-IE" sz="1000" b="1" dirty="0"/>
+              <a:t>## Education &amp; Assessment</a:t>
+            </a:r>
+            <a:endParaRPr lang="en-IE" sz="1000" dirty="0"/>
+          </a:p>
+          <a:p>
+            <a:r>
+              <a:rPr lang="en-IE" sz="1000" dirty="0"/>
+              <a:t>27. </a:t>
+            </a:r>
+            <a:r>
+              <a:rPr lang="en-IE" sz="1000" b="1" dirty="0"/>
+              <a:t>**AI State Exam Corrector**</a:t>
+            </a:r>
+            <a:r>
+              <a:rPr lang="en-IE" sz="1000" dirty="0"/>
+              <a:t> - Automated exam grading and evaluation</a:t>
+            </a:r>
+          </a:p>
+          <a:p>
+            <a:r>
+              <a:rPr lang="en-IE" sz="1000" dirty="0"/>
+              <a:t>28. </a:t>
+            </a:r>
+            <a:r>
+              <a:rPr lang="en-IE" sz="1000" b="1" dirty="0"/>
+              <a:t>**AI Content &amp; Report Generator**</a:t>
+            </a:r>
+            <a:r>
+              <a:rPr lang="en-IE" sz="1000" dirty="0"/>
+              <a:t> - Automated documentation and reporting</a:t>
+            </a:r>
+          </a:p>
+          <a:p>
+            <a:endParaRPr lang="en-IE" sz="1000" dirty="0"/>
+          </a:p>
+          <a:p>
+            <a:r>
+              <a:rPr lang="en-IE" sz="1000" b="1" dirty="0"/>
+              <a:t>### Strategic &amp; Executive</a:t>
+            </a:r>
+            <a:endParaRPr lang="en-IE" sz="1000" dirty="0"/>
+          </a:p>
+          <a:p>
+            <a:r>
+              <a:rPr lang="en-IE" sz="1000" dirty="0"/>
+              <a:t>29. </a:t>
+            </a:r>
+            <a:r>
+              <a:rPr lang="en-IE" sz="1000" b="1" dirty="0"/>
+              <a:t>**AI Strategy Agent**</a:t>
+            </a:r>
+            <a:r>
+              <a:rPr lang="en-IE" sz="1000" dirty="0"/>
+              <a:t> - Strategic planning and scenario analysis</a:t>
+            </a:r>
+          </a:p>
+          <a:p>
+            <a:r>
+              <a:rPr lang="en-IE" sz="1000" dirty="0"/>
+              <a:t>30. </a:t>
+            </a:r>
+            <a:r>
+              <a:rPr lang="en-IE" sz="1000" b="1" dirty="0"/>
+              <a:t>**AI Market Intelligence Agent**</a:t>
+            </a:r>
+            <a:r>
+              <a:rPr lang="en-IE" sz="1000" dirty="0"/>
+              <a:t> - Competitive intelligence and market research</a:t>
+            </a:r>
+          </a:p>
+          <a:p>
+            <a:r>
+              <a:rPr lang="en-IE" sz="1000" dirty="0"/>
+              <a:t>31. </a:t>
+            </a:r>
+            <a:r>
+              <a:rPr lang="en-IE" sz="1000" b="1" dirty="0"/>
+              <a:t>**AI Research Scientist**</a:t>
+            </a:r>
+            <a:r>
+              <a:rPr lang="en-IE" sz="1000" dirty="0"/>
+              <a:t> - Automated literature review and hypothesis generation</a:t>
+            </a:r>
+          </a:p>
+          <a:p>
+            <a:br>
+              <a:rPr lang="en-IE" sz="1000" dirty="0"/>
+            </a:br>
+            <a:r>
+              <a:rPr lang="en-IE" sz="1000" b="1" dirty="0"/>
+              <a:t>**Phase 1 (High-Automation, Immediate ROI)**</a:t>
+            </a:r>
+            <a:endParaRPr lang="en-IE" sz="1000" dirty="0"/>
+          </a:p>
+          <a:p>
+            <a:r>
+              <a:rPr lang="en-IE" sz="1000" dirty="0"/>
+              <a:t>- AI Customer Support Agent</a:t>
+            </a:r>
+          </a:p>
+          <a:p>
+            <a:r>
+              <a:rPr lang="en-IE" sz="1000" dirty="0"/>
+              <a:t>- AI Contract Reviewer</a:t>
+            </a:r>
+          </a:p>
+          <a:p>
+            <a:r>
+              <a:rPr lang="en-IE" sz="1000" dirty="0"/>
+              <a:t>- AI Fraud Detection Officer</a:t>
+            </a:r>
+          </a:p>
+          <a:p>
+            <a:r>
+              <a:rPr lang="en-IE" sz="1000" dirty="0"/>
+              <a:t>- AI Content &amp; Report Generator</a:t>
+            </a:r>
+          </a:p>
+          <a:p>
+            <a:r>
+              <a:rPr lang="en-IE" sz="1000" dirty="0"/>
+              <a:t>- AI Tax Audit Assistant</a:t>
+            </a:r>
+          </a:p>
+          <a:p>
+            <a:endParaRPr lang="en-IE" sz="1000" dirty="0"/>
+          </a:p>
+          <a:p>
+            <a:r>
+              <a:rPr lang="en-IE" sz="1000" b="1" dirty="0"/>
+              <a:t>**Phase 2 (Human-AI Hybrid, High Value)**</a:t>
+            </a:r>
+            <a:endParaRPr lang="en-IE" sz="1000" dirty="0"/>
+          </a:p>
+          <a:p>
+            <a:r>
+              <a:rPr lang="en-IE" sz="1000" dirty="0"/>
+              <a:t>- AI Clinical Decision Support</a:t>
+            </a:r>
+          </a:p>
+          <a:p>
+            <a:r>
+              <a:rPr lang="en-IE" sz="1000" dirty="0"/>
+              <a:t>- AI Portfolio Manager</a:t>
+            </a:r>
+          </a:p>
+          <a:p>
+            <a:r>
+              <a:rPr lang="en-IE" sz="1000" dirty="0"/>
+              <a:t>- AI Legal Researcher</a:t>
+            </a:r>
+          </a:p>
+          <a:p>
+            <a:r>
+              <a:rPr lang="en-IE" sz="1000" dirty="0"/>
+              <a:t>- AI HR Talent Scout</a:t>
+            </a:r>
+          </a:p>
+          <a:p>
+            <a:r>
+              <a:rPr lang="en-IE" sz="1000" dirty="0"/>
+              <a:t>- AI Radiology &amp; Imaging Analyst</a:t>
+            </a:r>
+          </a:p>
+          <a:p>
+            <a:endParaRPr lang="en-IE" sz="1000" dirty="0"/>
+          </a:p>
+          <a:p>
+            <a:r>
+              <a:rPr lang="en-IE" sz="1000" b="1" dirty="0"/>
+              <a:t>**Phase 3 (Strategic &amp; Governance)**</a:t>
+            </a:r>
+            <a:endParaRPr lang="en-IE" sz="1000" dirty="0"/>
+          </a:p>
+          <a:p>
+            <a:r>
+              <a:rPr lang="en-IE" sz="1000" dirty="0"/>
+              <a:t>- AI Model Auditor</a:t>
+            </a:r>
+          </a:p>
+          <a:p>
+            <a:r>
+              <a:rPr lang="en-IE" sz="1000" dirty="0"/>
+              <a:t>- AI Policy Impact Analyst</a:t>
+            </a:r>
+          </a:p>
+          <a:p>
+            <a:r>
+              <a:rPr lang="en-IE" sz="1000" dirty="0"/>
+              <a:t>- AI Strategy Agent</a:t>
+            </a:r>
+          </a:p>
+          <a:p>
+            <a:r>
+              <a:rPr lang="en-IE" sz="1000" dirty="0"/>
+              <a:t>- AI Risk &amp; Compliance Agent</a:t>
+            </a:r>
+          </a:p>
+          <a:p>
+            <a:r>
+              <a:rPr lang="en-IE" sz="1000" dirty="0"/>
+              <a:t>- AI Code &amp; Systems Optimizer</a:t>
+            </a:r>
+          </a:p>
+          <a:p>
+            <a:br>
+              <a:rPr lang="en-IE" sz="1000" dirty="0"/>
+            </a:br>
+            <a:r>
+              <a:rPr lang="en-IE" sz="1000" b="1" dirty="0"/>
+              <a:t>**Phase 4 (Advanced Capabilities)**</a:t>
+            </a:r>
+            <a:endParaRPr lang="en-IE" sz="1000" dirty="0"/>
+          </a:p>
+          <a:p>
+            <a:r>
+              <a:rPr lang="en-IE" sz="1000" dirty="0"/>
+              <a:t>- AI Mental Health Coach</a:t>
+            </a:r>
+          </a:p>
+          <a:p>
+            <a:r>
+              <a:rPr lang="en-IE" sz="1000" dirty="0"/>
+              <a:t>- AI Research Scientist</a:t>
+            </a:r>
+          </a:p>
+          <a:p>
+            <a:r>
+              <a:rPr lang="en-IE" sz="1000" dirty="0"/>
+              <a:t>- AI Product Manager</a:t>
+            </a:r>
+          </a:p>
+          <a:p>
+            <a:r>
+              <a:rPr lang="en-IE" sz="1000" dirty="0"/>
+              <a:t>- AI CFO Assistant</a:t>
+            </a:r>
+          </a:p>
+          <a:p>
+            <a:r>
+              <a:rPr lang="en-IE" sz="1000" dirty="0"/>
+              <a:t>- AI Market Intelligence Agent</a:t>
+            </a:r>
+            <a:br>
+              <a:rPr lang="en-IE" sz="1000" dirty="0"/>
+            </a:br>
+            <a:endParaRPr lang="en-IE" sz="1000" dirty="0"/>
           </a:p>
         </p:txBody>
       </p:sp>
     </p:spTree>
+    <p:extLst>
+      <p:ext uri="{BB962C8B-B14F-4D97-AF65-F5344CB8AC3E}">
+        <p14:creationId xmlns:p14="http://schemas.microsoft.com/office/powerpoint/2010/main" val="4016603785"/>
+      </p:ext>
+    </p:extLst>
   </p:cSld>
   <p:clrMapOvr>
     <a:masterClrMapping/>
@@ -6902,25 +5901,6 @@
           <a:chExt cx="0" cy="0"/>
         </a:xfrm>
       </p:grpSpPr>
-      <p:sp>
-        <p:nvSpPr>
-          <p:cNvPr id="2" name="Title 1"/>
-          <p:cNvSpPr>
-            <a:spLocks noGrp="1"/>
-          </p:cNvSpPr>
-          <p:nvPr>
-            <p:ph type="title"/>
-          </p:nvPr>
-        </p:nvSpPr>
-        <p:spPr/>
-        <p:txBody>
-          <a:bodyPr/>
-          <a:lstStyle/>
-          <a:p>
-            <a:endParaRPr/>
-          </a:p>
-        </p:txBody>
-      </p:sp>
       <p:sp>
         <p:nvSpPr>
           <p:cNvPr id="3" name="TextBox 2"/>
@@ -7526,25 +6506,6 @@
       </p:grpSpPr>
       <p:sp>
         <p:nvSpPr>
-          <p:cNvPr id="2" name="Title 1"/>
-          <p:cNvSpPr>
-            <a:spLocks noGrp="1"/>
-          </p:cNvSpPr>
-          <p:nvPr>
-            <p:ph type="title"/>
-          </p:nvPr>
-        </p:nvSpPr>
-        <p:spPr/>
-        <p:txBody>
-          <a:bodyPr/>
-          <a:lstStyle/>
-          <a:p>
-            <a:endParaRPr/>
-          </a:p>
-        </p:txBody>
-      </p:sp>
-      <p:sp>
-        <p:nvSpPr>
           <p:cNvPr id="3" name="TextBox 2"/>
           <p:cNvSpPr txBox="1"/>
           <p:nvPr/>
@@ -7573,7 +6534,7 @@
               </a:defRPr>
             </a:pPr>
             <a:r>
-              <a:t>Medical Data Extraction Results</a:t>
+              <a:t>Cost Analysis - 237 Page Document</a:t>
             </a:r>
           </a:p>
         </p:txBody>
@@ -7586,14 +6547,14 @@
         </p:nvSpPr>
         <p:spPr>
           <a:xfrm>
-            <a:off x="457200" y="1188720"/>
-            <a:ext cx="1828800" cy="914400"/>
+            <a:off x="457200" y="1280160"/>
+            <a:ext cx="3931920" cy="640080"/>
           </a:xfrm>
           <a:prstGeom prst="rect">
             <a:avLst/>
           </a:prstGeom>
           <a:solidFill>
-            <a:srgbClr val="64B5F6"/>
+            <a:srgbClr val="FFC8C8"/>
           </a:solidFill>
           <a:ln w="25400">
             <a:solidFill>
@@ -7623,32 +6584,96 @@
               <a:defRPr sz="1100" b="1"/>
             </a:pPr>
             <a:r>
-              <a:t>237 Pages</a:t>
-            </a:r>
-          </a:p>
-          <a:p>
-            <a:r>
-              <a:t>Processed</a:t>
-            </a:r>
-          </a:p>
-        </p:txBody>
-      </p:sp>
-      <p:sp>
-        <p:nvSpPr>
-          <p:cNvPr id="5" name="Rectangle 4"/>
+              <a:t>BEFORE OPTIMIZATION</a:t>
+            </a:r>
+          </a:p>
+        </p:txBody>
+      </p:sp>
+      <p:sp>
+        <p:nvSpPr>
+          <p:cNvPr id="5" name="TextBox 4"/>
+          <p:cNvSpPr txBox="1"/>
+          <p:nvPr/>
+        </p:nvSpPr>
+        <p:spPr>
+          <a:xfrm>
+            <a:off x="457200" y="2011680"/>
+            <a:ext cx="3931920" cy="3017520"/>
+          </a:xfrm>
+          <a:prstGeom prst="rect">
+            <a:avLst/>
+          </a:prstGeom>
+          <a:noFill/>
+        </p:spPr>
+        <p:txBody>
+          <a:bodyPr wrap="none">
+            <a:spAutoFit/>
+          </a:bodyPr>
+          <a:lstStyle/>
+          <a:p>
+            <a:pPr>
+              <a:defRPr sz="1400"/>
+            </a:pPr>
+            <a:r>
+              <a:t>Bedrock Input: .00</a:t>
+            </a:r>
+          </a:p>
+          <a:p>
+            <a:r>
+              <a:t>Bedrock Output: .00</a:t>
+            </a:r>
+          </a:p>
+          <a:p>
+            <a:r>
+              <a:t>Lambda Exec: .18</a:t>
+            </a:r>
+          </a:p>
+          <a:p>
+            <a:r>
+              <a:t>Infrastructure: .003</a:t>
+            </a:r>
+          </a:p>
+          <a:p>
+            <a:endParaRPr/>
+          </a:p>
+          <a:p>
+            <a:r>
+              <a:t>Total: .18</a:t>
+            </a:r>
+          </a:p>
+          <a:p>
+            <a:r>
+              <a:t>Per Page: .191</a:t>
+            </a:r>
+          </a:p>
+          <a:p>
+            <a:r>
+              <a:t>Time: 3.5 hours</a:t>
+            </a:r>
+          </a:p>
+          <a:p>
+            <a:r>
+              <a:t>Throughput: 70 pages/hr</a:t>
+            </a:r>
+          </a:p>
+        </p:txBody>
+      </p:sp>
+      <p:sp>
+        <p:nvSpPr>
+          <p:cNvPr id="6" name="Rectangle 5"/>
           <p:cNvSpPr/>
           <p:nvPr/>
         </p:nvSpPr>
         <p:spPr>
           <a:xfrm>
-            <a:off x="2468880" y="1188720"/>
-            <a:ext cx="1828800" cy="914400"/>
+            <a:off x="4754880" y="1280160"/>
+            <a:ext cx="3931920" cy="640080"/>
           </a:xfrm>
           <a:prstGeom prst="rect">
             <a:avLst/>
           </a:prstGeom>
           <a:solidFill>
-            <a:srgbClr val="81C784"/>
+            <a:srgbClr val="C8FFC8"/>
           </a:solidFill>
           <a:ln w="25400">
             <a:solidFill>
@@ -7678,32 +6703,96 @@
               <a:defRPr sz="1100" b="1"/>
             </a:pPr>
             <a:r>
-              <a:t>1,294 Data</a:t>
-            </a:r>
-          </a:p>
-          <a:p>
-            <a:r>
-              <a:t>Points</a:t>
-            </a:r>
-          </a:p>
-        </p:txBody>
-      </p:sp>
-      <p:sp>
-        <p:nvSpPr>
-          <p:cNvPr id="6" name="Rectangle 5"/>
+              <a:t>AFTER OPTIMIZATION</a:t>
+            </a:r>
+          </a:p>
+        </p:txBody>
+      </p:sp>
+      <p:sp>
+        <p:nvSpPr>
+          <p:cNvPr id="7" name="TextBox 6"/>
+          <p:cNvSpPr txBox="1"/>
+          <p:nvPr/>
+        </p:nvSpPr>
+        <p:spPr>
+          <a:xfrm>
+            <a:off x="4754880" y="2011680"/>
+            <a:ext cx="3931920" cy="3017520"/>
+          </a:xfrm>
+          <a:prstGeom prst="rect">
+            <a:avLst/>
+          </a:prstGeom>
+          <a:noFill/>
+        </p:spPr>
+        <p:txBody>
+          <a:bodyPr wrap="none">
+            <a:spAutoFit/>
+          </a:bodyPr>
+          <a:lstStyle/>
+          <a:p>
+            <a:pPr>
+              <a:defRPr sz="1400"/>
+            </a:pPr>
+            <a:r>
+              <a:t>Bedrock Input: .51</a:t>
+            </a:r>
+          </a:p>
+          <a:p>
+            <a:r>
+              <a:t>Bedrock Output: .76</a:t>
+            </a:r>
+          </a:p>
+          <a:p>
+            <a:r>
+              <a:t>Lambda Exec: .047</a:t>
+            </a:r>
+          </a:p>
+          <a:p>
+            <a:r>
+              <a:t>Infrastructure: .003</a:t>
+            </a:r>
+          </a:p>
+          <a:p>
+            <a:endParaRPr/>
+          </a:p>
+          <a:p>
+            <a:r>
+              <a:t>Total: .31</a:t>
+            </a:r>
+          </a:p>
+          <a:p>
+            <a:r>
+              <a:t>Per Page: .022</a:t>
+            </a:r>
+          </a:p>
+          <a:p>
+            <a:r>
+              <a:t>Time: 30 minutes</a:t>
+            </a:r>
+          </a:p>
+          <a:p>
+            <a:r>
+              <a:t>Throughput: 200-300 pages/hr</a:t>
+            </a:r>
+          </a:p>
+        </p:txBody>
+      </p:sp>
+      <p:sp>
+        <p:nvSpPr>
+          <p:cNvPr id="8" name="Rectangle 7"/>
           <p:cNvSpPr/>
           <p:nvPr/>
         </p:nvSpPr>
         <p:spPr>
           <a:xfrm>
-            <a:off x="4480560" y="1188720"/>
-            <a:ext cx="1828800" cy="914400"/>
+            <a:off x="1371600" y="5303520"/>
+            <a:ext cx="5943600" cy="548640"/>
           </a:xfrm>
           <a:prstGeom prst="rect">
             <a:avLst/>
           </a:prstGeom>
           <a:solidFill>
-            <a:srgbClr val="FFD54F"/>
+            <a:srgbClr val="FFFF96"/>
           </a:solidFill>
           <a:ln w="25400">
             <a:solidFill>
@@ -7733,168 +6822,7 @@
               <a:defRPr sz="1100" b="1"/>
             </a:pPr>
             <a:r>
-              <a:t>98.73%</a:t>
-            </a:r>
-          </a:p>
-          <a:p>
-            <a:r>
-              <a:t>Success</a:t>
-            </a:r>
-          </a:p>
-        </p:txBody>
-      </p:sp>
-      <p:sp>
-        <p:nvSpPr>
-          <p:cNvPr id="7" name="Rectangle 6"/>
-          <p:cNvSpPr/>
-          <p:nvPr/>
-        </p:nvSpPr>
-        <p:spPr>
-          <a:xfrm>
-            <a:off x="6492240" y="1188720"/>
-            <a:ext cx="2194560" cy="914400"/>
-          </a:xfrm>
-          <a:prstGeom prst="rect">
-            <a:avLst/>
-          </a:prstGeom>
-          <a:solidFill>
-            <a:srgbClr val="CE93D8"/>
-          </a:solidFill>
-          <a:ln w="25400">
-            <a:solidFill>
-              <a:srgbClr val="0099CC"/>
-            </a:solidFill>
-          </a:ln>
-        </p:spPr>
-        <p:style>
-          <a:lnRef idx="1">
-            <a:schemeClr val="accent1"/>
-          </a:lnRef>
-          <a:fillRef idx="3">
-            <a:schemeClr val="accent1"/>
-          </a:fillRef>
-          <a:effectRef idx="2">
-            <a:schemeClr val="accent1"/>
-          </a:effectRef>
-          <a:fontRef idx="minor">
-            <a:schemeClr val="lt1"/>
-          </a:fontRef>
-        </p:style>
-        <p:txBody>
-          <a:bodyPr wrap="square" rtlCol="0" anchor="ctr"/>
-          <a:lstStyle/>
-          <a:p>
-            <a:pPr algn="ctr">
-              <a:defRPr sz="1100" b="1"/>
-            </a:pPr>
-            <a:r>
-              <a:t>30 Minutes</a:t>
-            </a:r>
-          </a:p>
-          <a:p>
-            <a:r>
-              <a:t>Total</a:t>
-            </a:r>
-          </a:p>
-        </p:txBody>
-      </p:sp>
-      <p:sp>
-        <p:nvSpPr>
-          <p:cNvPr id="8" name="TextBox 7"/>
-          <p:cNvSpPr txBox="1"/>
-          <p:nvPr/>
-        </p:nvSpPr>
-        <p:spPr>
-          <a:xfrm>
-            <a:off x="457200" y="2286000"/>
-            <a:ext cx="8229600" cy="3474720"/>
-          </a:xfrm>
-          <a:prstGeom prst="rect">
-            <a:avLst/>
-          </a:prstGeom>
-          <a:noFill/>
-        </p:spPr>
-        <p:txBody>
-          <a:bodyPr wrap="none">
-            <a:spAutoFit/>
-          </a:bodyPr>
-          <a:lstStyle/>
-          <a:p>
-            <a:pPr>
-              <a:defRPr sz="1400"/>
-            </a:pPr>
-            <a:r>
-              <a:t>Extracted from Real 237-Page Medical Document:</a:t>
-            </a:r>
-          </a:p>
-          <a:p>
-            <a:endParaRPr/>
-          </a:p>
-          <a:p>
-            <a:r>
-              <a:t>Medications: 220 entries</a:t>
-            </a:r>
-          </a:p>
-          <a:p>
-            <a:r>
-              <a:t>• JARDIANCE 25mg, Triamcinolone, Econazole, Valsartan</a:t>
-            </a:r>
-          </a:p>
-          <a:p>
-            <a:endParaRPr/>
-          </a:p>
-          <a:p>
-            <a:r>
-              <a:t>Diagnoses: 367 entries</a:t>
-            </a:r>
-          </a:p>
-          <a:p>
-            <a:r>
-              <a:t>• Prostate cancer (Gleason 4+4=8), Hypertension, Diabetes</a:t>
-            </a:r>
-          </a:p>
-          <a:p>
-            <a:endParaRPr/>
-          </a:p>
-          <a:p>
-            <a:r>
-              <a:t>Test Results: 707 entries</a:t>
-            </a:r>
-          </a:p>
-          <a:p>
-            <a:r>
-              <a:t>• Temperature, HDL Cholesterol, Prostate biopsy</a:t>
-            </a:r>
-          </a:p>
-          <a:p>
-            <a:endParaRPr/>
-          </a:p>
-          <a:p>
-            <a:r>
-              <a:t>Page Categories: 470 classifications</a:t>
-            </a:r>
-          </a:p>
-          <a:p>
-            <a:r>
-              <a:t>• Lab results, Visit notes, Imaging, Prescriptions</a:t>
-            </a:r>
-          </a:p>
-          <a:p>
-            <a:endParaRPr/>
-          </a:p>
-          <a:p>
-            <a:r>
-              <a:t>Processing: Upload 13:08:20, Complete ~30 min</a:t>
-            </a:r>
-          </a:p>
-          <a:p>
-            <a:r>
-              <a:t>Average: 7.6 seconds per page</a:t>
-            </a:r>
-          </a:p>
-          <a:p>
-            <a:r>
-              <a:t>Cost: .31 total (.022/page)</a:t>
+              <a:t>SAVINGS: .87 per document (88%) • 7x faster</a:t>
             </a:r>
           </a:p>
         </p:txBody>
@@ -7926,25 +6854,6 @@
       </p:grpSpPr>
       <p:sp>
         <p:nvSpPr>
-          <p:cNvPr id="2" name="Title 1"/>
-          <p:cNvSpPr>
-            <a:spLocks noGrp="1"/>
-          </p:cNvSpPr>
-          <p:nvPr>
-            <p:ph type="title"/>
-          </p:nvPr>
-        </p:nvSpPr>
-        <p:spPr/>
-        <p:txBody>
-          <a:bodyPr/>
-          <a:lstStyle/>
-          <a:p>
-            <a:endParaRPr/>
-          </a:p>
-        </p:txBody>
-      </p:sp>
-      <p:sp>
-        <p:nvSpPr>
           <p:cNvPr id="3" name="TextBox 2"/>
           <p:cNvSpPr txBox="1"/>
           <p:nvPr/>
@@ -7973,21 +6882,241 @@
               </a:defRPr>
             </a:pPr>
             <a:r>
-              <a:t>Annual Cost Projections</a:t>
-            </a:r>
-          </a:p>
-        </p:txBody>
-      </p:sp>
-      <p:sp>
-        <p:nvSpPr>
-          <p:cNvPr id="4" name="TextBox 3"/>
+              <a:t>Medical Data Extraction Results</a:t>
+            </a:r>
+          </a:p>
+        </p:txBody>
+      </p:sp>
+      <p:sp>
+        <p:nvSpPr>
+          <p:cNvPr id="4" name="Rectangle 3"/>
+          <p:cNvSpPr/>
+          <p:nvPr/>
+        </p:nvSpPr>
+        <p:spPr>
+          <a:xfrm>
+            <a:off x="457200" y="1188720"/>
+            <a:ext cx="1828800" cy="914400"/>
+          </a:xfrm>
+          <a:prstGeom prst="rect">
+            <a:avLst/>
+          </a:prstGeom>
+          <a:solidFill>
+            <a:srgbClr val="64B5F6"/>
+          </a:solidFill>
+          <a:ln w="25400">
+            <a:solidFill>
+              <a:srgbClr val="0099CC"/>
+            </a:solidFill>
+          </a:ln>
+        </p:spPr>
+        <p:style>
+          <a:lnRef idx="1">
+            <a:schemeClr val="accent1"/>
+          </a:lnRef>
+          <a:fillRef idx="3">
+            <a:schemeClr val="accent1"/>
+          </a:fillRef>
+          <a:effectRef idx="2">
+            <a:schemeClr val="accent1"/>
+          </a:effectRef>
+          <a:fontRef idx="minor">
+            <a:schemeClr val="lt1"/>
+          </a:fontRef>
+        </p:style>
+        <p:txBody>
+          <a:bodyPr wrap="square" rtlCol="0" anchor="ctr"/>
+          <a:lstStyle/>
+          <a:p>
+            <a:pPr algn="ctr">
+              <a:defRPr sz="1100" b="1"/>
+            </a:pPr>
+            <a:r>
+              <a:t>237 Pages</a:t>
+            </a:r>
+          </a:p>
+          <a:p>
+            <a:r>
+              <a:t>Processed</a:t>
+            </a:r>
+          </a:p>
+        </p:txBody>
+      </p:sp>
+      <p:sp>
+        <p:nvSpPr>
+          <p:cNvPr id="5" name="Rectangle 4"/>
+          <p:cNvSpPr/>
+          <p:nvPr/>
+        </p:nvSpPr>
+        <p:spPr>
+          <a:xfrm>
+            <a:off x="2468880" y="1188720"/>
+            <a:ext cx="1828800" cy="914400"/>
+          </a:xfrm>
+          <a:prstGeom prst="rect">
+            <a:avLst/>
+          </a:prstGeom>
+          <a:solidFill>
+            <a:srgbClr val="81C784"/>
+          </a:solidFill>
+          <a:ln w="25400">
+            <a:solidFill>
+              <a:srgbClr val="0099CC"/>
+            </a:solidFill>
+          </a:ln>
+        </p:spPr>
+        <p:style>
+          <a:lnRef idx="1">
+            <a:schemeClr val="accent1"/>
+          </a:lnRef>
+          <a:fillRef idx="3">
+            <a:schemeClr val="accent1"/>
+          </a:fillRef>
+          <a:effectRef idx="2">
+            <a:schemeClr val="accent1"/>
+          </a:effectRef>
+          <a:fontRef idx="minor">
+            <a:schemeClr val="lt1"/>
+          </a:fontRef>
+        </p:style>
+        <p:txBody>
+          <a:bodyPr wrap="square" rtlCol="0" anchor="ctr"/>
+          <a:lstStyle/>
+          <a:p>
+            <a:pPr algn="ctr">
+              <a:defRPr sz="1100" b="1"/>
+            </a:pPr>
+            <a:r>
+              <a:t>1,294 Data</a:t>
+            </a:r>
+          </a:p>
+          <a:p>
+            <a:r>
+              <a:t>Points</a:t>
+            </a:r>
+          </a:p>
+        </p:txBody>
+      </p:sp>
+      <p:sp>
+        <p:nvSpPr>
+          <p:cNvPr id="6" name="Rectangle 5"/>
+          <p:cNvSpPr/>
+          <p:nvPr/>
+        </p:nvSpPr>
+        <p:spPr>
+          <a:xfrm>
+            <a:off x="4480560" y="1188720"/>
+            <a:ext cx="1828800" cy="914400"/>
+          </a:xfrm>
+          <a:prstGeom prst="rect">
+            <a:avLst/>
+          </a:prstGeom>
+          <a:solidFill>
+            <a:srgbClr val="FFD54F"/>
+          </a:solidFill>
+          <a:ln w="25400">
+            <a:solidFill>
+              <a:srgbClr val="0099CC"/>
+            </a:solidFill>
+          </a:ln>
+        </p:spPr>
+        <p:style>
+          <a:lnRef idx="1">
+            <a:schemeClr val="accent1"/>
+          </a:lnRef>
+          <a:fillRef idx="3">
+            <a:schemeClr val="accent1"/>
+          </a:fillRef>
+          <a:effectRef idx="2">
+            <a:schemeClr val="accent1"/>
+          </a:effectRef>
+          <a:fontRef idx="minor">
+            <a:schemeClr val="lt1"/>
+          </a:fontRef>
+        </p:style>
+        <p:txBody>
+          <a:bodyPr wrap="square" rtlCol="0" anchor="ctr"/>
+          <a:lstStyle/>
+          <a:p>
+            <a:pPr algn="ctr">
+              <a:defRPr sz="1100" b="1"/>
+            </a:pPr>
+            <a:r>
+              <a:t>98.73%</a:t>
+            </a:r>
+          </a:p>
+          <a:p>
+            <a:r>
+              <a:t>Success</a:t>
+            </a:r>
+          </a:p>
+        </p:txBody>
+      </p:sp>
+      <p:sp>
+        <p:nvSpPr>
+          <p:cNvPr id="7" name="Rectangle 6"/>
+          <p:cNvSpPr/>
+          <p:nvPr/>
+        </p:nvSpPr>
+        <p:spPr>
+          <a:xfrm>
+            <a:off x="6492240" y="1188720"/>
+            <a:ext cx="2194560" cy="914400"/>
+          </a:xfrm>
+          <a:prstGeom prst="rect">
+            <a:avLst/>
+          </a:prstGeom>
+          <a:solidFill>
+            <a:srgbClr val="CE93D8"/>
+          </a:solidFill>
+          <a:ln w="25400">
+            <a:solidFill>
+              <a:srgbClr val="0099CC"/>
+            </a:solidFill>
+          </a:ln>
+        </p:spPr>
+        <p:style>
+          <a:lnRef idx="1">
+            <a:schemeClr val="accent1"/>
+          </a:lnRef>
+          <a:fillRef idx="3">
+            <a:schemeClr val="accent1"/>
+          </a:fillRef>
+          <a:effectRef idx="2">
+            <a:schemeClr val="accent1"/>
+          </a:effectRef>
+          <a:fontRef idx="minor">
+            <a:schemeClr val="lt1"/>
+          </a:fontRef>
+        </p:style>
+        <p:txBody>
+          <a:bodyPr wrap="square" rtlCol="0" anchor="ctr"/>
+          <a:lstStyle/>
+          <a:p>
+            <a:pPr algn="ctr">
+              <a:defRPr sz="1100" b="1"/>
+            </a:pPr>
+            <a:r>
+              <a:t>30 Minutes</a:t>
+            </a:r>
+          </a:p>
+          <a:p>
+            <a:r>
+              <a:t>Total</a:t>
+            </a:r>
+          </a:p>
+        </p:txBody>
+      </p:sp>
+      <p:sp>
+        <p:nvSpPr>
+          <p:cNvPr id="8" name="TextBox 7"/>
           <p:cNvSpPr txBox="1"/>
           <p:nvPr/>
         </p:nvSpPr>
         <p:spPr>
           <a:xfrm>
-            <a:off x="457200" y="1280160"/>
-            <a:ext cx="8229600" cy="4389120"/>
+            <a:off x="457200" y="2286000"/>
+            <a:ext cx="8229600" cy="3474720"/>
           </a:xfrm>
           <a:prstGeom prst="rect">
             <a:avLst/>
@@ -8004,7 +7133,7 @@
               <a:defRPr sz="1400"/>
             </a:pPr>
             <a:r>
-              <a:t>1,000 Documents/Year (237,000 pages):</a:t>
+              <a:t>Extracted from Real 237-Page Medical Document:</a:t>
             </a:r>
           </a:p>
           <a:p>
@@ -8012,57 +7141,12 @@
           </a:p>
           <a:p>
             <a:r>
-              <a:t>Bedrock (Claude 3.5):      ,270/year</a:t>
-            </a:r>
-          </a:p>
-          <a:p>
-            <a:r>
-              <a:t>Lambda (4 functions):      /year</a:t>
-            </a:r>
-          </a:p>
-          <a:p>
-            <a:r>
-              <a:t>SQS (2 FIFO queues):       /year</a:t>
-            </a:r>
-          </a:p>
-          <a:p>
-            <a:r>
-              <a:t>DynamoDB (7 tables):       /year</a:t>
-            </a:r>
-          </a:p>
-          <a:p>
-            <a:r>
-              <a:t>S3 Storage:                /year</a:t>
-            </a:r>
-          </a:p>
-          <a:p>
-            <a:r>
-              <a:t>API Gateway:               /year</a:t>
-            </a:r>
-          </a:p>
-          <a:p>
-            <a:r>
-              <a:t>Amplify (frontend):        /year</a:t>
-            </a:r>
-          </a:p>
-          <a:p>
-            <a:r>
-              <a:t>──────────────────────────────────────</a:t>
-            </a:r>
-          </a:p>
-          <a:p>
-            <a:r>
-              <a:t>Total Annual Cost:         ,320/year</a:t>
-            </a:r>
-          </a:p>
-          <a:p>
-            <a:r>
-              <a:t>Per Document:              .32</a:t>
-            </a:r>
-          </a:p>
-          <a:p>
-            <a:r>
-              <a:t>Per Page:                  .027</a:t>
+              <a:t>Medications: 220 entries</a:t>
+            </a:r>
+          </a:p>
+          <a:p>
+            <a:r>
+              <a:t>• JARDIANCE 25mg, Triamcinolone, Econazole, Valsartan</a:t>
             </a:r>
           </a:p>
           <a:p>
@@ -8070,7 +7154,12 @@
           </a:p>
           <a:p>
             <a:r>
-              <a:t>Before Optimization:       ,180/year</a:t>
+              <a:t>Diagnoses: 367 entries</a:t>
+            </a:r>
+          </a:p>
+          <a:p>
+            <a:r>
+              <a:t>• Prostate cancer (Gleason 4+4=8), Hypertension, Diabetes</a:t>
             </a:r>
           </a:p>
           <a:p>
@@ -8078,7 +7167,12 @@
           </a:p>
           <a:p>
             <a:r>
-              <a:t>SAVINGS:                   ,860/year (86%)</a:t>
+              <a:t>Test Results: 707 entries</a:t>
+            </a:r>
+          </a:p>
+          <a:p>
+            <a:r>
+              <a:t>• Temperature, HDL Cholesterol, Prostate biopsy</a:t>
             </a:r>
           </a:p>
           <a:p>
@@ -8086,7 +7180,30 @@
           </a:p>
           <a:p>
             <a:r>
-              <a:t>Break-Even: After 100 documents (1.2 months)</a:t>
+              <a:t>Page Categories: 470 classifications</a:t>
+            </a:r>
+          </a:p>
+          <a:p>
+            <a:r>
+              <a:t>• Lab results, Visit notes, Imaging, Prescriptions</a:t>
+            </a:r>
+          </a:p>
+          <a:p>
+            <a:endParaRPr/>
+          </a:p>
+          <a:p>
+            <a:r>
+              <a:t>Processing: Upload 13:08:20, Complete ~30 min</a:t>
+            </a:r>
+          </a:p>
+          <a:p>
+            <a:r>
+              <a:t>Average: 7.6 seconds per page</a:t>
+            </a:r>
+          </a:p>
+          <a:p>
+            <a:r>
+              <a:t>Cost: .31 total (.022/page)</a:t>
             </a:r>
           </a:p>
         </p:txBody>
@@ -8118,32 +7235,13 @@
       </p:grpSpPr>
       <p:sp>
         <p:nvSpPr>
-          <p:cNvPr id="2" name="Title 1"/>
-          <p:cNvSpPr>
-            <a:spLocks noGrp="1"/>
-          </p:cNvSpPr>
-          <p:nvPr>
-            <p:ph type="title"/>
-          </p:nvPr>
-        </p:nvSpPr>
-        <p:spPr/>
-        <p:txBody>
-          <a:bodyPr/>
-          <a:lstStyle/>
-          <a:p>
-            <a:endParaRPr/>
-          </a:p>
-        </p:txBody>
-      </p:sp>
-      <p:sp>
-        <p:nvSpPr>
           <p:cNvPr id="3" name="TextBox 2"/>
           <p:cNvSpPr txBox="1"/>
           <p:nvPr/>
         </p:nvSpPr>
         <p:spPr>
           <a:xfrm>
-            <a:off x="457200" y="274320"/>
+            <a:off x="724830" y="1489803"/>
             <a:ext cx="8229600" cy="731520"/>
           </a:xfrm>
           <a:prstGeom prst="rect">
@@ -8165,7 +7263,7 @@
               </a:defRPr>
             </a:pPr>
             <a:r>
-              <a:t>ROI vs. Manual Data Entry</a:t>
+              <a:t>Conclusion &amp; Recommendations</a:t>
             </a:r>
           </a:p>
         </p:txBody>
@@ -8178,7 +7276,7 @@
         </p:nvSpPr>
         <p:spPr>
           <a:xfrm>
-            <a:off x="457200" y="1280160"/>
+            <a:off x="546409" y="247558"/>
             <a:ext cx="8229600" cy="4389120"/>
           </a:xfrm>
           <a:prstGeom prst="rect">
@@ -8196,22 +7294,7 @@
               <a:defRPr sz="1300"/>
             </a:pPr>
             <a:r>
-              <a:t>Manual Medical Records Entry (Industry):</a:t>
-            </a:r>
-          </a:p>
-          <a:p>
-            <a:r>
-              <a:t>• Cost: .50 - .50 per page</a:t>
-            </a:r>
-          </a:p>
-          <a:p>
-            <a:r>
-              <a:t>• Time: 10-15 minutes per page</a:t>
-            </a:r>
-          </a:p>
-          <a:p>
-            <a:r>
-              <a:t>• 237 pages:  - </a:t>
+              <a:t>Production-Ready Medical Document Processing</a:t>
             </a:r>
           </a:p>
           <a:p>
@@ -8219,22 +7302,27 @@
           </a:p>
           <a:p>
             <a:r>
-              <a:t>HealthAI Automated:</a:t>
-            </a:r>
-          </a:p>
-          <a:p>
-            <a:r>
-              <a:t>• Cost: .022 per page</a:t>
-            </a:r>
-          </a:p>
-          <a:p>
-            <a:r>
-              <a:t>• Time: 7.6 seconds per page</a:t>
-            </a:r>
-          </a:p>
-          <a:p>
-            <a:r>
-              <a:t>• 237 pages: .21</a:t>
+              <a:t>Status: Fully Operational</a:t>
+            </a:r>
+          </a:p>
+          <a:p>
+            <a:r>
+              <a:t>• 98.73% success rate on 237-page document</a:t>
+            </a:r>
+          </a:p>
+          <a:p>
+            <a:r>
+              <a:t>• .022/page (96-98% cheaper than manual)</a:t>
+            </a:r>
+          </a:p>
+          <a:p>
+            <a:r>
+              <a:t>• 7.6 sec/page (99% faster)</a:t>
+            </a:r>
+          </a:p>
+          <a:p>
+            <a:r>
+              <a:t>• 1,294 data points with high accuracy</a:t>
             </a:r>
           </a:p>
           <a:p>
@@ -8242,17 +7330,27 @@
           </a:p>
           <a:p>
             <a:r>
-              <a:t>Savings per Document:</a:t>
-            </a:r>
-          </a:p>
-          <a:p>
-            <a:r>
-              <a:t>• Cost: .79 - .79 (96-98% reduction)</a:t>
-            </a:r>
-          </a:p>
-          <a:p>
-            <a:r>
-              <a:t>• Time: 39.5 - 59 hours → 30 min (99% reduction)</a:t>
+              <a:t>Achievements:</a:t>
+            </a:r>
+          </a:p>
+          <a:p>
+            <a:r>
+              <a:t>✓ 88% cost reduction (.18 → .31)</a:t>
+            </a:r>
+          </a:p>
+          <a:p>
+            <a:r>
+              <a:t>✓ 7x speed improvement (3.5hr → 30min)</a:t>
+            </a:r>
+          </a:p>
+          <a:p>
+            <a:r>
+              <a:t>✓ 95% fewer throttling errors</a:t>
+            </a:r>
+          </a:p>
+          <a:p>
+            <a:r>
+              <a:t>✓ Scalable with Bedrock quota increase</a:t>
             </a:r>
           </a:p>
           <a:p>
@@ -8260,22 +7358,32 @@
           </a:p>
           <a:p>
             <a:r>
-              <a:t>Annual Savings (1,000 docs):</a:t>
-            </a:r>
-          </a:p>
-          <a:p>
-            <a:r>
-              <a:t>• Cost: ,790 - ,790 saved</a:t>
-            </a:r>
-          </a:p>
-          <a:p>
-            <a:r>
-              <a:t>• Time: 39,500 - 59,000 hours → 500 hours</a:t>
-            </a:r>
-          </a:p>
-          <a:p>
-            <a:r>
-              <a:t>• ROI: 1,800% - 5,500%</a:t>
+              <a:t>Recommendations:</a:t>
+            </a:r>
+          </a:p>
+          <a:p>
+            <a:r>
+              <a:t>1. Request Bedrock quota to 100 req/sec</a:t>
+            </a:r>
+          </a:p>
+          <a:p>
+            <a:r>
+              <a:t>2. Sign AWS BAA for HIPAA compliance</a:t>
+            </a:r>
+          </a:p>
+          <a:p>
+            <a:r>
+              <a:t>3. Enable monitoring &amp; alarms</a:t>
+            </a:r>
+          </a:p>
+          <a:p>
+            <a:r>
+              <a:t>4. Implement prompt caching (50% savings)</a:t>
+            </a:r>
+          </a:p>
+          <a:p>
+            <a:r>
+              <a:t>5. Add Cognito authentication</a:t>
             </a:r>
           </a:p>
           <a:p>
@@ -8283,12 +7391,20 @@
           </a:p>
           <a:p>
             <a:r>
-              <a:t>Benefits: Faster care, consistent quality,</a:t>
-            </a:r>
-          </a:p>
-          <a:p>
-            <a:r>
-              <a:t>scalable, audit trail, HIPAA ready</a:t>
+              <a:t>Investment: ,320/year for 1,000 docs</a:t>
+            </a:r>
+          </a:p>
+          <a:p>
+            <a:r>
+              <a:t>ROI: 1,800% - 5,500%</a:t>
+            </a:r>
+          </a:p>
+          <a:p>
+            <a:endParaRPr/>
+          </a:p>
+          <a:p>
+            <a:r>
+              <a:t>Ready for Production! </a:t>
             </a:r>
           </a:p>
         </p:txBody>
